--- a/docs/presentations/20260826_update.pptx
+++ b/docs/presentations/20260826_update.pptx
@@ -515,7 +515,7 @@
           <a:lstStyle/>
           <a:p>
             <a:r>
-              <a:t>Zet de val: het maartcijfer zag er goed uit omdat de meetlat mild was — 3 à 4 jaar tussen metingen dempt de meetruis.</a:t>
+              <a:t>De val: het maartcijfer zag er goed uit omdat de meetlat mild was (3–4 jaar) én omdat één getal per vlak veel verbergt.</a:t>
             </a:r>
           </a:p>
         </p:txBody>
@@ -585,7 +585,7 @@
           <a:lstStyle/>
           <a:p>
             <a:r>
-              <a:t>Dit is de hele presentatie in één plaatje. Alles ervoor is bewijs, alles erna is gevolg.</a:t>
+              <a:t>Dit is de hele presentatie in één plaatje.</a:t>
             </a:r>
           </a:p>
         </p:txBody>
@@ -3747,7 +3747,7 @@
               </a:defRPr>
             </a:pPr>
             <a:r>
-              <a:t>De eerste gok is al ingewisseld</a:t>
+              <a:t>Alles bij elkaar</a:t>
             </a:r>
           </a:p>
         </p:txBody>
@@ -3782,7 +3782,7 @@
               </a:defRPr>
             </a:pPr>
             <a:r>
-              <a:t>Deze week geleverd: kribben landelijk + kunstwerken (bruggen, kades, steigers, sluizen)</a:t>
+              <a:t>Stap voor stap, op één vaste testset — waar zit de winst?</a:t>
             </a:r>
           </a:p>
         </p:txBody>
@@ -3824,7 +3824,7 @@
       </p:sp>
       <p:pic>
         <p:nvPicPr>
-          <p:cNvPr id="5" name="Picture 4" descr="structures_map.png"/>
+          <p:cNvPr id="5" name="Picture 4" descr="matrix.png"/>
           <p:cNvPicPr>
             <a:picLocks noChangeAspect="1"/>
           </p:cNvPicPr>
@@ -3838,8 +3838,8 @@
         </p:blipFill>
         <p:spPr>
           <a:xfrm>
-            <a:off x="548640" y="1463040"/>
-            <a:ext cx="7589520" cy="3921252"/>
+            <a:off x="548640" y="1371600"/>
+            <a:ext cx="11064240" cy="4425696"/>
           </a:xfrm>
           <a:prstGeom prst="rect">
             <a:avLst/>
@@ -3854,8 +3854,8 @@
         </p:nvSpPr>
         <p:spPr>
           <a:xfrm>
-            <a:off x="8321040" y="1737360"/>
-            <a:ext cx="3749039" cy="3657600"/>
+            <a:off x="548640" y="5303520"/>
+            <a:ext cx="11064240" cy="1097280"/>
           </a:xfrm>
           <a:prstGeom prst="rect">
             <a:avLst/>
@@ -3870,61 +3870,31 @@
           <a:p>
             <a:pPr>
               <a:spcAft>
-                <a:spcPts val="600"/>
+                <a:spcPts val="400"/>
               </a:spcAft>
-              <a:defRPr sz="1500" b="0">
+              <a:defRPr sz="1400" b="0">
                 <a:solidFill>
                   <a:srgbClr val="1F3A3D"/>
                 </a:solidFill>
               </a:defRPr>
             </a:pPr>
             <a:r>
-              <a:t>• Kribben: 1.922 → 4.698 bij de scope (IJssel en Maas waren er niet)</a:t>
+              <a:t>• Opschonen: −1,72 m/jr (−43 %) · historie-features: −0,14 · structurenlaag: ±0 (dekking/juistheid) · resolutie: andere eenheid, −0,25 per segment</a:t>
             </a:r>
           </a:p>
           <a:p>
             <a:pPr>
               <a:spcAft>
-                <a:spcPts val="600"/>
+                <a:spcPts val="400"/>
               </a:spcAft>
-              <a:defRPr sz="1500" b="0">
+              <a:defRPr sz="1400" b="1">
                 <a:solidFill>
                   <a:srgbClr val="1F3A3D"/>
                 </a:solidFill>
               </a:defRPr>
             </a:pPr>
             <a:r>
-              <a:t>• Kunstwerken: 6.386 bij de scope, 3.884 gemaskeerd</a:t>
-            </a:r>
-          </a:p>
-          <a:p>
-            <a:pPr>
-              <a:spcAft>
-                <a:spcPts val="600"/>
-              </a:spcAft>
-              <a:defRPr sz="1500" b="0">
-                <a:solidFill>
-                  <a:srgbClr val="1F3A3D"/>
-                </a:solidFill>
-              </a:defRPr>
-            </a:pPr>
-            <a:r>
-              <a:t>• Geen heuristiek meer, maar een laag</a:t>
-            </a:r>
-          </a:p>
-          <a:p>
-            <a:pPr>
-              <a:spcAft>
-                <a:spcPts val="600"/>
-              </a:spcAft>
-              <a:defRPr sz="1500" b="1">
-                <a:solidFill>
-                  <a:srgbClr val="1F3A3D"/>
-                </a:solidFill>
-              </a:defRPr>
-            </a:pPr>
-            <a:r>
-              <a:t>Dit is het patroon: elke aanname vervangen door een feit</a:t>
+              <a:t>Het model was nooit de bottleneck — de labels waren het. En de regels raken op: wat overblijft, kan alleen een mens zien.</a:t>
             </a:r>
           </a:p>
         </p:txBody>
@@ -3977,7 +3947,7 @@
               </a:defRPr>
             </a:pPr>
             <a:r>
-              <a:t>…en het is meteen meetbaar</a:t>
+              <a:t>Scorebord — eerlijk gemeten</a:t>
             </a:r>
           </a:p>
         </p:txBody>
@@ -4012,7 +3982,7 @@
               </a:defRPr>
             </a:pPr>
             <a:r>
-              <a:t>Twee identieke runs, alleen de structurenlaag verschilt</a:t>
+              <a:t>Alleen binnen een rij vergelijken: elke rij is een andere meetlat</a:t>
             </a:r>
           </a:p>
         </p:txBody>
@@ -4048,2907 +4018,6 @@
             </a:pPr>
             <a:r>
               <a:t>Oevererosietool · update 26-08-2026 · 11</a:t>
-            </a:r>
-          </a:p>
-        </p:txBody>
-      </p:sp>
-      <p:pic>
-        <p:nvPicPr>
-          <p:cNvPr id="5" name="Picture 4" descr="structures_effect.png"/>
-          <p:cNvPicPr>
-            <a:picLocks noChangeAspect="1"/>
-          </p:cNvPicPr>
-          <p:nvPr/>
-        </p:nvPicPr>
-        <p:blipFill>
-          <a:blip r:embed="rId2"/>
-          <a:stretch>
-            <a:fillRect/>
-          </a:stretch>
-        </p:blipFill>
-        <p:spPr>
-          <a:xfrm>
-            <a:off x="548640" y="1463040"/>
-            <a:ext cx="6766560" cy="2826577"/>
-          </a:xfrm>
-          <a:prstGeom prst="rect">
-            <a:avLst/>
-          </a:prstGeom>
-        </p:spPr>
-      </p:pic>
-      <p:pic>
-        <p:nvPicPr>
-          <p:cNvPr id="6" name="Picture 5" descr="krib_before_after.png"/>
-          <p:cNvPicPr>
-            <a:picLocks noChangeAspect="1"/>
-          </p:cNvPicPr>
-          <p:nvPr/>
-        </p:nvPicPr>
-        <p:blipFill>
-          <a:blip r:embed="rId3"/>
-          <a:stretch>
-            <a:fillRect/>
-          </a:stretch>
-        </p:blipFill>
-        <p:spPr>
-          <a:xfrm>
-            <a:off x="7498079" y="1554480"/>
-            <a:ext cx="4480560" cy="2667000"/>
-          </a:xfrm>
-          <a:prstGeom prst="rect">
-            <a:avLst/>
-          </a:prstGeom>
-        </p:spPr>
-      </p:pic>
-      <p:sp>
-        <p:nvSpPr>
-          <p:cNvPr id="7" name="TextBox 6"/>
-          <p:cNvSpPr txBox="1"/>
-          <p:nvPr/>
-        </p:nvSpPr>
-        <p:spPr>
-          <a:xfrm>
-            <a:off x="548640" y="4572000"/>
-            <a:ext cx="6766560" cy="1645920"/>
-          </a:xfrm>
-          <a:prstGeom prst="rect">
-            <a:avLst/>
-          </a:prstGeom>
-          <a:noFill/>
-        </p:spPr>
-        <p:txBody>
-          <a:bodyPr wrap="square">
-            <a:spAutoFit/>
-          </a:bodyPr>
-          <a:lstStyle/>
-          <a:p>
-            <a:pPr>
-              <a:spcAft>
-                <a:spcPts val="600"/>
-              </a:spcAft>
-              <a:defRPr sz="1400" b="0">
-                <a:solidFill>
-                  <a:srgbClr val="1F3A3D"/>
-                </a:solidFill>
-              </a:defRPr>
-            </a:pPr>
-            <a:r>
-              <a:t>• Risicogevallen: 5,9 → 5,0 m/jr (−15 %)</a:t>
-            </a:r>
-          </a:p>
-          <a:p>
-            <a:pPr>
-              <a:spcAft>
-                <a:spcPts val="600"/>
-              </a:spcAft>
-              <a:defRPr sz="1400" b="0">
-                <a:solidFill>
-                  <a:srgbClr val="1F3A3D"/>
-                </a:solidFill>
-              </a:defRPr>
-            </a:pPr>
-            <a:r>
-              <a:t>• 224 vlakken vallen af: hun 'oever' wás een constructie</a:t>
-            </a:r>
-          </a:p>
-          <a:p>
-            <a:pPr>
-              <a:spcAft>
-                <a:spcPts val="600"/>
-              </a:spcAft>
-              <a:defRPr sz="1400" b="0">
-                <a:solidFill>
-                  <a:srgbClr val="1F3A3D"/>
-                </a:solidFill>
-              </a:defRPr>
-            </a:pPr>
-            <a:r>
-              <a:t>• Segmentmodel bewoog niet (1,15 → 1,24): binnen de spreiding tussen splits</a:t>
-            </a:r>
-          </a:p>
-        </p:txBody>
-      </p:sp>
-      <p:sp>
-        <p:nvSpPr>
-          <p:cNvPr id="8" name="TextBox 7"/>
-          <p:cNvSpPr txBox="1"/>
-          <p:nvPr/>
-        </p:nvSpPr>
-        <p:spPr>
-          <a:xfrm>
-            <a:off x="7498079" y="4572000"/>
-            <a:ext cx="4480560" cy="548640"/>
-          </a:xfrm>
-          <a:prstGeom prst="rect">
-            <a:avLst/>
-          </a:prstGeom>
-          <a:noFill/>
-        </p:spPr>
-        <p:txBody>
-          <a:bodyPr wrap="square">
-            <a:spAutoFit/>
-          </a:bodyPr>
-          <a:lstStyle/>
-          <a:p>
-            <a:pPr>
-              <a:defRPr sz="1100" i="1">
-                <a:solidFill>
-                  <a:srgbClr val="6B7778"/>
-                </a:solidFill>
-              </a:defRPr>
-            </a:pPr>
-            <a:r>
-              <a:t>Nederrijn: kribvak vóór (links) en ná (rechts) het 10 m-masker — groen = gemeten lijnen, paars = signaleringslijn</a:t>
-            </a:r>
-          </a:p>
-        </p:txBody>
-      </p:sp>
-    </p:spTree>
-  </p:cSld>
-  <p:clrMapOvr>
-    <a:masterClrMapping/>
-  </p:clrMapOvr>
-</p:sld>
-</file>
-
-<file path=ppt/slides/slide12.xml><?xml version="1.0" encoding="utf-8"?>
-<p:sld xmlns:a="http://schemas.openxmlformats.org/drawingml/2006/main" xmlns:p="http://schemas.openxmlformats.org/presentationml/2006/main" xmlns:r="http://schemas.openxmlformats.org/officeDocument/2006/relationships">
-  <p:cSld>
-    <p:spTree>
-      <p:nvGrpSpPr>
-        <p:cNvPr id="1" name=""/>
-        <p:cNvGrpSpPr/>
-        <p:nvPr/>
-      </p:nvGrpSpPr>
-      <p:grpSpPr/>
-      <p:sp>
-        <p:nvSpPr>
-          <p:cNvPr id="2" name="TextBox 1"/>
-          <p:cNvSpPr txBox="1"/>
-          <p:nvPr/>
-        </p:nvSpPr>
-        <p:spPr>
-          <a:xfrm>
-            <a:off x="548640" y="320040"/>
-            <a:ext cx="10972800" cy="731520"/>
-          </a:xfrm>
-          <a:prstGeom prst="rect">
-            <a:avLst/>
-          </a:prstGeom>
-          <a:noFill/>
-        </p:spPr>
-        <p:txBody>
-          <a:bodyPr wrap="none">
-            <a:spAutoFit/>
-          </a:bodyPr>
-          <a:lstStyle/>
-          <a:p>
-            <a:pPr>
-              <a:defRPr sz="3000" b="1">
-                <a:solidFill>
-                  <a:srgbClr val="2BB5A6"/>
-                </a:solidFill>
-              </a:defRPr>
-            </a:pPr>
-            <a:r>
-              <a:t>Wat we vragen</a:t>
-            </a:r>
-          </a:p>
-        </p:txBody>
-      </p:sp>
-      <p:sp>
-        <p:nvSpPr>
-          <p:cNvPr id="3" name="TextBox 2"/>
-          <p:cNvSpPr txBox="1"/>
-          <p:nvPr/>
-        </p:nvSpPr>
-        <p:spPr>
-          <a:xfrm>
-            <a:off x="548640" y="960120"/>
-            <a:ext cx="10972800" cy="548640"/>
-          </a:xfrm>
-          <a:prstGeom prst="rect">
-            <a:avLst/>
-          </a:prstGeom>
-          <a:noFill/>
-        </p:spPr>
-        <p:txBody>
-          <a:bodyPr wrap="none">
-            <a:spAutoFit/>
-          </a:bodyPr>
-          <a:lstStyle/>
-          <a:p>
-            <a:pPr>
-              <a:defRPr sz="1700">
-                <a:solidFill>
-                  <a:srgbClr val="1F3A3D"/>
-                </a:solidFill>
-              </a:defRPr>
-            </a:pPr>
-            <a:r>
-              <a:t>Labelen is trial-and-error — geen eenmalige levering</a:t>
-            </a:r>
-          </a:p>
-        </p:txBody>
-      </p:sp>
-      <p:sp>
-        <p:nvSpPr>
-          <p:cNvPr id="4" name="TextBox 3"/>
-          <p:cNvSpPr txBox="1"/>
-          <p:nvPr/>
-        </p:nvSpPr>
-        <p:spPr>
-          <a:xfrm>
-            <a:off x="548640" y="6400800"/>
-            <a:ext cx="10972800" cy="274320"/>
-          </a:xfrm>
-          <a:prstGeom prst="rect">
-            <a:avLst/>
-          </a:prstGeom>
-          <a:noFill/>
-        </p:spPr>
-        <p:txBody>
-          <a:bodyPr wrap="none">
-            <a:spAutoFit/>
-          </a:bodyPr>
-          <a:lstStyle/>
-          <a:p>
-            <a:pPr>
-              <a:defRPr sz="1000">
-                <a:solidFill>
-                  <a:srgbClr val="6B7778"/>
-                </a:solidFill>
-              </a:defRPr>
-            </a:pPr>
-            <a:r>
-              <a:t>Oevererosietool · update 26-08-2026 · 12</a:t>
-            </a:r>
-          </a:p>
-        </p:txBody>
-      </p:sp>
-      <p:sp>
-        <p:nvSpPr>
-          <p:cNvPr id="5" name="Rectangle 4"/>
-          <p:cNvSpPr/>
-          <p:nvPr/>
-        </p:nvSpPr>
-        <p:spPr>
-          <a:xfrm>
-            <a:off x="548640" y="1645920"/>
-            <a:ext cx="3566160" cy="548640"/>
-          </a:xfrm>
-          <a:prstGeom prst="rect">
-            <a:avLst/>
-          </a:prstGeom>
-          <a:solidFill>
-            <a:srgbClr val="2BB5A6"/>
-          </a:solidFill>
-          <a:ln>
-            <a:noFill/>
-          </a:ln>
-        </p:spPr>
-        <p:style>
-          <a:lnRef idx="1">
-            <a:schemeClr val="accent1"/>
-          </a:lnRef>
-          <a:fillRef idx="3">
-            <a:schemeClr val="accent1"/>
-          </a:fillRef>
-          <a:effectRef idx="2">
-            <a:schemeClr val="accent1"/>
-          </a:effectRef>
-          <a:fontRef idx="minor">
-            <a:schemeClr val="lt1"/>
-          </a:fontRef>
-        </p:style>
-        <p:txBody>
-          <a:bodyPr rtlCol="0" anchor="ctr"/>
-          <a:lstStyle/>
-          <a:p>
-            <a:pPr algn="ctr">
-              <a:defRPr sz="1800" b="1">
-                <a:solidFill>
-                  <a:srgbClr val="FFFFFF"/>
-                </a:solidFill>
-              </a:defRPr>
-            </a:pPr>
-            <a:r>
-              <a:t>Hoogtemodel-engineers</a:t>
-            </a:r>
-          </a:p>
-        </p:txBody>
-      </p:sp>
-      <p:sp>
-        <p:nvSpPr>
-          <p:cNvPr id="6" name="TextBox 5"/>
-          <p:cNvSpPr txBox="1"/>
-          <p:nvPr/>
-        </p:nvSpPr>
-        <p:spPr>
-          <a:xfrm>
-            <a:off x="548640" y="2377440"/>
-            <a:ext cx="3566160" cy="3474720"/>
-          </a:xfrm>
-          <a:prstGeom prst="rect">
-            <a:avLst/>
-          </a:prstGeom>
-          <a:noFill/>
-        </p:spPr>
-        <p:txBody>
-          <a:bodyPr wrap="square">
-            <a:spAutoFit/>
-          </a:bodyPr>
-          <a:lstStyle/>
-          <a:p>
-            <a:pPr>
-              <a:spcAft>
-                <a:spcPts val="600"/>
-              </a:spcAft>
-              <a:defRPr sz="1500" b="0">
-                <a:solidFill>
-                  <a:srgbClr val="1F3A3D"/>
-                </a:solidFill>
-              </a:defRPr>
-            </a:pPr>
-            <a:r>
-              <a:t>• De vijfdeling (scope_coverage) meeleveren</a:t>
-            </a:r>
-          </a:p>
-          <a:p>
-            <a:pPr>
-              <a:spcAft>
-                <a:spcPts val="600"/>
-              </a:spcAft>
-              <a:defRPr sz="1500" b="0">
-                <a:solidFill>
-                  <a:srgbClr val="1F3A3D"/>
-                </a:solidFill>
-              </a:defRPr>
-            </a:pPr>
-            <a:r>
-              <a:t>• Per lijn een vlag: 'dit is een constructie / verkeerde oever'</a:t>
-            </a:r>
-          </a:p>
-          <a:p>
-            <a:pPr>
-              <a:spcAft>
-                <a:spcPts val="600"/>
-              </a:spcAft>
-              <a:defRPr sz="1500" b="0">
-                <a:solidFill>
-                  <a:srgbClr val="1F3A3D"/>
-                </a:solidFill>
-              </a:defRPr>
-            </a:pPr>
-            <a:r>
-              <a:t>• Bekende randgevallen: meeroeverig, hoogwater</a:t>
-            </a:r>
-          </a:p>
-        </p:txBody>
-      </p:sp>
-      <p:sp>
-        <p:nvSpPr>
-          <p:cNvPr id="7" name="Rectangle 6"/>
-          <p:cNvSpPr/>
-          <p:nvPr/>
-        </p:nvSpPr>
-        <p:spPr>
-          <a:xfrm>
-            <a:off x="4389120" y="1645920"/>
-            <a:ext cx="3566160" cy="548640"/>
-          </a:xfrm>
-          <a:prstGeom prst="rect">
-            <a:avLst/>
-          </a:prstGeom>
-          <a:solidFill>
-            <a:srgbClr val="2BB5A6"/>
-          </a:solidFill>
-          <a:ln>
-            <a:noFill/>
-          </a:ln>
-        </p:spPr>
-        <p:style>
-          <a:lnRef idx="1">
-            <a:schemeClr val="accent1"/>
-          </a:lnRef>
-          <a:fillRef idx="3">
-            <a:schemeClr val="accent1"/>
-          </a:fillRef>
-          <a:effectRef idx="2">
-            <a:schemeClr val="accent1"/>
-          </a:effectRef>
-          <a:fontRef idx="minor">
-            <a:schemeClr val="lt1"/>
-          </a:fontRef>
-        </p:style>
-        <p:txBody>
-          <a:bodyPr rtlCol="0" anchor="ctr"/>
-          <a:lstStyle/>
-          <a:p>
-            <a:pPr algn="ctr">
-              <a:defRPr sz="1800" b="1">
-                <a:solidFill>
-                  <a:srgbClr val="FFFFFF"/>
-                </a:solidFill>
-              </a:defRPr>
-            </a:pPr>
-            <a:r>
-              <a:t>SAM-engineers</a:t>
-            </a:r>
-          </a:p>
-        </p:txBody>
-      </p:sp>
-      <p:sp>
-        <p:nvSpPr>
-          <p:cNvPr id="8" name="TextBox 7"/>
-          <p:cNvSpPr txBox="1"/>
-          <p:nvPr/>
-        </p:nvSpPr>
-        <p:spPr>
-          <a:xfrm>
-            <a:off x="4389120" y="2377440"/>
-            <a:ext cx="3566160" cy="3474720"/>
-          </a:xfrm>
-          <a:prstGeom prst="rect">
-            <a:avLst/>
-          </a:prstGeom>
-          <a:noFill/>
-        </p:spPr>
-        <p:txBody>
-          <a:bodyPr wrap="square">
-            <a:spAutoFit/>
-          </a:bodyPr>
-          <a:lstStyle/>
-          <a:p>
-            <a:pPr>
-              <a:spcAft>
-                <a:spcPts val="600"/>
-              </a:spcAft>
-              <a:defRPr sz="1500" b="0">
-                <a:solidFill>
-                  <a:srgbClr val="1F3A3D"/>
-                </a:solidFill>
-              </a:defRPr>
-            </a:pPr>
-            <a:r>
-              <a:t>• Kwaliteitsvlag per meting</a:t>
-            </a:r>
-          </a:p>
-          <a:p>
-            <a:pPr>
-              <a:spcAft>
-                <a:spcPts val="600"/>
-              </a:spcAft>
-              <a:defRPr sz="1500" b="0">
-                <a:solidFill>
-                  <a:srgbClr val="1F3A3D"/>
-                </a:solidFill>
-              </a:defRPr>
-            </a:pPr>
-            <a:r>
-              <a:t>• Vooral: méér jaren — elk jaar maakt het model vanzelf beter</a:t>
-            </a:r>
-          </a:p>
-          <a:p>
-            <a:pPr>
-              <a:spcAft>
-                <a:spcPts val="600"/>
-              </a:spcAft>
-              <a:defRPr sz="1500" b="0">
-                <a:solidFill>
-                  <a:srgbClr val="1F3A3D"/>
-                </a:solidFill>
-              </a:defRPr>
-            </a:pPr>
-            <a:r>
-              <a:t>• Waar mogelijk: één lijn per meetmoment</a:t>
-            </a:r>
-          </a:p>
-        </p:txBody>
-      </p:sp>
-      <p:sp>
-        <p:nvSpPr>
-          <p:cNvPr id="9" name="Rectangle 8"/>
-          <p:cNvSpPr/>
-          <p:nvPr/>
-        </p:nvSpPr>
-        <p:spPr>
-          <a:xfrm>
-            <a:off x="8229600" y="1645920"/>
-            <a:ext cx="3566160" cy="548640"/>
-          </a:xfrm>
-          <a:prstGeom prst="rect">
-            <a:avLst/>
-          </a:prstGeom>
-          <a:solidFill>
-            <a:srgbClr val="E07A3F"/>
-          </a:solidFill>
-          <a:ln>
-            <a:noFill/>
-          </a:ln>
-        </p:spPr>
-        <p:style>
-          <a:lnRef idx="1">
-            <a:schemeClr val="accent1"/>
-          </a:lnRef>
-          <a:fillRef idx="3">
-            <a:schemeClr val="accent1"/>
-          </a:fillRef>
-          <a:effectRef idx="2">
-            <a:schemeClr val="accent1"/>
-          </a:effectRef>
-          <a:fontRef idx="minor">
-            <a:schemeClr val="lt1"/>
-          </a:fontRef>
-        </p:style>
-        <p:txBody>
-          <a:bodyPr rtlCol="0" anchor="ctr"/>
-          <a:lstStyle/>
-          <a:p>
-            <a:pPr algn="ctr">
-              <a:defRPr sz="1800" b="1">
-                <a:solidFill>
-                  <a:srgbClr val="FFFFFF"/>
-                </a:solidFill>
-              </a:defRPr>
-            </a:pPr>
-            <a:r>
-              <a:t>Samen</a:t>
-            </a:r>
-          </a:p>
-        </p:txBody>
-      </p:sp>
-      <p:sp>
-        <p:nvSpPr>
-          <p:cNvPr id="10" name="TextBox 9"/>
-          <p:cNvSpPr txBox="1"/>
-          <p:nvPr/>
-        </p:nvSpPr>
-        <p:spPr>
-          <a:xfrm>
-            <a:off x="8229600" y="2377440"/>
-            <a:ext cx="3566160" cy="3474720"/>
-          </a:xfrm>
-          <a:prstGeom prst="rect">
-            <a:avLst/>
-          </a:prstGeom>
-          <a:noFill/>
-        </p:spPr>
-        <p:txBody>
-          <a:bodyPr wrap="square">
-            <a:spAutoFit/>
-          </a:bodyPr>
-          <a:lstStyle/>
-          <a:p>
-            <a:pPr>
-              <a:spcAft>
-                <a:spcPts val="600"/>
-              </a:spcAft>
-              <a:defRPr sz="1500" b="0">
-                <a:solidFill>
-                  <a:srgbClr val="1F3A3D"/>
-                </a:solidFill>
-              </a:defRPr>
-            </a:pPr>
-            <a:r>
-              <a:t>• Labelronde in QGIS: wij leveren de gesorteerde lijst twijfelgevallen, jullie het oordeel</a:t>
-            </a:r>
-          </a:p>
-          <a:p>
-            <a:pPr>
-              <a:spcAft>
-                <a:spcPts val="600"/>
-              </a:spcAft>
-              <a:defRPr sz="1500" b="0">
-                <a:solidFill>
-                  <a:srgbClr val="1F3A3D"/>
-                </a:solidFill>
-              </a:defRPr>
-            </a:pPr>
-            <a:r>
-              <a:t>• Eerste ronde: ~200 vlakken, twee uur</a:t>
-            </a:r>
-          </a:p>
-          <a:p>
-            <a:pPr>
-              <a:spcAft>
-                <a:spcPts val="600"/>
-              </a:spcAft>
-              <a:defRPr sz="1500" b="0">
-                <a:solidFill>
-                  <a:srgbClr val="1F3A3D"/>
-                </a:solidFill>
-              </a:defRPr>
-            </a:pPr>
-            <a:r>
-              <a:t>• Daarna meten we opnieuw — en zien we hoe ver opschonen alleen komt</a:t>
-            </a:r>
-          </a:p>
-        </p:txBody>
-      </p:sp>
-    </p:spTree>
-  </p:cSld>
-  <p:clrMapOvr>
-    <a:masterClrMapping/>
-  </p:clrMapOvr>
-</p:sld>
-</file>
-
-<file path=ppt/slides/slide13.xml><?xml version="1.0" encoding="utf-8"?>
-<p:sld xmlns:a="http://schemas.openxmlformats.org/drawingml/2006/main" xmlns:p="http://schemas.openxmlformats.org/presentationml/2006/main" xmlns:r="http://schemas.openxmlformats.org/officeDocument/2006/relationships">
-  <p:cSld>
-    <p:spTree>
-      <p:nvGrpSpPr>
-        <p:cNvPr id="1" name=""/>
-        <p:cNvGrpSpPr/>
-        <p:nvPr/>
-      </p:nvGrpSpPr>
-      <p:grpSpPr/>
-      <p:sp>
-        <p:nvSpPr>
-          <p:cNvPr id="2" name="TextBox 1"/>
-          <p:cNvSpPr txBox="1"/>
-          <p:nvPr/>
-        </p:nvSpPr>
-        <p:spPr>
-          <a:xfrm>
-            <a:off x="548640" y="320040"/>
-            <a:ext cx="10972800" cy="731520"/>
-          </a:xfrm>
-          <a:prstGeom prst="rect">
-            <a:avLst/>
-          </a:prstGeom>
-          <a:noFill/>
-        </p:spPr>
-        <p:txBody>
-          <a:bodyPr wrap="none">
-            <a:spAutoFit/>
-          </a:bodyPr>
-          <a:lstStyle/>
-          <a:p>
-            <a:pPr>
-              <a:defRPr sz="3000" b="1">
-                <a:solidFill>
-                  <a:srgbClr val="2BB5A6"/>
-                </a:solidFill>
-              </a:defRPr>
-            </a:pPr>
-            <a:r>
-              <a:t>Wat dit oplevert voor asset management</a:t>
-            </a:r>
-          </a:p>
-        </p:txBody>
-      </p:sp>
-      <p:sp>
-        <p:nvSpPr>
-          <p:cNvPr id="3" name="TextBox 2"/>
-          <p:cNvSpPr txBox="1"/>
-          <p:nvPr/>
-        </p:nvSpPr>
-        <p:spPr>
-          <a:xfrm>
-            <a:off x="548640" y="960120"/>
-            <a:ext cx="10972800" cy="548640"/>
-          </a:xfrm>
-          <a:prstGeom prst="rect">
-            <a:avLst/>
-          </a:prstGeom>
-          <a:noFill/>
-        </p:spPr>
-        <p:txBody>
-          <a:bodyPr wrap="none">
-            <a:spAutoFit/>
-          </a:bodyPr>
-          <a:lstStyle/>
-          <a:p>
-            <a:pPr>
-              <a:defRPr sz="1700">
-                <a:solidFill>
-                  <a:srgbClr val="1F3A3D"/>
-                </a:solidFill>
-              </a:defRPr>
-            </a:pPr>
-            <a:r>
-              <a:t>Van 'dit vlak gemiddeld' naar 'deze 20 meter'</a:t>
-            </a:r>
-          </a:p>
-        </p:txBody>
-      </p:sp>
-      <p:sp>
-        <p:nvSpPr>
-          <p:cNvPr id="4" name="TextBox 3"/>
-          <p:cNvSpPr txBox="1"/>
-          <p:nvPr/>
-        </p:nvSpPr>
-        <p:spPr>
-          <a:xfrm>
-            <a:off x="548640" y="6400800"/>
-            <a:ext cx="10972800" cy="274320"/>
-          </a:xfrm>
-          <a:prstGeom prst="rect">
-            <a:avLst/>
-          </a:prstGeom>
-          <a:noFill/>
-        </p:spPr>
-        <p:txBody>
-          <a:bodyPr wrap="none">
-            <a:spAutoFit/>
-          </a:bodyPr>
-          <a:lstStyle/>
-          <a:p>
-            <a:pPr>
-              <a:defRPr sz="1000">
-                <a:solidFill>
-                  <a:srgbClr val="6B7778"/>
-                </a:solidFill>
-              </a:defRPr>
-            </a:pPr>
-            <a:r>
-              <a:t>Oevererosietool · update 26-08-2026 · 13</a:t>
-            </a:r>
-          </a:p>
-        </p:txBody>
-      </p:sp>
-      <p:pic>
-        <p:nvPicPr>
-          <p:cNvPr id="5" name="Picture 4" descr="r5_rijn_1220.png"/>
-          <p:cNvPicPr>
-            <a:picLocks noChangeAspect="1"/>
-          </p:cNvPicPr>
-          <p:nvPr/>
-        </p:nvPicPr>
-        <p:blipFill>
-          <a:blip r:embed="rId2"/>
-          <a:stretch>
-            <a:fillRect/>
-          </a:stretch>
-        </p:blipFill>
-        <p:spPr>
-          <a:xfrm>
-            <a:off x="548640" y="1554480"/>
-            <a:ext cx="3388524" cy="4480560"/>
-          </a:xfrm>
-          <a:prstGeom prst="rect">
-            <a:avLst/>
-          </a:prstGeom>
-        </p:spPr>
-      </p:pic>
-      <p:sp>
-        <p:nvSpPr>
-          <p:cNvPr id="6" name="TextBox 5"/>
-          <p:cNvSpPr txBox="1"/>
-          <p:nvPr/>
-        </p:nvSpPr>
-        <p:spPr>
-          <a:xfrm>
-            <a:off x="5120640" y="1737360"/>
-            <a:ext cx="6858000" cy="4114800"/>
-          </a:xfrm>
-          <a:prstGeom prst="rect">
-            <a:avLst/>
-          </a:prstGeom>
-          <a:noFill/>
-        </p:spPr>
-        <p:txBody>
-          <a:bodyPr wrap="square">
-            <a:spAutoFit/>
-          </a:bodyPr>
-          <a:lstStyle/>
-          <a:p>
-            <a:pPr>
-              <a:spcAft>
-                <a:spcPts val="600"/>
-              </a:spcAft>
-              <a:defRPr sz="1500" b="0">
-                <a:solidFill>
-                  <a:srgbClr val="1F3A3D"/>
-                </a:solidFill>
-              </a:defRPr>
-            </a:pPr>
-            <a:r>
-              <a:t>• Per segment een verwachte positie ≥ 2 jaar vooruit (48.000 segmenten, 10.000 vlakken)</a:t>
-            </a:r>
-          </a:p>
-          <a:p>
-            <a:pPr>
-              <a:spcAft>
-                <a:spcPts val="600"/>
-              </a:spcAft>
-              <a:defRPr sz="1500" b="0">
-                <a:solidFill>
-                  <a:srgbClr val="1F3A3D"/>
-                </a:solidFill>
-              </a:defRPr>
-            </a:pPr>
-            <a:r>
-              <a:t>• Een vlak kleurt rood zodra énig segment de signaleringslijn nadert — met het segment erbij</a:t>
-            </a:r>
-          </a:p>
-          <a:p>
-            <a:pPr>
-              <a:spcAft>
-                <a:spcPts val="600"/>
-              </a:spcAft>
-              <a:defRPr sz="1500" b="0">
-                <a:solidFill>
-                  <a:srgbClr val="1F3A3D"/>
-                </a:solidFill>
-              </a:defRPr>
-            </a:pPr>
-            <a:r>
-              <a:t>• Kribvakken en meerdelige vlakken worden daarmee vanzelf goed behandeld</a:t>
-            </a:r>
-          </a:p>
-          <a:p>
-            <a:pPr>
-              <a:spcAft>
-                <a:spcPts val="600"/>
-              </a:spcAft>
-              <a:defRPr sz="1500" b="0">
-                <a:solidFill>
-                  <a:srgbClr val="1F3A3D"/>
-                </a:solidFill>
-              </a:defRPr>
-            </a:pPr>
-            <a:r>
-              <a:t>• Bestaande stoplicht-kaart en tijdslider blijven; dit komt er als laag bij</a:t>
-            </a:r>
-          </a:p>
-          <a:p>
-            <a:pPr>
-              <a:spcAft>
-                <a:spcPts val="600"/>
-              </a:spcAft>
-              <a:defRPr sz="1500" b="1">
-                <a:solidFill>
-                  <a:srgbClr val="1F3A3D"/>
-                </a:solidFill>
-              </a:defRPr>
-            </a:pPr>
-            <a:r>
-              <a:t>Status: segmentvoorspellingen staan klaar; koppeling aan het VVR-alarm is de volgende stap</a:t>
-            </a:r>
-          </a:p>
-        </p:txBody>
-      </p:sp>
-    </p:spTree>
-  </p:cSld>
-  <p:clrMapOvr>
-    <a:masterClrMapping/>
-  </p:clrMapOvr>
-</p:sld>
-</file>
-
-<file path=ppt/slides/slide14.xml><?xml version="1.0" encoding="utf-8"?>
-<p:sld xmlns:a="http://schemas.openxmlformats.org/drawingml/2006/main" xmlns:p="http://schemas.openxmlformats.org/presentationml/2006/main" xmlns:r="http://schemas.openxmlformats.org/officeDocument/2006/relationships">
-  <p:cSld>
-    <p:spTree>
-      <p:nvGrpSpPr>
-        <p:cNvPr id="1" name=""/>
-        <p:cNvGrpSpPr/>
-        <p:nvPr/>
-      </p:nvGrpSpPr>
-      <p:grpSpPr/>
-      <p:sp>
-        <p:nvSpPr>
-          <p:cNvPr id="2" name="TextBox 1"/>
-          <p:cNvSpPr txBox="1"/>
-          <p:nvPr/>
-        </p:nvSpPr>
-        <p:spPr>
-          <a:xfrm>
-            <a:off x="548640" y="320040"/>
-            <a:ext cx="10972800" cy="731520"/>
-          </a:xfrm>
-          <a:prstGeom prst="rect">
-            <a:avLst/>
-          </a:prstGeom>
-          <a:noFill/>
-        </p:spPr>
-        <p:txBody>
-          <a:bodyPr wrap="none">
-            <a:spAutoFit/>
-          </a:bodyPr>
-          <a:lstStyle/>
-          <a:p>
-            <a:pPr>
-              <a:defRPr sz="3000" b="1">
-                <a:solidFill>
-                  <a:srgbClr val="2BB5A6"/>
-                </a:solidFill>
-              </a:defRPr>
-            </a:pPr>
-            <a:r>
-              <a:t>Samenvattend</a:t>
-            </a:r>
-          </a:p>
-        </p:txBody>
-      </p:sp>
-      <p:sp>
-        <p:nvSpPr>
-          <p:cNvPr id="3" name="TextBox 2"/>
-          <p:cNvSpPr txBox="1"/>
-          <p:nvPr/>
-        </p:nvSpPr>
-        <p:spPr>
-          <a:xfrm>
-            <a:off x="548640" y="6400800"/>
-            <a:ext cx="10972800" cy="274320"/>
-          </a:xfrm>
-          <a:prstGeom prst="rect">
-            <a:avLst/>
-          </a:prstGeom>
-          <a:noFill/>
-        </p:spPr>
-        <p:txBody>
-          <a:bodyPr wrap="none">
-            <a:spAutoFit/>
-          </a:bodyPr>
-          <a:lstStyle/>
-          <a:p>
-            <a:pPr>
-              <a:defRPr sz="1000">
-                <a:solidFill>
-                  <a:srgbClr val="6B7778"/>
-                </a:solidFill>
-              </a:defRPr>
-            </a:pPr>
-            <a:r>
-              <a:t>Oevererosietool · update 26-08-2026 · 14</a:t>
-            </a:r>
-          </a:p>
-        </p:txBody>
-      </p:sp>
-      <p:sp>
-        <p:nvSpPr>
-          <p:cNvPr id="4" name="TextBox 3"/>
-          <p:cNvSpPr txBox="1"/>
-          <p:nvPr/>
-        </p:nvSpPr>
-        <p:spPr>
-          <a:xfrm>
-            <a:off x="548640" y="1463040"/>
-            <a:ext cx="10972800" cy="4754880"/>
-          </a:xfrm>
-          <a:prstGeom prst="rect">
-            <a:avLst/>
-          </a:prstGeom>
-          <a:noFill/>
-        </p:spPr>
-        <p:txBody>
-          <a:bodyPr wrap="square">
-            <a:spAutoFit/>
-          </a:bodyPr>
-          <a:lstStyle/>
-          <a:p>
-            <a:pPr>
-              <a:spcAft>
-                <a:spcPts val="800"/>
-              </a:spcAft>
-              <a:defRPr sz="1800" b="1">
-                <a:solidFill>
-                  <a:srgbClr val="1F3A3D"/>
-                </a:solidFill>
-              </a:defRPr>
-            </a:pPr>
-            <a:r>
-              <a:t>Model: klaar en eerlijk gevalideerd</a:t>
-            </a:r>
-          </a:p>
-          <a:p>
-            <a:pPr>
-              <a:spcAft>
-                <a:spcPts val="800"/>
-              </a:spcAft>
-              <a:defRPr sz="1800" b="0">
-                <a:solidFill>
-                  <a:srgbClr val="1F3A3D"/>
-                </a:solidFill>
-              </a:defRPr>
-            </a:pPr>
-            <a:r>
-              <a:t>• Hybride bron, opschoonregels, historie-features, testset buiten de training</a:t>
-            </a:r>
-          </a:p>
-          <a:p>
-            <a:pPr>
-              <a:spcAft>
-                <a:spcPts val="800"/>
-              </a:spcAft>
-              <a:defRPr sz="1800" b="1">
-                <a:solidFill>
-                  <a:srgbClr val="1F3A3D"/>
-                </a:solidFill>
-              </a:defRPr>
-            </a:pPr>
-            <a:r>
-              <a:t>Van lijn naar oever</a:t>
-            </a:r>
-          </a:p>
-          <a:p>
-            <a:pPr>
-              <a:spcAft>
-                <a:spcPts val="800"/>
-              </a:spcAft>
-              <a:defRPr sz="1800" b="0">
-                <a:solidFill>
-                  <a:srgbClr val="1F3A3D"/>
-                </a:solidFill>
-              </a:defRPr>
-            </a:pPr>
-            <a:r>
-              <a:t>• Vijf segmenten per vlak; gemeten én voorspelde oever als lijn; positiefout ≈ 1 m</a:t>
-            </a:r>
-          </a:p>
-          <a:p>
-            <a:pPr>
-              <a:spcAft>
-                <a:spcPts val="800"/>
-              </a:spcAft>
-              <a:defRPr sz="1800" b="1">
-                <a:solidFill>
-                  <a:srgbClr val="1F3A3D"/>
-                </a:solidFill>
-              </a:defRPr>
-            </a:pPr>
-            <a:r>
-              <a:t>Bottleneck: gelabelde input, niet het algoritme</a:t>
-            </a:r>
-          </a:p>
-          <a:p>
-            <a:pPr>
-              <a:spcAft>
-                <a:spcPts val="800"/>
-              </a:spcAft>
-              <a:defRPr sz="1800" b="0">
-                <a:solidFill>
-                  <a:srgbClr val="1F3A3D"/>
-                </a:solidFill>
-              </a:defRPr>
-            </a:pPr>
-            <a:r>
-              <a:t>• Opschonen leverde 3× zoveel als modelleren; elke regel is een gok die jullie zeker weten</a:t>
-            </a:r>
-          </a:p>
-          <a:p>
-            <a:pPr>
-              <a:spcAft>
-                <a:spcPts val="800"/>
-              </a:spcAft>
-              <a:defRPr sz="1800" b="1">
-                <a:solidFill>
-                  <a:srgbClr val="1F3A3D"/>
-                </a:solidFill>
-              </a:defRPr>
-            </a:pPr>
-            <a:r>
-              <a:t>Volgende stap</a:t>
-            </a:r>
-          </a:p>
-          <a:p>
-            <a:pPr>
-              <a:spcAft>
-                <a:spcPts val="800"/>
-              </a:spcAft>
-              <a:defRPr sz="1800" b="0">
-                <a:solidFill>
-                  <a:srgbClr val="1F3A3D"/>
-                </a:solidFill>
-              </a:defRPr>
-            </a:pPr>
-            <a:r>
-              <a:t>• Labelronde met SAM- en hoogtemodel-engineers · VVR-alarm op segmentniveau · daarna opnieuw meten</a:t>
-            </a:r>
-          </a:p>
-        </p:txBody>
-      </p:sp>
-    </p:spTree>
-  </p:cSld>
-  <p:clrMapOvr>
-    <a:masterClrMapping/>
-  </p:clrMapOvr>
-</p:sld>
-</file>
-
-<file path=ppt/slides/slide2.xml><?xml version="1.0" encoding="utf-8"?>
-<p:sld xmlns:a="http://schemas.openxmlformats.org/drawingml/2006/main" xmlns:p="http://schemas.openxmlformats.org/presentationml/2006/main" xmlns:r="http://schemas.openxmlformats.org/officeDocument/2006/relationships">
-  <p:cSld>
-    <p:spTree>
-      <p:nvGrpSpPr>
-        <p:cNvPr id="1" name=""/>
-        <p:cNvGrpSpPr/>
-        <p:nvPr/>
-      </p:nvGrpSpPr>
-      <p:grpSpPr/>
-      <p:sp>
-        <p:nvSpPr>
-          <p:cNvPr id="2" name="TextBox 1"/>
-          <p:cNvSpPr txBox="1"/>
-          <p:nvPr/>
-        </p:nvSpPr>
-        <p:spPr>
-          <a:xfrm>
-            <a:off x="548640" y="320040"/>
-            <a:ext cx="10972800" cy="731520"/>
-          </a:xfrm>
-          <a:prstGeom prst="rect">
-            <a:avLst/>
-          </a:prstGeom>
-          <a:noFill/>
-        </p:spPr>
-        <p:txBody>
-          <a:bodyPr wrap="none">
-            <a:spAutoFit/>
-          </a:bodyPr>
-          <a:lstStyle/>
-          <a:p>
-            <a:pPr>
-              <a:defRPr sz="3000" b="1">
-                <a:solidFill>
-                  <a:srgbClr val="2BB5A6"/>
-                </a:solidFill>
-              </a:defRPr>
-            </a:pPr>
-            <a:r>
-              <a:t>Waar we in maart stonden</a:t>
-            </a:r>
-          </a:p>
-        </p:txBody>
-      </p:sp>
-      <p:sp>
-        <p:nvSpPr>
-          <p:cNvPr id="3" name="TextBox 2"/>
-          <p:cNvSpPr txBox="1"/>
-          <p:nvPr/>
-        </p:nvSpPr>
-        <p:spPr>
-          <a:xfrm>
-            <a:off x="548640" y="960120"/>
-            <a:ext cx="10972800" cy="548640"/>
-          </a:xfrm>
-          <a:prstGeom prst="rect">
-            <a:avLst/>
-          </a:prstGeom>
-          <a:noFill/>
-        </p:spPr>
-        <p:txBody>
-          <a:bodyPr wrap="none">
-            <a:spAutoFit/>
-          </a:bodyPr>
-          <a:lstStyle/>
-          <a:p>
-            <a:pPr>
-              <a:defRPr sz="1700">
-                <a:solidFill>
-                  <a:srgbClr val="1F3A3D"/>
-                </a:solidFill>
-              </a:defRPr>
-            </a:pPr>
-            <a:r>
-              <a:t>Eén rechte lijn per scopevlak, 3–4 jaar tussen metingen</a:t>
-            </a:r>
-          </a:p>
-        </p:txBody>
-      </p:sp>
-      <p:sp>
-        <p:nvSpPr>
-          <p:cNvPr id="4" name="TextBox 3"/>
-          <p:cNvSpPr txBox="1"/>
-          <p:nvPr/>
-        </p:nvSpPr>
-        <p:spPr>
-          <a:xfrm>
-            <a:off x="548640" y="6400800"/>
-            <a:ext cx="10972800" cy="274320"/>
-          </a:xfrm>
-          <a:prstGeom prst="rect">
-            <a:avLst/>
-          </a:prstGeom>
-          <a:noFill/>
-        </p:spPr>
-        <p:txBody>
-          <a:bodyPr wrap="none">
-            <a:spAutoFit/>
-          </a:bodyPr>
-          <a:lstStyle/>
-          <a:p>
-            <a:pPr>
-              <a:defRPr sz="1000">
-                <a:solidFill>
-                  <a:srgbClr val="6B7778"/>
-                </a:solidFill>
-              </a:defRPr>
-            </a:pPr>
-            <a:r>
-              <a:t>Oevererosietool · update 26-08-2026 · 2</a:t>
-            </a:r>
-          </a:p>
-        </p:txBody>
-      </p:sp>
-      <p:pic>
-        <p:nvPicPr>
-          <p:cNvPr id="5" name="Picture 4" descr="march-03.png"/>
-          <p:cNvPicPr>
-            <a:picLocks noChangeAspect="1"/>
-          </p:cNvPicPr>
-          <p:nvPr/>
-        </p:nvPicPr>
-        <p:blipFill>
-          <a:blip r:embed="rId2"/>
-          <a:stretch>
-            <a:fillRect/>
-          </a:stretch>
-        </p:blipFill>
-        <p:spPr>
-          <a:xfrm>
-            <a:off x="548640" y="1554480"/>
-            <a:ext cx="6949440" cy="4917566"/>
-          </a:xfrm>
-          <a:prstGeom prst="rect">
-            <a:avLst/>
-          </a:prstGeom>
-        </p:spPr>
-      </p:pic>
-      <p:sp>
-        <p:nvSpPr>
-          <p:cNvPr id="6" name="TextBox 5"/>
-          <p:cNvSpPr txBox="1"/>
-          <p:nvPr/>
-        </p:nvSpPr>
-        <p:spPr>
-          <a:xfrm>
-            <a:off x="7772400" y="1737360"/>
-            <a:ext cx="4023360" cy="4114800"/>
-          </a:xfrm>
-          <a:prstGeom prst="rect">
-            <a:avLst/>
-          </a:prstGeom>
-          <a:noFill/>
-        </p:spPr>
-        <p:txBody>
-          <a:bodyPr wrap="square">
-            <a:spAutoFit/>
-          </a:bodyPr>
-          <a:lstStyle/>
-          <a:p>
-            <a:pPr>
-              <a:spcAft>
-                <a:spcPts val="600"/>
-              </a:spcAft>
-              <a:defRPr sz="1600" b="0">
-                <a:solidFill>
-                  <a:srgbClr val="1F3A3D"/>
-                </a:solidFill>
-              </a:defRPr>
-            </a:pPr>
-            <a:r>
-              <a:t>• Alleen hoogtemodel (AHN3 / AHN4 / AHN5)</a:t>
-            </a:r>
-          </a:p>
-          <a:p>
-            <a:pPr>
-              <a:spcAft>
-                <a:spcPts val="600"/>
-              </a:spcAft>
-              <a:defRPr sz="1600" b="0">
-                <a:solidFill>
-                  <a:srgbClr val="1F3A3D"/>
-                </a:solidFill>
-              </a:defRPr>
-            </a:pPr>
-            <a:r>
-              <a:t>• Oever = één afstand tot de hartlijn per vlak</a:t>
-            </a:r>
-          </a:p>
-          <a:p>
-            <a:pPr>
-              <a:spcAft>
-                <a:spcPts val="600"/>
-              </a:spcAft>
-              <a:defRPr sz="1600" b="0">
-                <a:solidFill>
-                  <a:srgbClr val="1F3A3D"/>
-                </a:solidFill>
-              </a:defRPr>
-            </a:pPr>
-            <a:r>
-              <a:t>• Fout 0,94 m/jr — maar het model verloor van 'neem het gemiddelde' (0,78)</a:t>
-            </a:r>
-          </a:p>
-          <a:p>
-            <a:pPr>
-              <a:spcAft>
-                <a:spcPts val="600"/>
-              </a:spcAft>
-              <a:defRPr sz="1600" b="0">
-                <a:solidFill>
-                  <a:srgbClr val="1F3A3D"/>
-                </a:solidFill>
-              </a:defRPr>
-            </a:pPr>
-            <a:r>
-              <a:t>• Risicogevallen (&gt; 2 m/jr): 4,6 m/jr</a:t>
-            </a:r>
-          </a:p>
-          <a:p>
-            <a:pPr>
-              <a:spcAft>
-                <a:spcPts val="600"/>
-              </a:spcAft>
-              <a:defRPr sz="1600" b="0">
-                <a:solidFill>
-                  <a:srgbClr val="1F3A3D"/>
-                </a:solidFill>
-              </a:defRPr>
-            </a:pPr>
-            <a:r>
-              <a:t>• 7.444 vlakken met voorspelling</a:t>
-            </a:r>
-          </a:p>
-        </p:txBody>
-      </p:sp>
-      <p:sp>
-        <p:nvSpPr>
-          <p:cNvPr id="7" name="TextBox 6"/>
-          <p:cNvSpPr txBox="1"/>
-          <p:nvPr/>
-        </p:nvSpPr>
-        <p:spPr>
-          <a:xfrm>
-            <a:off x="7772400" y="5120640"/>
-            <a:ext cx="4023360" cy="548640"/>
-          </a:xfrm>
-          <a:prstGeom prst="rect">
-            <a:avLst/>
-          </a:prstGeom>
-          <a:noFill/>
-        </p:spPr>
-        <p:txBody>
-          <a:bodyPr wrap="square">
-            <a:spAutoFit/>
-          </a:bodyPr>
-          <a:lstStyle/>
-          <a:p>
-            <a:pPr>
-              <a:defRPr sz="1200" i="1">
-                <a:solidFill>
-                  <a:srgbClr val="6B7778"/>
-                </a:solidFill>
-              </a:defRPr>
-            </a:pPr>
-            <a:r>
-              <a:t>De fout leek laag omdat de input simpel was: rechte lijnen, lange tijdstappen.</a:t>
-            </a:r>
-          </a:p>
-        </p:txBody>
-      </p:sp>
-    </p:spTree>
-  </p:cSld>
-  <p:clrMapOvr>
-    <a:masterClrMapping/>
-  </p:clrMapOvr>
-</p:sld>
-</file>
-
-<file path=ppt/slides/slide3.xml><?xml version="1.0" encoding="utf-8"?>
-<p:sld xmlns:a="http://schemas.openxmlformats.org/drawingml/2006/main" xmlns:p="http://schemas.openxmlformats.org/presentationml/2006/main" xmlns:r="http://schemas.openxmlformats.org/officeDocument/2006/relationships">
-  <p:cSld>
-    <p:spTree>
-      <p:nvGrpSpPr>
-        <p:cNvPr id="1" name=""/>
-        <p:cNvGrpSpPr/>
-        <p:nvPr/>
-      </p:nvGrpSpPr>
-      <p:grpSpPr/>
-      <p:sp>
-        <p:nvSpPr>
-          <p:cNvPr id="2" name="TextBox 1"/>
-          <p:cNvSpPr txBox="1"/>
-          <p:nvPr/>
-        </p:nvSpPr>
-        <p:spPr>
-          <a:xfrm>
-            <a:off x="548640" y="320040"/>
-            <a:ext cx="10972800" cy="731520"/>
-          </a:xfrm>
-          <a:prstGeom prst="rect">
-            <a:avLst/>
-          </a:prstGeom>
-          <a:noFill/>
-        </p:spPr>
-        <p:txBody>
-          <a:bodyPr wrap="none">
-            <a:spAutoFit/>
-          </a:bodyPr>
-          <a:lstStyle/>
-          <a:p>
-            <a:pPr>
-              <a:defRPr sz="3000" b="1">
-                <a:solidFill>
-                  <a:srgbClr val="2BB5A6"/>
-                </a:solidFill>
-              </a:defRPr>
-            </a:pPr>
-            <a:r>
-              <a:t>Wat er sindsdien binnenkwam</a:t>
-            </a:r>
-          </a:p>
-        </p:txBody>
-      </p:sp>
-      <p:sp>
-        <p:nvSpPr>
-          <p:cNvPr id="3" name="TextBox 2"/>
-          <p:cNvSpPr txBox="1"/>
-          <p:nvPr/>
-        </p:nvSpPr>
-        <p:spPr>
-          <a:xfrm>
-            <a:off x="548640" y="960120"/>
-            <a:ext cx="10972800" cy="548640"/>
-          </a:xfrm>
-          <a:prstGeom prst="rect">
-            <a:avLst/>
-          </a:prstGeom>
-          <a:noFill/>
-        </p:spPr>
-        <p:txBody>
-          <a:bodyPr wrap="none">
-            <a:spAutoFit/>
-          </a:bodyPr>
-          <a:lstStyle/>
-          <a:p>
-            <a:pPr>
-              <a:defRPr sz="1700">
-                <a:solidFill>
-                  <a:srgbClr val="1F3A3D"/>
-                </a:solidFill>
-              </a:defRPr>
-            </a:pPr>
-            <a:r>
-              <a:t>Hybride levering: SAM + hoogtemodel, tot 11 meetmomenten, 1 jaar tussen t-punten</a:t>
-            </a:r>
-          </a:p>
-        </p:txBody>
-      </p:sp>
-      <p:sp>
-        <p:nvSpPr>
-          <p:cNvPr id="4" name="TextBox 3"/>
-          <p:cNvSpPr txBox="1"/>
-          <p:nvPr/>
-        </p:nvSpPr>
-        <p:spPr>
-          <a:xfrm>
-            <a:off x="548640" y="6400800"/>
-            <a:ext cx="10972800" cy="274320"/>
-          </a:xfrm>
-          <a:prstGeom prst="rect">
-            <a:avLst/>
-          </a:prstGeom>
-          <a:noFill/>
-        </p:spPr>
-        <p:txBody>
-          <a:bodyPr wrap="none">
-            <a:spAutoFit/>
-          </a:bodyPr>
-          <a:lstStyle/>
-          <a:p>
-            <a:pPr>
-              <a:defRPr sz="1000">
-                <a:solidFill>
-                  <a:srgbClr val="6B7778"/>
-                </a:solidFill>
-              </a:defRPr>
-            </a:pPr>
-            <a:r>
-              <a:t>Oevererosietool · update 26-08-2026 · 3</a:t>
-            </a:r>
-          </a:p>
-        </p:txBody>
-      </p:sp>
-      <p:pic>
-        <p:nvPicPr>
-          <p:cNvPr id="5" name="Picture 4" descr="aug-2.png"/>
-          <p:cNvPicPr>
-            <a:picLocks noChangeAspect="1"/>
-          </p:cNvPicPr>
-          <p:nvPr/>
-        </p:nvPicPr>
-        <p:blipFill>
-          <a:blip r:embed="rId2"/>
-          <a:stretch>
-            <a:fillRect/>
-          </a:stretch>
-        </p:blipFill>
-        <p:spPr>
-          <a:xfrm>
-            <a:off x="548640" y="1554480"/>
-            <a:ext cx="7223760" cy="4062442"/>
-          </a:xfrm>
-          <a:prstGeom prst="rect">
-            <a:avLst/>
-          </a:prstGeom>
-        </p:spPr>
-      </p:pic>
-      <p:sp>
-        <p:nvSpPr>
-          <p:cNvPr id="6" name="TextBox 5"/>
-          <p:cNvSpPr txBox="1"/>
-          <p:nvPr/>
-        </p:nvSpPr>
-        <p:spPr>
-          <a:xfrm>
-            <a:off x="7955279" y="1737360"/>
-            <a:ext cx="3931920" cy="4389120"/>
-          </a:xfrm>
-          <a:prstGeom prst="rect">
-            <a:avLst/>
-          </a:prstGeom>
-          <a:noFill/>
-        </p:spPr>
-        <p:txBody>
-          <a:bodyPr wrap="square">
-            <a:spAutoFit/>
-          </a:bodyPr>
-          <a:lstStyle/>
-          <a:p>
-            <a:pPr>
-              <a:spcAft>
-                <a:spcPts val="600"/>
-              </a:spcAft>
-              <a:defRPr sz="1500" b="0">
-                <a:solidFill>
-                  <a:srgbClr val="1F3A3D"/>
-                </a:solidFill>
-              </a:defRPr>
-            </a:pPr>
-            <a:r>
-              <a:t>• 16.377 scopevlakken, 91.531 oeverlijnen</a:t>
-            </a:r>
-          </a:p>
-          <a:p>
-            <a:pPr>
-              <a:spcAft>
-                <a:spcPts val="600"/>
-              </a:spcAft>
-              <a:defRPr sz="1500" b="0">
-                <a:solidFill>
-                  <a:srgbClr val="1F3A3D"/>
-                </a:solidFill>
-              </a:defRPr>
-            </a:pPr>
-            <a:r>
-              <a:t>• Fout sprong naar 4,1 m/jr — niet omdat het model slechter werd:</a:t>
-            </a:r>
-          </a:p>
-          <a:p>
-            <a:pPr lvl="1">
-              <a:spcAft>
-                <a:spcPts val="600"/>
-              </a:spcAft>
-              <a:defRPr sz="1300" b="0">
-                <a:solidFill>
-                  <a:srgbClr val="1F3A3D"/>
-                </a:solidFill>
-              </a:defRPr>
-            </a:pPr>
-            <a:r>
-              <a:t>– dezelfde meetruis ÷ 4× kleiner tijdsverschil = 4× ruiziger doel</a:t>
-            </a:r>
-          </a:p>
-          <a:p>
-            <a:pPr lvl="1">
-              <a:spcAft>
-                <a:spcPts val="600"/>
-              </a:spcAft>
-              <a:defRPr sz="1300" b="0">
-                <a:solidFill>
-                  <a:srgbClr val="1F3A3D"/>
-                </a:solidFill>
-              </a:defRPr>
-            </a:pPr>
-            <a:r>
-              <a:t>– ook de baseline ging van 0,78 naar 4,8</a:t>
-            </a:r>
-          </a:p>
-          <a:p>
-            <a:pPr>
-              <a:spcAft>
-                <a:spcPts val="600"/>
-              </a:spcAft>
-              <a:defRPr sz="1500" b="0">
-                <a:solidFill>
-                  <a:srgbClr val="1F3A3D"/>
-                </a:solidFill>
-              </a:defRPr>
-            </a:pPr>
-            <a:r>
-              <a:t>• Voor het eerst verslaat het model de baseline (14 %)</a:t>
-            </a:r>
-          </a:p>
-          <a:p>
-            <a:pPr>
-              <a:spcAft>
-                <a:spcPts val="600"/>
-              </a:spcAft>
-              <a:defRPr sz="1500" b="0">
-                <a:solidFill>
-                  <a:srgbClr val="1F3A3D"/>
-                </a:solidFill>
-              </a:defRPr>
-            </a:pPr>
-            <a:r>
-              <a:t>• Nieuw: 12 % van de meetmomenten heeft méér dan één lijn; fragmenten en 'doolhoven'</a:t>
-            </a:r>
-          </a:p>
-        </p:txBody>
-      </p:sp>
-    </p:spTree>
-  </p:cSld>
-  <p:clrMapOvr>
-    <a:masterClrMapping/>
-  </p:clrMapOvr>
-</p:sld>
-</file>
-
-<file path=ppt/slides/slide4.xml><?xml version="1.0" encoding="utf-8"?>
-<p:sld xmlns:a="http://schemas.openxmlformats.org/drawingml/2006/main" xmlns:p="http://schemas.openxmlformats.org/presentationml/2006/main" xmlns:r="http://schemas.openxmlformats.org/officeDocument/2006/relationships">
-  <p:cSld>
-    <p:spTree>
-      <p:nvGrpSpPr>
-        <p:cNvPr id="1" name=""/>
-        <p:cNvGrpSpPr/>
-        <p:nvPr/>
-      </p:nvGrpSpPr>
-      <p:grpSpPr/>
-      <p:sp>
-        <p:nvSpPr>
-          <p:cNvPr id="2" name="TextBox 1"/>
-          <p:cNvSpPr txBox="1"/>
-          <p:nvPr/>
-        </p:nvSpPr>
-        <p:spPr>
-          <a:xfrm>
-            <a:off x="548640" y="320040"/>
-            <a:ext cx="10972800" cy="731520"/>
-          </a:xfrm>
-          <a:prstGeom prst="rect">
-            <a:avLst/>
-          </a:prstGeom>
-          <a:noFill/>
-        </p:spPr>
-        <p:txBody>
-          <a:bodyPr wrap="none">
-            <a:spAutoFit/>
-          </a:bodyPr>
-          <a:lstStyle/>
-          <a:p>
-            <a:pPr>
-              <a:defRPr sz="3000" b="1">
-                <a:solidFill>
-                  <a:srgbClr val="2BB5A6"/>
-                </a:solidFill>
-              </a:defRPr>
-            </a:pPr>
-            <a:r>
-              <a:t>Drie assen om te verbeteren</a:t>
-            </a:r>
-          </a:p>
-        </p:txBody>
-      </p:sp>
-      <p:sp>
-        <p:nvSpPr>
-          <p:cNvPr id="3" name="TextBox 2"/>
-          <p:cNvSpPr txBox="1"/>
-          <p:nvPr/>
-        </p:nvSpPr>
-        <p:spPr>
-          <a:xfrm>
-            <a:off x="548640" y="960120"/>
-            <a:ext cx="10972800" cy="548640"/>
-          </a:xfrm>
-          <a:prstGeom prst="rect">
-            <a:avLst/>
-          </a:prstGeom>
-          <a:noFill/>
-        </p:spPr>
-        <p:txBody>
-          <a:bodyPr wrap="none">
-            <a:spAutoFit/>
-          </a:bodyPr>
-          <a:lstStyle/>
-          <a:p>
-            <a:pPr>
-              <a:defRPr sz="1700">
-                <a:solidFill>
-                  <a:srgbClr val="1F3A3D"/>
-                </a:solidFill>
-              </a:defRPr>
-            </a:pPr>
-            <a:r>
-              <a:t>Alle drie doorlopen, elk gemeten tegen dezelfde vaste testset van 1.174 vlakken</a:t>
-            </a:r>
-          </a:p>
-        </p:txBody>
-      </p:sp>
-      <p:sp>
-        <p:nvSpPr>
-          <p:cNvPr id="4" name="TextBox 3"/>
-          <p:cNvSpPr txBox="1"/>
-          <p:nvPr/>
-        </p:nvSpPr>
-        <p:spPr>
-          <a:xfrm>
-            <a:off x="548640" y="6400800"/>
-            <a:ext cx="10972800" cy="274320"/>
-          </a:xfrm>
-          <a:prstGeom prst="rect">
-            <a:avLst/>
-          </a:prstGeom>
-          <a:noFill/>
-        </p:spPr>
-        <p:txBody>
-          <a:bodyPr wrap="none">
-            <a:spAutoFit/>
-          </a:bodyPr>
-          <a:lstStyle/>
-          <a:p>
-            <a:pPr>
-              <a:defRPr sz="1000">
-                <a:solidFill>
-                  <a:srgbClr val="6B7778"/>
-                </a:solidFill>
-              </a:defRPr>
-            </a:pPr>
-            <a:r>
-              <a:t>Oevererosietool · update 26-08-2026 · 4</a:t>
-            </a:r>
-          </a:p>
-        </p:txBody>
-      </p:sp>
-      <p:sp>
-        <p:nvSpPr>
-          <p:cNvPr id="5" name="Rectangle 4"/>
-          <p:cNvSpPr/>
-          <p:nvPr/>
-        </p:nvSpPr>
-        <p:spPr>
-          <a:xfrm>
-            <a:off x="548640" y="1645920"/>
-            <a:ext cx="3566160" cy="548640"/>
-          </a:xfrm>
-          <a:prstGeom prst="rect">
-            <a:avLst/>
-          </a:prstGeom>
-          <a:solidFill>
-            <a:srgbClr val="2BB5A6"/>
-          </a:solidFill>
-          <a:ln>
-            <a:noFill/>
-          </a:ln>
-        </p:spPr>
-        <p:style>
-          <a:lnRef idx="1">
-            <a:schemeClr val="accent1"/>
-          </a:lnRef>
-          <a:fillRef idx="3">
-            <a:schemeClr val="accent1"/>
-          </a:fillRef>
-          <a:effectRef idx="2">
-            <a:schemeClr val="accent1"/>
-          </a:effectRef>
-          <a:fontRef idx="minor">
-            <a:schemeClr val="lt1"/>
-          </a:fontRef>
-        </p:style>
-        <p:txBody>
-          <a:bodyPr rtlCol="0" anchor="ctr"/>
-          <a:lstStyle/>
-          <a:p>
-            <a:pPr algn="ctr">
-              <a:defRPr sz="1800" b="1">
-                <a:solidFill>
-                  <a:srgbClr val="FFFFFF"/>
-                </a:solidFill>
-              </a:defRPr>
-            </a:pPr>
-            <a:r>
-              <a:t>1 · Opschonen</a:t>
-            </a:r>
-          </a:p>
-        </p:txBody>
-      </p:sp>
-      <p:sp>
-        <p:nvSpPr>
-          <p:cNvPr id="6" name="TextBox 5"/>
-          <p:cNvSpPr txBox="1"/>
-          <p:nvPr/>
-        </p:nvSpPr>
-        <p:spPr>
-          <a:xfrm>
-            <a:off x="548640" y="2377440"/>
-            <a:ext cx="3566160" cy="3474720"/>
-          </a:xfrm>
-          <a:prstGeom prst="rect">
-            <a:avLst/>
-          </a:prstGeom>
-          <a:noFill/>
-        </p:spPr>
-        <p:txBody>
-          <a:bodyPr wrap="square">
-            <a:spAutoFit/>
-          </a:bodyPr>
-          <a:lstStyle/>
-          <a:p>
-            <a:pPr>
-              <a:spcAft>
-                <a:spcPts val="600"/>
-              </a:spcAft>
-              <a:defRPr sz="1500" b="0">
-                <a:solidFill>
-                  <a:srgbClr val="1F3A3D"/>
-                </a:solidFill>
-              </a:defRPr>
-            </a:pPr>
-            <a:r>
-              <a:t>• Verkeerde-oever-detecties verwijderen zónder de hele meting weg te gooien</a:t>
-            </a:r>
-          </a:p>
-          <a:p>
-            <a:pPr>
-              <a:spcAft>
-                <a:spcPts val="600"/>
-              </a:spcAft>
-              <a:defRPr sz="1500" b="0">
-                <a:solidFill>
-                  <a:srgbClr val="1F3A3D"/>
-                </a:solidFill>
-              </a:defRPr>
-            </a:pPr>
-            <a:r>
-              <a:t>• Kribben, bruggen, nevengeulen, doolhoven, fragmenten, uitschieters in de tijd</a:t>
-            </a:r>
-          </a:p>
-          <a:p>
-            <a:pPr>
-              <a:spcAft>
-                <a:spcPts val="600"/>
-              </a:spcAft>
-              <a:defRPr sz="1500" b="0">
-                <a:solidFill>
-                  <a:srgbClr val="1F3A3D"/>
-                </a:solidFill>
-              </a:defRPr>
-            </a:pPr>
-            <a:r>
-              <a:t>• Ruim 50 varianten, elk visueel gecontroleerd</a:t>
-            </a:r>
-          </a:p>
-        </p:txBody>
-      </p:sp>
-      <p:sp>
-        <p:nvSpPr>
-          <p:cNvPr id="7" name="Rectangle 6"/>
-          <p:cNvSpPr/>
-          <p:nvPr/>
-        </p:nvSpPr>
-        <p:spPr>
-          <a:xfrm>
-            <a:off x="4389120" y="1645920"/>
-            <a:ext cx="3566160" cy="548640"/>
-          </a:xfrm>
-          <a:prstGeom prst="rect">
-            <a:avLst/>
-          </a:prstGeom>
-          <a:solidFill>
-            <a:srgbClr val="2BB5A6"/>
-          </a:solidFill>
-          <a:ln>
-            <a:noFill/>
-          </a:ln>
-        </p:spPr>
-        <p:style>
-          <a:lnRef idx="1">
-            <a:schemeClr val="accent1"/>
-          </a:lnRef>
-          <a:fillRef idx="3">
-            <a:schemeClr val="accent1"/>
-          </a:fillRef>
-          <a:effectRef idx="2">
-            <a:schemeClr val="accent1"/>
-          </a:effectRef>
-          <a:fontRef idx="minor">
-            <a:schemeClr val="lt1"/>
-          </a:fontRef>
-        </p:style>
-        <p:txBody>
-          <a:bodyPr rtlCol="0" anchor="ctr"/>
-          <a:lstStyle/>
-          <a:p>
-            <a:pPr algn="ctr">
-              <a:defRPr sz="1800" b="1">
-                <a:solidFill>
-                  <a:srgbClr val="FFFFFF"/>
-                </a:solidFill>
-              </a:defRPr>
-            </a:pPr>
-            <a:r>
-              <a:t>2 · Meerdere t-punten</a:t>
-            </a:r>
-          </a:p>
-        </p:txBody>
-      </p:sp>
-      <p:sp>
-        <p:nvSpPr>
-          <p:cNvPr id="8" name="TextBox 7"/>
-          <p:cNvSpPr txBox="1"/>
-          <p:nvPr/>
-        </p:nvSpPr>
-        <p:spPr>
-          <a:xfrm>
-            <a:off x="4389120" y="2377440"/>
-            <a:ext cx="3566160" cy="3474720"/>
-          </a:xfrm>
-          <a:prstGeom prst="rect">
-            <a:avLst/>
-          </a:prstGeom>
-          <a:noFill/>
-        </p:spPr>
-        <p:txBody>
-          <a:bodyPr wrap="square">
-            <a:spAutoFit/>
-          </a:bodyPr>
-          <a:lstStyle/>
-          <a:p>
-            <a:pPr>
-              <a:spcAft>
-                <a:spcPts val="600"/>
-              </a:spcAft>
-              <a:defRPr sz="1500" b="0">
-                <a:solidFill>
-                  <a:srgbClr val="1F3A3D"/>
-                </a:solidFill>
-              </a:defRPr>
-            </a:pPr>
-            <a:r>
-              <a:t>• Snelheid als trend over álle metingen</a:t>
-            </a:r>
-          </a:p>
-          <a:p>
-            <a:pPr>
-              <a:spcAft>
-                <a:spcPts val="600"/>
-              </a:spcAft>
-              <a:defRPr sz="1500" b="0">
-                <a:solidFill>
-                  <a:srgbClr val="1F3A3D"/>
-                </a:solidFill>
-              </a:defRPr>
-            </a:pPr>
-            <a:r>
-              <a:t>• Versnelling, terugkeer naar gemiddelde, recente helling als feature</a:t>
-            </a:r>
-          </a:p>
-          <a:p>
-            <a:pPr>
-              <a:spcAft>
-                <a:spcPts val="600"/>
-              </a:spcAft>
-              <a:defRPr sz="1500" b="0">
-                <a:solidFill>
-                  <a:srgbClr val="1F3A3D"/>
-                </a:solidFill>
-              </a:defRPr>
-            </a:pPr>
-            <a:r>
-              <a:t>• Voorspellen op ≥ 2 jaar in plaats van jaar-op-jaar</a:t>
-            </a:r>
-          </a:p>
-        </p:txBody>
-      </p:sp>
-      <p:sp>
-        <p:nvSpPr>
-          <p:cNvPr id="9" name="Rectangle 8"/>
-          <p:cNvSpPr/>
-          <p:nvPr/>
-        </p:nvSpPr>
-        <p:spPr>
-          <a:xfrm>
-            <a:off x="8229600" y="1645920"/>
-            <a:ext cx="3566160" cy="548640"/>
-          </a:xfrm>
-          <a:prstGeom prst="rect">
-            <a:avLst/>
-          </a:prstGeom>
-          <a:solidFill>
-            <a:srgbClr val="2BB5A6"/>
-          </a:solidFill>
-          <a:ln>
-            <a:noFill/>
-          </a:ln>
-        </p:spPr>
-        <p:style>
-          <a:lnRef idx="1">
-            <a:schemeClr val="accent1"/>
-          </a:lnRef>
-          <a:fillRef idx="3">
-            <a:schemeClr val="accent1"/>
-          </a:fillRef>
-          <a:effectRef idx="2">
-            <a:schemeClr val="accent1"/>
-          </a:effectRef>
-          <a:fontRef idx="minor">
-            <a:schemeClr val="lt1"/>
-          </a:fontRef>
-        </p:style>
-        <p:txBody>
-          <a:bodyPr rtlCol="0" anchor="ctr"/>
-          <a:lstStyle/>
-          <a:p>
-            <a:pPr algn="ctr">
-              <a:defRPr sz="1800" b="1">
-                <a:solidFill>
-                  <a:srgbClr val="FFFFFF"/>
-                </a:solidFill>
-              </a:defRPr>
-            </a:pPr>
-            <a:r>
-              <a:t>3 · Resolutie</a:t>
-            </a:r>
-          </a:p>
-        </p:txBody>
-      </p:sp>
-      <p:sp>
-        <p:nvSpPr>
-          <p:cNvPr id="10" name="TextBox 9"/>
-          <p:cNvSpPr txBox="1"/>
-          <p:nvPr/>
-        </p:nvSpPr>
-        <p:spPr>
-          <a:xfrm>
-            <a:off x="8229600" y="2377440"/>
-            <a:ext cx="3566160" cy="3474720"/>
-          </a:xfrm>
-          <a:prstGeom prst="rect">
-            <a:avLst/>
-          </a:prstGeom>
-          <a:noFill/>
-        </p:spPr>
-        <p:txBody>
-          <a:bodyPr wrap="square">
-            <a:spAutoFit/>
-          </a:bodyPr>
-          <a:lstStyle/>
-          <a:p>
-            <a:pPr>
-              <a:spcAft>
-                <a:spcPts val="600"/>
-              </a:spcAft>
-              <a:defRPr sz="1500" b="0">
-                <a:solidFill>
-                  <a:srgbClr val="1F3A3D"/>
-                </a:solidFill>
-              </a:defRPr>
-            </a:pPr>
-            <a:r>
-              <a:t>• Vijf segmenten per vlak in plaats van één afstand</a:t>
-            </a:r>
-          </a:p>
-          <a:p>
-            <a:pPr>
-              <a:spcAft>
-                <a:spcPts val="600"/>
-              </a:spcAft>
-              <a:defRPr sz="1500" b="0">
-                <a:solidFill>
-                  <a:srgbClr val="1F3A3D"/>
-                </a:solidFill>
-              </a:defRPr>
-            </a:pPr>
-            <a:r>
-              <a:t>• Gemeten én voorspelde oever als lijn</a:t>
-            </a:r>
-          </a:p>
-          <a:p>
-            <a:pPr>
-              <a:spcAft>
-                <a:spcPts val="600"/>
-              </a:spcAft>
-              <a:defRPr sz="1500" b="0">
-                <a:solidFill>
-                  <a:srgbClr val="1F3A3D"/>
-                </a:solidFill>
-              </a:defRPr>
-            </a:pPr>
-            <a:r>
-              <a:t>• Alarm zodra énig deel de signaleringslijn nadert</a:t>
-            </a:r>
-          </a:p>
-        </p:txBody>
-      </p:sp>
-    </p:spTree>
-  </p:cSld>
-  <p:clrMapOvr>
-    <a:masterClrMapping/>
-  </p:clrMapOvr>
-</p:sld>
-</file>
-
-<file path=ppt/slides/slide5.xml><?xml version="1.0" encoding="utf-8"?>
-<p:sld xmlns:a="http://schemas.openxmlformats.org/drawingml/2006/main" xmlns:p="http://schemas.openxmlformats.org/presentationml/2006/main" xmlns:r="http://schemas.openxmlformats.org/officeDocument/2006/relationships">
-  <p:cSld>
-    <p:spTree>
-      <p:nvGrpSpPr>
-        <p:cNvPr id="1" name=""/>
-        <p:cNvGrpSpPr/>
-        <p:nvPr/>
-      </p:nvGrpSpPr>
-      <p:grpSpPr/>
-      <p:sp>
-        <p:nvSpPr>
-          <p:cNvPr id="2" name="TextBox 1"/>
-          <p:cNvSpPr txBox="1"/>
-          <p:nvPr/>
-        </p:nvSpPr>
-        <p:spPr>
-          <a:xfrm>
-            <a:off x="548640" y="320040"/>
-            <a:ext cx="10972800" cy="731520"/>
-          </a:xfrm>
-          <a:prstGeom prst="rect">
-            <a:avLst/>
-          </a:prstGeom>
-          <a:noFill/>
-        </p:spPr>
-        <p:txBody>
-          <a:bodyPr wrap="none">
-            <a:spAutoFit/>
-          </a:bodyPr>
-          <a:lstStyle/>
-          <a:p>
-            <a:pPr>
-              <a:defRPr sz="3000" b="1">
-                <a:solidFill>
-                  <a:srgbClr val="2BB5A6"/>
-                </a:solidFill>
-              </a:defRPr>
-            </a:pPr>
-            <a:r>
-              <a:t>As 3 · Resolutie: van scalar naar oeverlijn</a:t>
-            </a:r>
-          </a:p>
-        </p:txBody>
-      </p:sp>
-      <p:sp>
-        <p:nvSpPr>
-          <p:cNvPr id="3" name="TextBox 2"/>
-          <p:cNvSpPr txBox="1"/>
-          <p:nvPr/>
-        </p:nvSpPr>
-        <p:spPr>
-          <a:xfrm>
-            <a:off x="548640" y="960120"/>
-            <a:ext cx="10972800" cy="548640"/>
-          </a:xfrm>
-          <a:prstGeom prst="rect">
-            <a:avLst/>
-          </a:prstGeom>
-          <a:noFill/>
-        </p:spPr>
-        <p:txBody>
-          <a:bodyPr wrap="none">
-            <a:spAutoFit/>
-          </a:bodyPr>
-          <a:lstStyle/>
-          <a:p>
-            <a:pPr>
-              <a:defRPr sz="1700">
-                <a:solidFill>
-                  <a:srgbClr val="1F3A3D"/>
-                </a:solidFill>
-              </a:defRPr>
-            </a:pPr>
-            <a:r>
-              <a:t>Eén afstand per vlak verbergt dat 20 m hard erodeert en 80 m stil ligt</a:t>
-            </a:r>
-          </a:p>
-        </p:txBody>
-      </p:sp>
-      <p:sp>
-        <p:nvSpPr>
-          <p:cNvPr id="4" name="TextBox 3"/>
-          <p:cNvSpPr txBox="1"/>
-          <p:nvPr/>
-        </p:nvSpPr>
-        <p:spPr>
-          <a:xfrm>
-            <a:off x="548640" y="6400800"/>
-            <a:ext cx="10972800" cy="274320"/>
-          </a:xfrm>
-          <a:prstGeom prst="rect">
-            <a:avLst/>
-          </a:prstGeom>
-          <a:noFill/>
-        </p:spPr>
-        <p:txBody>
-          <a:bodyPr wrap="none">
-            <a:spAutoFit/>
-          </a:bodyPr>
-          <a:lstStyle/>
-          <a:p>
-            <a:pPr>
-              <a:defRPr sz="1000">
-                <a:solidFill>
-                  <a:srgbClr val="6B7778"/>
-                </a:solidFill>
-              </a:defRPr>
-            </a:pPr>
-            <a:r>
-              <a:t>Oevererosietool · update 26-08-2026 · 5</a:t>
-            </a:r>
-          </a:p>
-        </p:txBody>
-      </p:sp>
-      <p:pic>
-        <p:nvPicPr>
-          <p:cNvPr id="5" name="Picture 4" descr="r5_ijssel.png"/>
-          <p:cNvPicPr>
-            <a:picLocks noChangeAspect="1"/>
-          </p:cNvPicPr>
-          <p:nvPr/>
-        </p:nvPicPr>
-        <p:blipFill>
-          <a:blip r:embed="rId2"/>
-          <a:stretch>
-            <a:fillRect/>
-          </a:stretch>
-        </p:blipFill>
-        <p:spPr>
-          <a:xfrm>
-            <a:off x="548640" y="1600200"/>
-            <a:ext cx="4340994" cy="4206240"/>
-          </a:xfrm>
-          <a:prstGeom prst="rect">
-            <a:avLst/>
-          </a:prstGeom>
-        </p:spPr>
-      </p:pic>
-      <p:pic>
-        <p:nvPicPr>
-          <p:cNvPr id="6" name="Picture 5" descr="r5_rijn.png"/>
-          <p:cNvPicPr>
-            <a:picLocks noChangeAspect="1"/>
-          </p:cNvPicPr>
-          <p:nvPr/>
-        </p:nvPicPr>
-        <p:blipFill>
-          <a:blip r:embed="rId3"/>
-          <a:stretch>
-            <a:fillRect/>
-          </a:stretch>
-        </p:blipFill>
-        <p:spPr>
-          <a:xfrm>
-            <a:off x="4937760" y="1600200"/>
-            <a:ext cx="4523874" cy="4206240"/>
-          </a:xfrm>
-          <a:prstGeom prst="rect">
-            <a:avLst/>
-          </a:prstGeom>
-        </p:spPr>
-      </p:pic>
-      <p:sp>
-        <p:nvSpPr>
-          <p:cNvPr id="7" name="TextBox 6"/>
-          <p:cNvSpPr txBox="1"/>
-          <p:nvPr/>
-        </p:nvSpPr>
-        <p:spPr>
-          <a:xfrm>
-            <a:off x="9052560" y="1645920"/>
-            <a:ext cx="3017520" cy="4572000"/>
-          </a:xfrm>
-          <a:prstGeom prst="rect">
-            <a:avLst/>
-          </a:prstGeom>
-          <a:noFill/>
-        </p:spPr>
-        <p:txBody>
-          <a:bodyPr wrap="square">
-            <a:spAutoFit/>
-          </a:bodyPr>
-          <a:lstStyle/>
-          <a:p>
-            <a:pPr>
-              <a:spcAft>
-                <a:spcPts val="400"/>
-              </a:spcAft>
-              <a:defRPr sz="1300" b="1">
-                <a:solidFill>
-                  <a:srgbClr val="1F3A3D"/>
-                </a:solidFill>
-              </a:defRPr>
-            </a:pPr>
-            <a:r>
-              <a:t>Wat je ziet</a:t>
-            </a:r>
-          </a:p>
-          <a:p>
-            <a:pPr>
-              <a:spcAft>
-                <a:spcPts val="400"/>
-              </a:spcAft>
-              <a:defRPr sz="1300" b="0">
-                <a:solidFill>
-                  <a:srgbClr val="1F3A3D"/>
-                </a:solidFill>
-              </a:defRPr>
-            </a:pPr>
-            <a:r>
-              <a:t>• groen = gemeten oever per segment (2026)</a:t>
-            </a:r>
-          </a:p>
-          <a:p>
-            <a:pPr>
-              <a:spcAft>
-                <a:spcPts val="400"/>
-              </a:spcAft>
-              <a:defRPr sz="1300" b="0">
-                <a:solidFill>
-                  <a:srgbClr val="1F3A3D"/>
-                </a:solidFill>
-              </a:defRPr>
-            </a:pPr>
-            <a:r>
-              <a:t>• bruin = voorspelde oever 2027 per segment</a:t>
-            </a:r>
-          </a:p>
-          <a:p>
-            <a:pPr>
-              <a:spcAft>
-                <a:spcPts val="400"/>
-              </a:spcAft>
-              <a:defRPr sz="1300" b="0">
-                <a:solidFill>
-                  <a:srgbClr val="1F3A3D"/>
-                </a:solidFill>
-              </a:defRPr>
-            </a:pPr>
-            <a:r>
-              <a:t>• gestippeld = de oude voorspelling: één getal</a:t>
-            </a:r>
-          </a:p>
-          <a:p>
-            <a:pPr>
-              <a:spcAft>
-                <a:spcPts val="400"/>
-              </a:spcAft>
-              <a:defRPr sz="1300" b="1">
-                <a:solidFill>
-                  <a:srgbClr val="1F3A3D"/>
-                </a:solidFill>
-              </a:defRPr>
-            </a:pPr>
-            <a:r>
-              <a:t>Wat het oplevert</a:t>
-            </a:r>
-          </a:p>
-          <a:p>
-            <a:pPr>
-              <a:spcAft>
-                <a:spcPts val="400"/>
-              </a:spcAft>
-              <a:defRPr sz="1300" b="0">
-                <a:solidFill>
-                  <a:srgbClr val="1F3A3D"/>
-                </a:solidFill>
-              </a:defRPr>
-            </a:pPr>
-            <a:r>
-              <a:t>• IJssel-vlak: één getal zegt −6,7 m/jr; de segmenten lopen van −10,8 tot +7,0</a:t>
-            </a:r>
-          </a:p>
-          <a:p>
-            <a:pPr>
-              <a:spcAft>
-                <a:spcPts val="400"/>
-              </a:spcAft>
-              <a:defRPr sz="1300" b="0">
-                <a:solidFill>
-                  <a:srgbClr val="1F3A3D"/>
-                </a:solidFill>
-              </a:defRPr>
-            </a:pPr>
-            <a:r>
-              <a:t>• De fout wordt níet groter als segmenten kleiner worden</a:t>
-            </a:r>
-          </a:p>
-          <a:p>
-            <a:pPr>
-              <a:spcAft>
-                <a:spcPts val="400"/>
-              </a:spcAft>
-              <a:defRPr sz="1300" b="0">
-                <a:solidFill>
-                  <a:srgbClr val="1F3A3D"/>
-                </a:solidFill>
-              </a:defRPr>
-            </a:pPr>
-            <a:r>
-              <a:t>• Mediane positiefout op de horizon: 1,1 m</a:t>
-            </a:r>
-          </a:p>
-        </p:txBody>
-      </p:sp>
-      <p:sp>
-        <p:nvSpPr>
-          <p:cNvPr id="8" name="TextBox 7"/>
-          <p:cNvSpPr txBox="1"/>
-          <p:nvPr/>
-        </p:nvSpPr>
-        <p:spPr>
-          <a:xfrm>
-            <a:off x="548640" y="5897880"/>
-            <a:ext cx="8229600" cy="548640"/>
-          </a:xfrm>
-          <a:prstGeom prst="rect">
-            <a:avLst/>
-          </a:prstGeom>
-          <a:noFill/>
-        </p:spPr>
-        <p:txBody>
-          <a:bodyPr wrap="square">
-            <a:spAutoFit/>
-          </a:bodyPr>
-          <a:lstStyle/>
-          <a:p>
-            <a:pPr>
-              <a:defRPr sz="1200" i="1">
-                <a:solidFill>
-                  <a:srgbClr val="6B7778"/>
-                </a:solidFill>
-              </a:defRPr>
-            </a:pPr>
-            <a:r>
-              <a:t>R = 5 segmenten (≈ 20 m) · dichte bemonstering 60 punten per lijn · elk segment eigen meetreeks</a:t>
-            </a:r>
-          </a:p>
-        </p:txBody>
-      </p:sp>
-    </p:spTree>
-  </p:cSld>
-  <p:clrMapOvr>
-    <a:masterClrMapping/>
-  </p:clrMapOvr>
-</p:sld>
-</file>
-
-<file path=ppt/slides/slide6.xml><?xml version="1.0" encoding="utf-8"?>
-<p:sld xmlns:a="http://schemas.openxmlformats.org/drawingml/2006/main" xmlns:p="http://schemas.openxmlformats.org/presentationml/2006/main" xmlns:r="http://schemas.openxmlformats.org/officeDocument/2006/relationships">
-  <p:cSld>
-    <p:spTree>
-      <p:nvGrpSpPr>
-        <p:cNvPr id="1" name=""/>
-        <p:cNvGrpSpPr/>
-        <p:nvPr/>
-      </p:nvGrpSpPr>
-      <p:grpSpPr/>
-      <p:sp>
-        <p:nvSpPr>
-          <p:cNvPr id="2" name="TextBox 1"/>
-          <p:cNvSpPr txBox="1"/>
-          <p:nvPr/>
-        </p:nvSpPr>
-        <p:spPr>
-          <a:xfrm>
-            <a:off x="548640" y="320040"/>
-            <a:ext cx="10972800" cy="731520"/>
-          </a:xfrm>
-          <a:prstGeom prst="rect">
-            <a:avLst/>
-          </a:prstGeom>
-          <a:noFill/>
-        </p:spPr>
-        <p:txBody>
-          <a:bodyPr wrap="none">
-            <a:spAutoFit/>
-          </a:bodyPr>
-          <a:lstStyle/>
-          <a:p>
-            <a:pPr>
-              <a:defRPr sz="3000" b="1">
-                <a:solidFill>
-                  <a:srgbClr val="2BB5A6"/>
-                </a:solidFill>
-              </a:defRPr>
-            </a:pPr>
-            <a:r>
-              <a:t>As 2 · Voorspellen op twee jaar of langer</a:t>
-            </a:r>
-          </a:p>
-        </p:txBody>
-      </p:sp>
-      <p:sp>
-        <p:nvSpPr>
-          <p:cNvPr id="3" name="TextBox 2"/>
-          <p:cNvSpPr txBox="1"/>
-          <p:nvPr/>
-        </p:nvSpPr>
-        <p:spPr>
-          <a:xfrm>
-            <a:off x="548640" y="960120"/>
-            <a:ext cx="10972800" cy="548640"/>
-          </a:xfrm>
-          <a:prstGeom prst="rect">
-            <a:avLst/>
-          </a:prstGeom>
-          <a:noFill/>
-        </p:spPr>
-        <p:txBody>
-          <a:bodyPr wrap="none">
-            <a:spAutoFit/>
-          </a:bodyPr>
-          <a:lstStyle/>
-          <a:p>
-            <a:pPr>
-              <a:defRPr sz="1700">
-                <a:solidFill>
-                  <a:srgbClr val="1F3A3D"/>
-                </a:solidFill>
-              </a:defRPr>
-            </a:pPr>
-            <a:r>
-              <a:t>Zelfde doel (m/jr), zelfde fout, alleen andere paren van metingen</a:t>
-            </a:r>
-          </a:p>
-        </p:txBody>
-      </p:sp>
-      <p:sp>
-        <p:nvSpPr>
-          <p:cNvPr id="4" name="TextBox 3"/>
-          <p:cNvSpPr txBox="1"/>
-          <p:nvPr/>
-        </p:nvSpPr>
-        <p:spPr>
-          <a:xfrm>
-            <a:off x="548640" y="6400800"/>
-            <a:ext cx="10972800" cy="274320"/>
-          </a:xfrm>
-          <a:prstGeom prst="rect">
-            <a:avLst/>
-          </a:prstGeom>
-          <a:noFill/>
-        </p:spPr>
-        <p:txBody>
-          <a:bodyPr wrap="none">
-            <a:spAutoFit/>
-          </a:bodyPr>
-          <a:lstStyle/>
-          <a:p>
-            <a:pPr>
-              <a:defRPr sz="1000">
-                <a:solidFill>
-                  <a:srgbClr val="6B7778"/>
-                </a:solidFill>
-              </a:defRPr>
-            </a:pPr>
-            <a:r>
-              <a:t>Oevererosietool · update 26-08-2026 · 6</a:t>
-            </a:r>
-          </a:p>
-        </p:txBody>
-      </p:sp>
-      <p:sp>
-        <p:nvSpPr>
-          <p:cNvPr id="5" name="TextBox 4"/>
-          <p:cNvSpPr txBox="1"/>
-          <p:nvPr/>
-        </p:nvSpPr>
-        <p:spPr>
-          <a:xfrm>
-            <a:off x="548640" y="1645920"/>
-            <a:ext cx="10972800" cy="4572000"/>
-          </a:xfrm>
-          <a:prstGeom prst="rect">
-            <a:avLst/>
-          </a:prstGeom>
-          <a:noFill/>
-        </p:spPr>
-        <p:txBody>
-          <a:bodyPr wrap="square">
-            <a:spAutoFit/>
-          </a:bodyPr>
-          <a:lstStyle/>
-          <a:p>
-            <a:pPr>
-              <a:spcAft>
-                <a:spcPts val="600"/>
-              </a:spcAft>
-              <a:defRPr sz="1600" b="1">
-                <a:solidFill>
-                  <a:srgbClr val="1F3A3D"/>
-                </a:solidFill>
-              </a:defRPr>
-            </a:pPr>
-            <a:r>
-              <a:t>Het probleem met één jaar</a:t>
-            </a:r>
-          </a:p>
-          <a:p>
-            <a:pPr>
-              <a:spcAft>
-                <a:spcPts val="600"/>
-              </a:spcAft>
-              <a:defRPr sz="1600" b="0">
-                <a:solidFill>
-                  <a:srgbClr val="1F3A3D"/>
-                </a:solidFill>
-              </a:defRPr>
-            </a:pPr>
-            <a:r>
-              <a:t>• Hoogtemodel: opnames 3–5 jaar uit elkaar → snelheid is stabiel</a:t>
-            </a:r>
-          </a:p>
-          <a:p>
-            <a:pPr>
-              <a:spcAft>
-                <a:spcPts val="600"/>
-              </a:spcAft>
-              <a:defRPr sz="1600" b="0">
-                <a:solidFill>
-                  <a:srgbClr val="1F3A3D"/>
-                </a:solidFill>
-              </a:defRPr>
-            </a:pPr>
-            <a:r>
-              <a:t>• SAM: jaarlijks → dezelfde meetruis gedeeld door 1 jaar → snelheid is grotendeels ruis</a:t>
-            </a:r>
-          </a:p>
-          <a:p>
-            <a:pPr>
-              <a:spcAft>
-                <a:spcPts val="600"/>
-              </a:spcAft>
-              <a:defRPr sz="1600" b="0">
-                <a:solidFill>
-                  <a:srgbClr val="1F3A3D"/>
-                </a:solidFill>
-              </a:defRPr>
-            </a:pPr>
-            <a:r>
-              <a:t>• De huidige testset mengt beide; het 1-jaars-cijfer is daardoor 'ruis-gedomineerd'</a:t>
-            </a:r>
-          </a:p>
-          <a:p>
-            <a:pPr>
-              <a:spcAft>
-                <a:spcPts val="600"/>
-              </a:spcAft>
-              <a:defRPr sz="1600" b="1">
-                <a:solidFill>
-                  <a:srgbClr val="1F3A3D"/>
-                </a:solidFill>
-              </a:defRPr>
-            </a:pPr>
-            <a:r>
-              <a:t>De regel</a:t>
-            </a:r>
-          </a:p>
-          <a:p>
-            <a:pPr>
-              <a:spcAft>
-                <a:spcPts val="600"/>
-              </a:spcAft>
-              <a:defRPr sz="1600" b="0">
-                <a:solidFill>
-                  <a:srgbClr val="1F3A3D"/>
-                </a:solidFill>
-              </a:defRPr>
-            </a:pPr>
-            <a:r>
-              <a:t>• Train en test alleen op paren van metingen ≥ 2 jaar uit elkaar — en gebruik álle zulke paren</a:t>
-            </a:r>
-          </a:p>
-          <a:p>
-            <a:pPr>
-              <a:spcAft>
-                <a:spcPts val="600"/>
-              </a:spcAft>
-              <a:defRPr sz="1600" b="0">
-                <a:solidFill>
-                  <a:srgbClr val="1F3A3D"/>
-                </a:solidFill>
-              </a:defRPr>
-            </a:pPr>
-            <a:r>
-              <a:t>• Eén vlak met 6 metingen levert 10 leervoorbeelden in plaats van 1</a:t>
-            </a:r>
-          </a:p>
-          <a:p>
-            <a:pPr>
-              <a:spcAft>
-                <a:spcPts val="600"/>
-              </a:spcAft>
-              <a:defRPr sz="1600" b="0">
-                <a:solidFill>
-                  <a:srgbClr val="1F3A3D"/>
-                </a:solidFill>
-              </a:defRPr>
-            </a:pPr>
-            <a:r>
-              <a:t>• Wordt vanzelf beter met elk SAM-jaar (3-jaars-paren zijn er nu nog te weinig)</a:t>
-            </a:r>
-          </a:p>
-          <a:p>
-            <a:pPr>
-              <a:spcAft>
-                <a:spcPts val="600"/>
-              </a:spcAft>
-              <a:defRPr sz="1600" b="1">
-                <a:solidFill>
-                  <a:srgbClr val="1F3A3D"/>
-                </a:solidFill>
-              </a:defRPr>
-            </a:pPr>
-            <a:r>
-              <a:t>Wat dit is en niet is</a:t>
-            </a:r>
-          </a:p>
-          <a:p>
-            <a:pPr>
-              <a:spcAft>
-                <a:spcPts val="600"/>
-              </a:spcAft>
-              <a:defRPr sz="1600" b="0">
-                <a:solidFill>
-                  <a:srgbClr val="1F3A3D"/>
-                </a:solidFill>
-              </a:defRPr>
-            </a:pPr>
-            <a:r>
-              <a:t>• Dit is hoe het alarm gescoord wordt, niet een ander model: de 1-jaars-cijfers blijven bestaan</a:t>
-            </a:r>
-          </a:p>
-        </p:txBody>
-      </p:sp>
-    </p:spTree>
-  </p:cSld>
-  <p:clrMapOvr>
-    <a:masterClrMapping/>
-  </p:clrMapOvr>
-</p:sld>
-</file>
-
-<file path=ppt/slides/slide7.xml><?xml version="1.0" encoding="utf-8"?>
-<p:sld xmlns:a="http://schemas.openxmlformats.org/drawingml/2006/main" xmlns:p="http://schemas.openxmlformats.org/presentationml/2006/main" xmlns:r="http://schemas.openxmlformats.org/officeDocument/2006/relationships">
-  <p:cSld>
-    <p:spTree>
-      <p:nvGrpSpPr>
-        <p:cNvPr id="1" name=""/>
-        <p:cNvGrpSpPr/>
-        <p:nvPr/>
-      </p:nvGrpSpPr>
-      <p:grpSpPr/>
-      <p:sp>
-        <p:nvSpPr>
-          <p:cNvPr id="2" name="TextBox 1"/>
-          <p:cNvSpPr txBox="1"/>
-          <p:nvPr/>
-        </p:nvSpPr>
-        <p:spPr>
-          <a:xfrm>
-            <a:off x="548640" y="320040"/>
-            <a:ext cx="10972800" cy="731520"/>
-          </a:xfrm>
-          <a:prstGeom prst="rect">
-            <a:avLst/>
-          </a:prstGeom>
-          <a:noFill/>
-        </p:spPr>
-        <p:txBody>
-          <a:bodyPr wrap="none">
-            <a:spAutoFit/>
-          </a:bodyPr>
-          <a:lstStyle/>
-          <a:p>
-            <a:pPr>
-              <a:defRPr sz="3000" b="1">
-                <a:solidFill>
-                  <a:srgbClr val="2BB5A6"/>
-                </a:solidFill>
-              </a:defRPr>
-            </a:pPr>
-            <a:r>
-              <a:t>Scorebord — eerlijk gemeten</a:t>
-            </a:r>
-          </a:p>
-        </p:txBody>
-      </p:sp>
-      <p:sp>
-        <p:nvSpPr>
-          <p:cNvPr id="3" name="TextBox 2"/>
-          <p:cNvSpPr txBox="1"/>
-          <p:nvPr/>
-        </p:nvSpPr>
-        <p:spPr>
-          <a:xfrm>
-            <a:off x="548640" y="960120"/>
-            <a:ext cx="10972800" cy="548640"/>
-          </a:xfrm>
-          <a:prstGeom prst="rect">
-            <a:avLst/>
-          </a:prstGeom>
-          <a:noFill/>
-        </p:spPr>
-        <p:txBody>
-          <a:bodyPr wrap="none">
-            <a:spAutoFit/>
-          </a:bodyPr>
-          <a:lstStyle/>
-          <a:p>
-            <a:pPr>
-              <a:defRPr sz="1700">
-                <a:solidFill>
-                  <a:srgbClr val="1F3A3D"/>
-                </a:solidFill>
-              </a:defRPr>
-            </a:pPr>
-            <a:r>
-              <a:t>Alleen binnen een rij vergelijken: elke rij is een andere meetlat</a:t>
-            </a:r>
-          </a:p>
-        </p:txBody>
-      </p:sp>
-      <p:sp>
-        <p:nvSpPr>
-          <p:cNvPr id="4" name="TextBox 3"/>
-          <p:cNvSpPr txBox="1"/>
-          <p:nvPr/>
-        </p:nvSpPr>
-        <p:spPr>
-          <a:xfrm>
-            <a:off x="548640" y="6400800"/>
-            <a:ext cx="10972800" cy="274320"/>
-          </a:xfrm>
-          <a:prstGeom prst="rect">
-            <a:avLst/>
-          </a:prstGeom>
-          <a:noFill/>
-        </p:spPr>
-        <p:txBody>
-          <a:bodyPr wrap="none">
-            <a:spAutoFit/>
-          </a:bodyPr>
-          <a:lstStyle/>
-          <a:p>
-            <a:pPr>
-              <a:defRPr sz="1000">
-                <a:solidFill>
-                  <a:srgbClr val="6B7778"/>
-                </a:solidFill>
-              </a:defRPr>
-            </a:pPr>
-            <a:r>
-              <a:t>Oevererosietool · update 26-08-2026 · 7</a:t>
             </a:r>
           </a:p>
         </p:txBody>
@@ -6962,7 +4031,7 @@
           <p:nvPr/>
         </p:nvGraphicFramePr>
         <p:xfrm>
-          <a:off x="548640" y="1737360"/>
+          <a:off x="548640" y="1645920"/>
           <a:ext cx="11064240" cy="1828800"/>
         </p:xfrm>
         <a:graphic>
@@ -7504,7 +4573,7 @@
               </a:defRPr>
             </a:pPr>
             <a:r>
-              <a:t>• Binnen de hybride 1-jaars-meetlat: 4,12 → 2,47 en ≈ 8,3 → 5,0; vlakken met voorspelling 8.006 → 10.721</a:t>
+              <a:t>• Vlakken met voorspelling 8.006 → 10.721</a:t>
             </a:r>
           </a:p>
           <a:p>
@@ -7519,7 +4588,7 @@
               </a:defRPr>
             </a:pPr>
             <a:r>
-              <a:t>• Het 1,23 is m/jr op een gladdere meetlat — lees het als '31 % beter dan niets doen', niet als '2× beter dan 2,47'</a:t>
+              <a:t>• 1,23 is m/jr op een gladdere meetlat — lees het als '31 % beter dan niets doen', niet als '2× beter dan 2,47'</a:t>
             </a:r>
           </a:p>
           <a:p>
@@ -7535,6 +4604,3254 @@
             </a:pPr>
             <a:r>
               <a:t>• Toezegging 10× (op 4,12): nu 1,7× op die exacte meetlat, met strengere validatie</a:t>
+            </a:r>
+          </a:p>
+        </p:txBody>
+      </p:sp>
+    </p:spTree>
+  </p:cSld>
+  <p:clrMapOvr>
+    <a:masterClrMapping/>
+  </p:clrMapOvr>
+</p:sld>
+</file>
+
+<file path=ppt/slides/slide12.xml><?xml version="1.0" encoding="utf-8"?>
+<p:sld xmlns:a="http://schemas.openxmlformats.org/drawingml/2006/main" xmlns:p="http://schemas.openxmlformats.org/presentationml/2006/main" xmlns:r="http://schemas.openxmlformats.org/officeDocument/2006/relationships">
+  <p:cSld>
+    <p:spTree>
+      <p:nvGrpSpPr>
+        <p:cNvPr id="1" name=""/>
+        <p:cNvGrpSpPr/>
+        <p:nvPr/>
+      </p:nvGrpSpPr>
+      <p:grpSpPr/>
+      <p:sp>
+        <p:nvSpPr>
+          <p:cNvPr id="2" name="TextBox 1"/>
+          <p:cNvSpPr txBox="1"/>
+          <p:nvPr/>
+        </p:nvSpPr>
+        <p:spPr>
+          <a:xfrm>
+            <a:off x="548640" y="320040"/>
+            <a:ext cx="10972800" cy="731520"/>
+          </a:xfrm>
+          <a:prstGeom prst="rect">
+            <a:avLst/>
+          </a:prstGeom>
+          <a:noFill/>
+        </p:spPr>
+        <p:txBody>
+          <a:bodyPr wrap="none">
+            <a:spAutoFit/>
+          </a:bodyPr>
+          <a:lstStyle/>
+          <a:p>
+            <a:pPr>
+              <a:defRPr sz="3000" b="1">
+                <a:solidFill>
+                  <a:srgbClr val="2BB5A6"/>
+                </a:solidFill>
+              </a:defRPr>
+            </a:pPr>
+            <a:r>
+              <a:t>Wat we vragen</a:t>
+            </a:r>
+          </a:p>
+        </p:txBody>
+      </p:sp>
+      <p:sp>
+        <p:nvSpPr>
+          <p:cNvPr id="3" name="TextBox 2"/>
+          <p:cNvSpPr txBox="1"/>
+          <p:nvPr/>
+        </p:nvSpPr>
+        <p:spPr>
+          <a:xfrm>
+            <a:off x="548640" y="960120"/>
+            <a:ext cx="10972800" cy="548640"/>
+          </a:xfrm>
+          <a:prstGeom prst="rect">
+            <a:avLst/>
+          </a:prstGeom>
+          <a:noFill/>
+        </p:spPr>
+        <p:txBody>
+          <a:bodyPr wrap="none">
+            <a:spAutoFit/>
+          </a:bodyPr>
+          <a:lstStyle/>
+          <a:p>
+            <a:pPr>
+              <a:defRPr sz="1700">
+                <a:solidFill>
+                  <a:srgbClr val="1F3A3D"/>
+                </a:solidFill>
+              </a:defRPr>
+            </a:pPr>
+            <a:r>
+              <a:t>Labelen is trial-and-error — geen eenmalige levering</a:t>
+            </a:r>
+          </a:p>
+        </p:txBody>
+      </p:sp>
+      <p:sp>
+        <p:nvSpPr>
+          <p:cNvPr id="4" name="TextBox 3"/>
+          <p:cNvSpPr txBox="1"/>
+          <p:nvPr/>
+        </p:nvSpPr>
+        <p:spPr>
+          <a:xfrm>
+            <a:off x="548640" y="6400800"/>
+            <a:ext cx="10972800" cy="274320"/>
+          </a:xfrm>
+          <a:prstGeom prst="rect">
+            <a:avLst/>
+          </a:prstGeom>
+          <a:noFill/>
+        </p:spPr>
+        <p:txBody>
+          <a:bodyPr wrap="none">
+            <a:spAutoFit/>
+          </a:bodyPr>
+          <a:lstStyle/>
+          <a:p>
+            <a:pPr>
+              <a:defRPr sz="1000">
+                <a:solidFill>
+                  <a:srgbClr val="6B7778"/>
+                </a:solidFill>
+              </a:defRPr>
+            </a:pPr>
+            <a:r>
+              <a:t>Oevererosietool · update 26-08-2026 · 12</a:t>
+            </a:r>
+          </a:p>
+        </p:txBody>
+      </p:sp>
+      <p:sp>
+        <p:nvSpPr>
+          <p:cNvPr id="5" name="Rectangle 4"/>
+          <p:cNvSpPr/>
+          <p:nvPr/>
+        </p:nvSpPr>
+        <p:spPr>
+          <a:xfrm>
+            <a:off x="548640" y="1645920"/>
+            <a:ext cx="3566160" cy="548640"/>
+          </a:xfrm>
+          <a:prstGeom prst="rect">
+            <a:avLst/>
+          </a:prstGeom>
+          <a:solidFill>
+            <a:srgbClr val="2BB5A6"/>
+          </a:solidFill>
+          <a:ln>
+            <a:noFill/>
+          </a:ln>
+        </p:spPr>
+        <p:style>
+          <a:lnRef idx="1">
+            <a:schemeClr val="accent1"/>
+          </a:lnRef>
+          <a:fillRef idx="3">
+            <a:schemeClr val="accent1"/>
+          </a:fillRef>
+          <a:effectRef idx="2">
+            <a:schemeClr val="accent1"/>
+          </a:effectRef>
+          <a:fontRef idx="minor">
+            <a:schemeClr val="lt1"/>
+          </a:fontRef>
+        </p:style>
+        <p:txBody>
+          <a:bodyPr rtlCol="0" anchor="ctr"/>
+          <a:lstStyle/>
+          <a:p>
+            <a:pPr algn="ctr">
+              <a:defRPr sz="1800" b="1">
+                <a:solidFill>
+                  <a:srgbClr val="FFFFFF"/>
+                </a:solidFill>
+              </a:defRPr>
+            </a:pPr>
+            <a:r>
+              <a:t>Hoogtemodel-engineers</a:t>
+            </a:r>
+          </a:p>
+        </p:txBody>
+      </p:sp>
+      <p:sp>
+        <p:nvSpPr>
+          <p:cNvPr id="6" name="TextBox 5"/>
+          <p:cNvSpPr txBox="1"/>
+          <p:nvPr/>
+        </p:nvSpPr>
+        <p:spPr>
+          <a:xfrm>
+            <a:off x="548640" y="2377440"/>
+            <a:ext cx="3566160" cy="3474720"/>
+          </a:xfrm>
+          <a:prstGeom prst="rect">
+            <a:avLst/>
+          </a:prstGeom>
+          <a:noFill/>
+        </p:spPr>
+        <p:txBody>
+          <a:bodyPr wrap="square">
+            <a:spAutoFit/>
+          </a:bodyPr>
+          <a:lstStyle/>
+          <a:p>
+            <a:pPr>
+              <a:spcAft>
+                <a:spcPts val="600"/>
+              </a:spcAft>
+              <a:defRPr sz="1500" b="0">
+                <a:solidFill>
+                  <a:srgbClr val="1F3A3D"/>
+                </a:solidFill>
+              </a:defRPr>
+            </a:pPr>
+            <a:r>
+              <a:t>• De vijfdeling (scope_coverage) meeleveren</a:t>
+            </a:r>
+          </a:p>
+          <a:p>
+            <a:pPr>
+              <a:spcAft>
+                <a:spcPts val="600"/>
+              </a:spcAft>
+              <a:defRPr sz="1500" b="0">
+                <a:solidFill>
+                  <a:srgbClr val="1F3A3D"/>
+                </a:solidFill>
+              </a:defRPr>
+            </a:pPr>
+            <a:r>
+              <a:t>• Per lijn een vlag: 'dit is een constructie / verkeerde oever'</a:t>
+            </a:r>
+          </a:p>
+          <a:p>
+            <a:pPr>
+              <a:spcAft>
+                <a:spcPts val="600"/>
+              </a:spcAft>
+              <a:defRPr sz="1500" b="0">
+                <a:solidFill>
+                  <a:srgbClr val="1F3A3D"/>
+                </a:solidFill>
+              </a:defRPr>
+            </a:pPr>
+            <a:r>
+              <a:t>• Bekende randgevallen: meeroeverig, hoogwater</a:t>
+            </a:r>
+          </a:p>
+        </p:txBody>
+      </p:sp>
+      <p:sp>
+        <p:nvSpPr>
+          <p:cNvPr id="7" name="Rectangle 6"/>
+          <p:cNvSpPr/>
+          <p:nvPr/>
+        </p:nvSpPr>
+        <p:spPr>
+          <a:xfrm>
+            <a:off x="4389120" y="1645920"/>
+            <a:ext cx="3566160" cy="548640"/>
+          </a:xfrm>
+          <a:prstGeom prst="rect">
+            <a:avLst/>
+          </a:prstGeom>
+          <a:solidFill>
+            <a:srgbClr val="2BB5A6"/>
+          </a:solidFill>
+          <a:ln>
+            <a:noFill/>
+          </a:ln>
+        </p:spPr>
+        <p:style>
+          <a:lnRef idx="1">
+            <a:schemeClr val="accent1"/>
+          </a:lnRef>
+          <a:fillRef idx="3">
+            <a:schemeClr val="accent1"/>
+          </a:fillRef>
+          <a:effectRef idx="2">
+            <a:schemeClr val="accent1"/>
+          </a:effectRef>
+          <a:fontRef idx="minor">
+            <a:schemeClr val="lt1"/>
+          </a:fontRef>
+        </p:style>
+        <p:txBody>
+          <a:bodyPr rtlCol="0" anchor="ctr"/>
+          <a:lstStyle/>
+          <a:p>
+            <a:pPr algn="ctr">
+              <a:defRPr sz="1800" b="1">
+                <a:solidFill>
+                  <a:srgbClr val="FFFFFF"/>
+                </a:solidFill>
+              </a:defRPr>
+            </a:pPr>
+            <a:r>
+              <a:t>SAM-engineers</a:t>
+            </a:r>
+          </a:p>
+        </p:txBody>
+      </p:sp>
+      <p:sp>
+        <p:nvSpPr>
+          <p:cNvPr id="8" name="TextBox 7"/>
+          <p:cNvSpPr txBox="1"/>
+          <p:nvPr/>
+        </p:nvSpPr>
+        <p:spPr>
+          <a:xfrm>
+            <a:off x="4389120" y="2377440"/>
+            <a:ext cx="3566160" cy="3474720"/>
+          </a:xfrm>
+          <a:prstGeom prst="rect">
+            <a:avLst/>
+          </a:prstGeom>
+          <a:noFill/>
+        </p:spPr>
+        <p:txBody>
+          <a:bodyPr wrap="square">
+            <a:spAutoFit/>
+          </a:bodyPr>
+          <a:lstStyle/>
+          <a:p>
+            <a:pPr>
+              <a:spcAft>
+                <a:spcPts val="600"/>
+              </a:spcAft>
+              <a:defRPr sz="1500" b="0">
+                <a:solidFill>
+                  <a:srgbClr val="1F3A3D"/>
+                </a:solidFill>
+              </a:defRPr>
+            </a:pPr>
+            <a:r>
+              <a:t>• Kwaliteitsvlag per meting</a:t>
+            </a:r>
+          </a:p>
+          <a:p>
+            <a:pPr>
+              <a:spcAft>
+                <a:spcPts val="600"/>
+              </a:spcAft>
+              <a:defRPr sz="1500" b="0">
+                <a:solidFill>
+                  <a:srgbClr val="1F3A3D"/>
+                </a:solidFill>
+              </a:defRPr>
+            </a:pPr>
+            <a:r>
+              <a:t>• Vooral: méér jaren — elk jaar maakt het model vanzelf beter</a:t>
+            </a:r>
+          </a:p>
+          <a:p>
+            <a:pPr>
+              <a:spcAft>
+                <a:spcPts val="600"/>
+              </a:spcAft>
+              <a:defRPr sz="1500" b="0">
+                <a:solidFill>
+                  <a:srgbClr val="1F3A3D"/>
+                </a:solidFill>
+              </a:defRPr>
+            </a:pPr>
+            <a:r>
+              <a:t>• Waar mogelijk: één lijn per meetmoment</a:t>
+            </a:r>
+          </a:p>
+        </p:txBody>
+      </p:sp>
+      <p:sp>
+        <p:nvSpPr>
+          <p:cNvPr id="9" name="Rectangle 8"/>
+          <p:cNvSpPr/>
+          <p:nvPr/>
+        </p:nvSpPr>
+        <p:spPr>
+          <a:xfrm>
+            <a:off x="8229600" y="1645920"/>
+            <a:ext cx="3566160" cy="548640"/>
+          </a:xfrm>
+          <a:prstGeom prst="rect">
+            <a:avLst/>
+          </a:prstGeom>
+          <a:solidFill>
+            <a:srgbClr val="E07A3F"/>
+          </a:solidFill>
+          <a:ln>
+            <a:noFill/>
+          </a:ln>
+        </p:spPr>
+        <p:style>
+          <a:lnRef idx="1">
+            <a:schemeClr val="accent1"/>
+          </a:lnRef>
+          <a:fillRef idx="3">
+            <a:schemeClr val="accent1"/>
+          </a:fillRef>
+          <a:effectRef idx="2">
+            <a:schemeClr val="accent1"/>
+          </a:effectRef>
+          <a:fontRef idx="minor">
+            <a:schemeClr val="lt1"/>
+          </a:fontRef>
+        </p:style>
+        <p:txBody>
+          <a:bodyPr rtlCol="0" anchor="ctr"/>
+          <a:lstStyle/>
+          <a:p>
+            <a:pPr algn="ctr">
+              <a:defRPr sz="1800" b="1">
+                <a:solidFill>
+                  <a:srgbClr val="FFFFFF"/>
+                </a:solidFill>
+              </a:defRPr>
+            </a:pPr>
+            <a:r>
+              <a:t>Samen</a:t>
+            </a:r>
+          </a:p>
+        </p:txBody>
+      </p:sp>
+      <p:sp>
+        <p:nvSpPr>
+          <p:cNvPr id="10" name="TextBox 9"/>
+          <p:cNvSpPr txBox="1"/>
+          <p:nvPr/>
+        </p:nvSpPr>
+        <p:spPr>
+          <a:xfrm>
+            <a:off x="8229600" y="2377440"/>
+            <a:ext cx="3566160" cy="3474720"/>
+          </a:xfrm>
+          <a:prstGeom prst="rect">
+            <a:avLst/>
+          </a:prstGeom>
+          <a:noFill/>
+        </p:spPr>
+        <p:txBody>
+          <a:bodyPr wrap="square">
+            <a:spAutoFit/>
+          </a:bodyPr>
+          <a:lstStyle/>
+          <a:p>
+            <a:pPr>
+              <a:spcAft>
+                <a:spcPts val="600"/>
+              </a:spcAft>
+              <a:defRPr sz="1500" b="0">
+                <a:solidFill>
+                  <a:srgbClr val="1F3A3D"/>
+                </a:solidFill>
+              </a:defRPr>
+            </a:pPr>
+            <a:r>
+              <a:t>• Labelronde in QGIS: wij leveren de gesorteerde lijst twijfelgevallen, jullie het oordeel</a:t>
+            </a:r>
+          </a:p>
+          <a:p>
+            <a:pPr>
+              <a:spcAft>
+                <a:spcPts val="600"/>
+              </a:spcAft>
+              <a:defRPr sz="1500" b="0">
+                <a:solidFill>
+                  <a:srgbClr val="1F3A3D"/>
+                </a:solidFill>
+              </a:defRPr>
+            </a:pPr>
+            <a:r>
+              <a:t>• Eerste ronde: ~200 vlakken, twee uur</a:t>
+            </a:r>
+          </a:p>
+          <a:p>
+            <a:pPr>
+              <a:spcAft>
+                <a:spcPts val="600"/>
+              </a:spcAft>
+              <a:defRPr sz="1500" b="0">
+                <a:solidFill>
+                  <a:srgbClr val="1F3A3D"/>
+                </a:solidFill>
+              </a:defRPr>
+            </a:pPr>
+            <a:r>
+              <a:t>• Daarna meten we opnieuw</a:t>
+            </a:r>
+          </a:p>
+        </p:txBody>
+      </p:sp>
+    </p:spTree>
+  </p:cSld>
+  <p:clrMapOvr>
+    <a:masterClrMapping/>
+  </p:clrMapOvr>
+</p:sld>
+</file>
+
+<file path=ppt/slides/slide13.xml><?xml version="1.0" encoding="utf-8"?>
+<p:sld xmlns:a="http://schemas.openxmlformats.org/drawingml/2006/main" xmlns:p="http://schemas.openxmlformats.org/presentationml/2006/main" xmlns:r="http://schemas.openxmlformats.org/officeDocument/2006/relationships">
+  <p:cSld>
+    <p:spTree>
+      <p:nvGrpSpPr>
+        <p:cNvPr id="1" name=""/>
+        <p:cNvGrpSpPr/>
+        <p:nvPr/>
+      </p:nvGrpSpPr>
+      <p:grpSpPr/>
+      <p:sp>
+        <p:nvSpPr>
+          <p:cNvPr id="2" name="TextBox 1"/>
+          <p:cNvSpPr txBox="1"/>
+          <p:nvPr/>
+        </p:nvSpPr>
+        <p:spPr>
+          <a:xfrm>
+            <a:off x="548640" y="320040"/>
+            <a:ext cx="10972800" cy="731520"/>
+          </a:xfrm>
+          <a:prstGeom prst="rect">
+            <a:avLst/>
+          </a:prstGeom>
+          <a:noFill/>
+        </p:spPr>
+        <p:txBody>
+          <a:bodyPr wrap="none">
+            <a:spAutoFit/>
+          </a:bodyPr>
+          <a:lstStyle/>
+          <a:p>
+            <a:pPr>
+              <a:defRPr sz="3000" b="1">
+                <a:solidFill>
+                  <a:srgbClr val="2BB5A6"/>
+                </a:solidFill>
+              </a:defRPr>
+            </a:pPr>
+            <a:r>
+              <a:t>Wat dit oplevert voor asset management</a:t>
+            </a:r>
+          </a:p>
+        </p:txBody>
+      </p:sp>
+      <p:sp>
+        <p:nvSpPr>
+          <p:cNvPr id="3" name="TextBox 2"/>
+          <p:cNvSpPr txBox="1"/>
+          <p:nvPr/>
+        </p:nvSpPr>
+        <p:spPr>
+          <a:xfrm>
+            <a:off x="548640" y="960120"/>
+            <a:ext cx="10972800" cy="548640"/>
+          </a:xfrm>
+          <a:prstGeom prst="rect">
+            <a:avLst/>
+          </a:prstGeom>
+          <a:noFill/>
+        </p:spPr>
+        <p:txBody>
+          <a:bodyPr wrap="none">
+            <a:spAutoFit/>
+          </a:bodyPr>
+          <a:lstStyle/>
+          <a:p>
+            <a:pPr>
+              <a:defRPr sz="1700">
+                <a:solidFill>
+                  <a:srgbClr val="1F3A3D"/>
+                </a:solidFill>
+              </a:defRPr>
+            </a:pPr>
+            <a:r>
+              <a:t>Van 'dit vlak gemiddeld' naar 'deze 20 meter'</a:t>
+            </a:r>
+          </a:p>
+        </p:txBody>
+      </p:sp>
+      <p:sp>
+        <p:nvSpPr>
+          <p:cNvPr id="4" name="TextBox 3"/>
+          <p:cNvSpPr txBox="1"/>
+          <p:nvPr/>
+        </p:nvSpPr>
+        <p:spPr>
+          <a:xfrm>
+            <a:off x="548640" y="6400800"/>
+            <a:ext cx="10972800" cy="274320"/>
+          </a:xfrm>
+          <a:prstGeom prst="rect">
+            <a:avLst/>
+          </a:prstGeom>
+          <a:noFill/>
+        </p:spPr>
+        <p:txBody>
+          <a:bodyPr wrap="none">
+            <a:spAutoFit/>
+          </a:bodyPr>
+          <a:lstStyle/>
+          <a:p>
+            <a:pPr>
+              <a:defRPr sz="1000">
+                <a:solidFill>
+                  <a:srgbClr val="6B7778"/>
+                </a:solidFill>
+              </a:defRPr>
+            </a:pPr>
+            <a:r>
+              <a:t>Oevererosietool · update 26-08-2026 · 13</a:t>
+            </a:r>
+          </a:p>
+        </p:txBody>
+      </p:sp>
+      <p:pic>
+        <p:nvPicPr>
+          <p:cNvPr id="5" name="Picture 4" descr="r5_rijn_1220.png"/>
+          <p:cNvPicPr>
+            <a:picLocks noChangeAspect="1"/>
+          </p:cNvPicPr>
+          <p:nvPr/>
+        </p:nvPicPr>
+        <p:blipFill>
+          <a:blip r:embed="rId2"/>
+          <a:stretch>
+            <a:fillRect/>
+          </a:stretch>
+        </p:blipFill>
+        <p:spPr>
+          <a:xfrm>
+            <a:off x="548640" y="1554480"/>
+            <a:ext cx="3388524" cy="4480560"/>
+          </a:xfrm>
+          <a:prstGeom prst="rect">
+            <a:avLst/>
+          </a:prstGeom>
+        </p:spPr>
+      </p:pic>
+      <p:sp>
+        <p:nvSpPr>
+          <p:cNvPr id="6" name="TextBox 5"/>
+          <p:cNvSpPr txBox="1"/>
+          <p:nvPr/>
+        </p:nvSpPr>
+        <p:spPr>
+          <a:xfrm>
+            <a:off x="5120640" y="1737360"/>
+            <a:ext cx="6858000" cy="4114800"/>
+          </a:xfrm>
+          <a:prstGeom prst="rect">
+            <a:avLst/>
+          </a:prstGeom>
+          <a:noFill/>
+        </p:spPr>
+        <p:txBody>
+          <a:bodyPr wrap="square">
+            <a:spAutoFit/>
+          </a:bodyPr>
+          <a:lstStyle/>
+          <a:p>
+            <a:pPr>
+              <a:spcAft>
+                <a:spcPts val="600"/>
+              </a:spcAft>
+              <a:defRPr sz="1500" b="0">
+                <a:solidFill>
+                  <a:srgbClr val="1F3A3D"/>
+                </a:solidFill>
+              </a:defRPr>
+            </a:pPr>
+            <a:r>
+              <a:t>• Per segment een verwachte positie ≥ 2 jaar vooruit (48.000 segmenten, 10.000 vlakken)</a:t>
+            </a:r>
+          </a:p>
+          <a:p>
+            <a:pPr>
+              <a:spcAft>
+                <a:spcPts val="600"/>
+              </a:spcAft>
+              <a:defRPr sz="1500" b="0">
+                <a:solidFill>
+                  <a:srgbClr val="1F3A3D"/>
+                </a:solidFill>
+              </a:defRPr>
+            </a:pPr>
+            <a:r>
+              <a:t>• Een vlak kleurt rood zodra énig segment de signaleringslijn nadert — met het segment erbij</a:t>
+            </a:r>
+          </a:p>
+          <a:p>
+            <a:pPr>
+              <a:spcAft>
+                <a:spcPts val="600"/>
+              </a:spcAft>
+              <a:defRPr sz="1500" b="0">
+                <a:solidFill>
+                  <a:srgbClr val="1F3A3D"/>
+                </a:solidFill>
+              </a:defRPr>
+            </a:pPr>
+            <a:r>
+              <a:t>• Kribvakken en meerdelige vlakken worden daarmee vanzelf goed behandeld</a:t>
+            </a:r>
+          </a:p>
+          <a:p>
+            <a:pPr>
+              <a:spcAft>
+                <a:spcPts val="600"/>
+              </a:spcAft>
+              <a:defRPr sz="1500" b="0">
+                <a:solidFill>
+                  <a:srgbClr val="1F3A3D"/>
+                </a:solidFill>
+              </a:defRPr>
+            </a:pPr>
+            <a:r>
+              <a:t>• Bestaande stoplicht-kaart en tijdslider blijven; dit komt er als laag bij</a:t>
+            </a:r>
+          </a:p>
+          <a:p>
+            <a:pPr>
+              <a:spcAft>
+                <a:spcPts val="600"/>
+              </a:spcAft>
+              <a:defRPr sz="1500" b="1">
+                <a:solidFill>
+                  <a:srgbClr val="1F3A3D"/>
+                </a:solidFill>
+              </a:defRPr>
+            </a:pPr>
+            <a:r>
+              <a:t>Status: segmentvoorspellingen staan klaar; koppeling aan het VVR-alarm is de volgende stap</a:t>
+            </a:r>
+          </a:p>
+        </p:txBody>
+      </p:sp>
+    </p:spTree>
+  </p:cSld>
+  <p:clrMapOvr>
+    <a:masterClrMapping/>
+  </p:clrMapOvr>
+</p:sld>
+</file>
+
+<file path=ppt/slides/slide14.xml><?xml version="1.0" encoding="utf-8"?>
+<p:sld xmlns:a="http://schemas.openxmlformats.org/drawingml/2006/main" xmlns:p="http://schemas.openxmlformats.org/presentationml/2006/main" xmlns:r="http://schemas.openxmlformats.org/officeDocument/2006/relationships">
+  <p:cSld>
+    <p:spTree>
+      <p:nvGrpSpPr>
+        <p:cNvPr id="1" name=""/>
+        <p:cNvGrpSpPr/>
+        <p:nvPr/>
+      </p:nvGrpSpPr>
+      <p:grpSpPr/>
+      <p:sp>
+        <p:nvSpPr>
+          <p:cNvPr id="2" name="TextBox 1"/>
+          <p:cNvSpPr txBox="1"/>
+          <p:nvPr/>
+        </p:nvSpPr>
+        <p:spPr>
+          <a:xfrm>
+            <a:off x="548640" y="320040"/>
+            <a:ext cx="10972800" cy="731520"/>
+          </a:xfrm>
+          <a:prstGeom prst="rect">
+            <a:avLst/>
+          </a:prstGeom>
+          <a:noFill/>
+        </p:spPr>
+        <p:txBody>
+          <a:bodyPr wrap="none">
+            <a:spAutoFit/>
+          </a:bodyPr>
+          <a:lstStyle/>
+          <a:p>
+            <a:pPr>
+              <a:defRPr sz="3000" b="1">
+                <a:solidFill>
+                  <a:srgbClr val="2BB5A6"/>
+                </a:solidFill>
+              </a:defRPr>
+            </a:pPr>
+            <a:r>
+              <a:t>Samenvattend</a:t>
+            </a:r>
+          </a:p>
+        </p:txBody>
+      </p:sp>
+      <p:sp>
+        <p:nvSpPr>
+          <p:cNvPr id="3" name="TextBox 2"/>
+          <p:cNvSpPr txBox="1"/>
+          <p:nvPr/>
+        </p:nvSpPr>
+        <p:spPr>
+          <a:xfrm>
+            <a:off x="548640" y="6400800"/>
+            <a:ext cx="10972800" cy="274320"/>
+          </a:xfrm>
+          <a:prstGeom prst="rect">
+            <a:avLst/>
+          </a:prstGeom>
+          <a:noFill/>
+        </p:spPr>
+        <p:txBody>
+          <a:bodyPr wrap="none">
+            <a:spAutoFit/>
+          </a:bodyPr>
+          <a:lstStyle/>
+          <a:p>
+            <a:pPr>
+              <a:defRPr sz="1000">
+                <a:solidFill>
+                  <a:srgbClr val="6B7778"/>
+                </a:solidFill>
+              </a:defRPr>
+            </a:pPr>
+            <a:r>
+              <a:t>Oevererosietool · update 26-08-2026 · 14</a:t>
+            </a:r>
+          </a:p>
+        </p:txBody>
+      </p:sp>
+      <p:sp>
+        <p:nvSpPr>
+          <p:cNvPr id="4" name="TextBox 3"/>
+          <p:cNvSpPr txBox="1"/>
+          <p:nvPr/>
+        </p:nvSpPr>
+        <p:spPr>
+          <a:xfrm>
+            <a:off x="548640" y="1463040"/>
+            <a:ext cx="10972800" cy="4754880"/>
+          </a:xfrm>
+          <a:prstGeom prst="rect">
+            <a:avLst/>
+          </a:prstGeom>
+          <a:noFill/>
+        </p:spPr>
+        <p:txBody>
+          <a:bodyPr wrap="square">
+            <a:spAutoFit/>
+          </a:bodyPr>
+          <a:lstStyle/>
+          <a:p>
+            <a:pPr>
+              <a:spcAft>
+                <a:spcPts val="800"/>
+              </a:spcAft>
+              <a:defRPr sz="1800" b="1">
+                <a:solidFill>
+                  <a:srgbClr val="1F3A3D"/>
+                </a:solidFill>
+              </a:defRPr>
+            </a:pPr>
+            <a:r>
+              <a:t>Model: klaar en eerlijk gevalideerd</a:t>
+            </a:r>
+          </a:p>
+          <a:p>
+            <a:pPr>
+              <a:spcAft>
+                <a:spcPts val="800"/>
+              </a:spcAft>
+              <a:defRPr sz="1800" b="0">
+                <a:solidFill>
+                  <a:srgbClr val="1F3A3D"/>
+                </a:solidFill>
+              </a:defRPr>
+            </a:pPr>
+            <a:r>
+              <a:t>• Hybride bron, opschoonregels, historie-features, testset buiten de training</a:t>
+            </a:r>
+          </a:p>
+          <a:p>
+            <a:pPr>
+              <a:spcAft>
+                <a:spcPts val="800"/>
+              </a:spcAft>
+              <a:defRPr sz="1800" b="1">
+                <a:solidFill>
+                  <a:srgbClr val="1F3A3D"/>
+                </a:solidFill>
+              </a:defRPr>
+            </a:pPr>
+            <a:r>
+              <a:t>Van lijn naar oever</a:t>
+            </a:r>
+          </a:p>
+          <a:p>
+            <a:pPr>
+              <a:spcAft>
+                <a:spcPts val="800"/>
+              </a:spcAft>
+              <a:defRPr sz="1800" b="0">
+                <a:solidFill>
+                  <a:srgbClr val="1F3A3D"/>
+                </a:solidFill>
+              </a:defRPr>
+            </a:pPr>
+            <a:r>
+              <a:t>• Vijf segmenten per vlak; gemeten én voorspelde oever als lijn; positiefout ≈ 1 m</a:t>
+            </a:r>
+          </a:p>
+          <a:p>
+            <a:pPr>
+              <a:spcAft>
+                <a:spcPts val="800"/>
+              </a:spcAft>
+              <a:defRPr sz="1800" b="1">
+                <a:solidFill>
+                  <a:srgbClr val="1F3A3D"/>
+                </a:solidFill>
+              </a:defRPr>
+            </a:pPr>
+            <a:r>
+              <a:t>Bottleneck: gelabelde input, niet het algoritme</a:t>
+            </a:r>
+          </a:p>
+          <a:p>
+            <a:pPr>
+              <a:spcAft>
+                <a:spcPts val="800"/>
+              </a:spcAft>
+              <a:defRPr sz="1800" b="0">
+                <a:solidFill>
+                  <a:srgbClr val="1F3A3D"/>
+                </a:solidFill>
+              </a:defRPr>
+            </a:pPr>
+            <a:r>
+              <a:t>• Opschonen leverde 12× zoveel als modelleren; de regels raken op — wat overblijft vraagt een oordeel</a:t>
+            </a:r>
+          </a:p>
+          <a:p>
+            <a:pPr>
+              <a:spcAft>
+                <a:spcPts val="800"/>
+              </a:spcAft>
+              <a:defRPr sz="1800" b="1">
+                <a:solidFill>
+                  <a:srgbClr val="1F3A3D"/>
+                </a:solidFill>
+              </a:defRPr>
+            </a:pPr>
+            <a:r>
+              <a:t>Volgende stap</a:t>
+            </a:r>
+          </a:p>
+          <a:p>
+            <a:pPr>
+              <a:spcAft>
+                <a:spcPts val="800"/>
+              </a:spcAft>
+              <a:defRPr sz="1800" b="0">
+                <a:solidFill>
+                  <a:srgbClr val="1F3A3D"/>
+                </a:solidFill>
+              </a:defRPr>
+            </a:pPr>
+            <a:r>
+              <a:t>• Labelronde met SAM- en hoogtemodel-engineers · VVR-alarm op segmentniveau · daarna opnieuw meten</a:t>
+            </a:r>
+          </a:p>
+        </p:txBody>
+      </p:sp>
+    </p:spTree>
+  </p:cSld>
+  <p:clrMapOvr>
+    <a:masterClrMapping/>
+  </p:clrMapOvr>
+</p:sld>
+</file>
+
+<file path=ppt/slides/slide2.xml><?xml version="1.0" encoding="utf-8"?>
+<p:sld xmlns:a="http://schemas.openxmlformats.org/drawingml/2006/main" xmlns:p="http://schemas.openxmlformats.org/presentationml/2006/main" xmlns:r="http://schemas.openxmlformats.org/officeDocument/2006/relationships">
+  <p:cSld>
+    <p:spTree>
+      <p:nvGrpSpPr>
+        <p:cNvPr id="1" name=""/>
+        <p:cNvGrpSpPr/>
+        <p:nvPr/>
+      </p:nvGrpSpPr>
+      <p:grpSpPr/>
+      <p:sp>
+        <p:nvSpPr>
+          <p:cNvPr id="2" name="TextBox 1"/>
+          <p:cNvSpPr txBox="1"/>
+          <p:nvPr/>
+        </p:nvSpPr>
+        <p:spPr>
+          <a:xfrm>
+            <a:off x="548640" y="320040"/>
+            <a:ext cx="10972800" cy="731520"/>
+          </a:xfrm>
+          <a:prstGeom prst="rect">
+            <a:avLst/>
+          </a:prstGeom>
+          <a:noFill/>
+        </p:spPr>
+        <p:txBody>
+          <a:bodyPr wrap="none">
+            <a:spAutoFit/>
+          </a:bodyPr>
+          <a:lstStyle/>
+          <a:p>
+            <a:pPr>
+              <a:defRPr sz="3000" b="1">
+                <a:solidFill>
+                  <a:srgbClr val="2BB5A6"/>
+                </a:solidFill>
+              </a:defRPr>
+            </a:pPr>
+            <a:r>
+              <a:t>Waar we in maart stonden</a:t>
+            </a:r>
+          </a:p>
+        </p:txBody>
+      </p:sp>
+      <p:sp>
+        <p:nvSpPr>
+          <p:cNvPr id="3" name="TextBox 2"/>
+          <p:cNvSpPr txBox="1"/>
+          <p:nvPr/>
+        </p:nvSpPr>
+        <p:spPr>
+          <a:xfrm>
+            <a:off x="548640" y="960120"/>
+            <a:ext cx="10972800" cy="548640"/>
+          </a:xfrm>
+          <a:prstGeom prst="rect">
+            <a:avLst/>
+          </a:prstGeom>
+          <a:noFill/>
+        </p:spPr>
+        <p:txBody>
+          <a:bodyPr wrap="none">
+            <a:spAutoFit/>
+          </a:bodyPr>
+          <a:lstStyle/>
+          <a:p>
+            <a:pPr>
+              <a:defRPr sz="1700">
+                <a:solidFill>
+                  <a:srgbClr val="1F3A3D"/>
+                </a:solidFill>
+              </a:defRPr>
+            </a:pPr>
+            <a:r>
+              <a:t>Eén afstand per scopevlak — en een oever is geen rechte lijn</a:t>
+            </a:r>
+          </a:p>
+        </p:txBody>
+      </p:sp>
+      <p:sp>
+        <p:nvSpPr>
+          <p:cNvPr id="4" name="TextBox 3"/>
+          <p:cNvSpPr txBox="1"/>
+          <p:nvPr/>
+        </p:nvSpPr>
+        <p:spPr>
+          <a:xfrm>
+            <a:off x="548640" y="6400800"/>
+            <a:ext cx="10972800" cy="274320"/>
+          </a:xfrm>
+          <a:prstGeom prst="rect">
+            <a:avLst/>
+          </a:prstGeom>
+          <a:noFill/>
+        </p:spPr>
+        <p:txBody>
+          <a:bodyPr wrap="none">
+            <a:spAutoFit/>
+          </a:bodyPr>
+          <a:lstStyle/>
+          <a:p>
+            <a:pPr>
+              <a:defRPr sz="1000">
+                <a:solidFill>
+                  <a:srgbClr val="6B7778"/>
+                </a:solidFill>
+              </a:defRPr>
+            </a:pPr>
+            <a:r>
+              <a:t>Oevererosietool · update 26-08-2026 · 2</a:t>
+            </a:r>
+          </a:p>
+        </p:txBody>
+      </p:sp>
+      <p:pic>
+        <p:nvPicPr>
+          <p:cNvPr id="5" name="Picture 4" descr="maas3_l_18580_18590.png"/>
+          <p:cNvPicPr>
+            <a:picLocks noChangeAspect="1"/>
+          </p:cNvPicPr>
+          <p:nvPr/>
+        </p:nvPicPr>
+        <p:blipFill>
+          <a:blip r:embed="rId2"/>
+          <a:stretch>
+            <a:fillRect/>
+          </a:stretch>
+        </p:blipFill>
+        <p:spPr>
+          <a:xfrm>
+            <a:off x="548640" y="1508760"/>
+            <a:ext cx="4619457" cy="4754880"/>
+          </a:xfrm>
+          <a:prstGeom prst="rect">
+            <a:avLst/>
+          </a:prstGeom>
+        </p:spPr>
+      </p:pic>
+      <p:sp>
+        <p:nvSpPr>
+          <p:cNvPr id="6" name="TextBox 5"/>
+          <p:cNvSpPr txBox="1"/>
+          <p:nvPr/>
+        </p:nvSpPr>
+        <p:spPr>
+          <a:xfrm>
+            <a:off x="5852160" y="1737360"/>
+            <a:ext cx="6035040" cy="4114800"/>
+          </a:xfrm>
+          <a:prstGeom prst="rect">
+            <a:avLst/>
+          </a:prstGeom>
+          <a:noFill/>
+        </p:spPr>
+        <p:txBody>
+          <a:bodyPr wrap="square">
+            <a:spAutoFit/>
+          </a:bodyPr>
+          <a:lstStyle/>
+          <a:p>
+            <a:pPr>
+              <a:spcAft>
+                <a:spcPts val="600"/>
+              </a:spcAft>
+              <a:defRPr sz="1600" b="0">
+                <a:solidFill>
+                  <a:srgbClr val="1F3A3D"/>
+                </a:solidFill>
+              </a:defRPr>
+            </a:pPr>
+            <a:r>
+              <a:t>• Alleen hoogtemodel (AHN3 / AHN4 / AHN5), 3–4 jaar tussen opnames</a:t>
+            </a:r>
+          </a:p>
+          <a:p>
+            <a:pPr>
+              <a:spcAft>
+                <a:spcPts val="600"/>
+              </a:spcAft>
+              <a:defRPr sz="1600" b="0">
+                <a:solidFill>
+                  <a:srgbClr val="1F3A3D"/>
+                </a:solidFill>
+              </a:defRPr>
+            </a:pPr>
+            <a:r>
+              <a:t>• Per vlak: één afstand tot de hartlijn per opname (gestippeld)</a:t>
+            </a:r>
+          </a:p>
+          <a:p>
+            <a:pPr>
+              <a:spcAft>
+                <a:spcPts val="600"/>
+              </a:spcAft>
+              <a:defRPr sz="1600" b="0">
+                <a:solidFill>
+                  <a:srgbClr val="1F3A3D"/>
+                </a:solidFill>
+              </a:defRPr>
+            </a:pPr>
+            <a:r>
+              <a:t>• De gemeten oever (groen) buigt 90°; de 'oever' van het model ligt 56 m verderop</a:t>
+            </a:r>
+          </a:p>
+          <a:p>
+            <a:pPr>
+              <a:spcAft>
+                <a:spcPts val="600"/>
+              </a:spcAft>
+              <a:defRPr sz="1600" b="0">
+                <a:solidFill>
+                  <a:srgbClr val="1F3A3D"/>
+                </a:solidFill>
+              </a:defRPr>
+            </a:pPr>
+            <a:r>
+              <a:t>• Fout 0,94 m/jr — maar 'neem het gemiddelde' deed het beter (0,78)</a:t>
+            </a:r>
+          </a:p>
+          <a:p>
+            <a:pPr>
+              <a:spcAft>
+                <a:spcPts val="600"/>
+              </a:spcAft>
+              <a:defRPr sz="1600" b="0">
+                <a:solidFill>
+                  <a:srgbClr val="1F3A3D"/>
+                </a:solidFill>
+              </a:defRPr>
+            </a:pPr>
+            <a:r>
+              <a:t>• Risicogevallen (&gt; 2 m/jr): 4,6 m/jr · 7.444 vlakken</a:t>
+            </a:r>
+          </a:p>
+        </p:txBody>
+      </p:sp>
+      <p:sp>
+        <p:nvSpPr>
+          <p:cNvPr id="7" name="TextBox 6"/>
+          <p:cNvSpPr txBox="1"/>
+          <p:nvPr/>
+        </p:nvSpPr>
+        <p:spPr>
+          <a:xfrm>
+            <a:off x="5852160" y="5669280"/>
+            <a:ext cx="6035040" cy="548640"/>
+          </a:xfrm>
+          <a:prstGeom prst="rect">
+            <a:avLst/>
+          </a:prstGeom>
+          <a:noFill/>
+        </p:spPr>
+        <p:txBody>
+          <a:bodyPr wrap="square">
+            <a:spAutoFit/>
+          </a:bodyPr>
+          <a:lstStyle/>
+          <a:p>
+            <a:pPr>
+              <a:defRPr sz="1200" i="1">
+                <a:solidFill>
+                  <a:srgbClr val="6B7778"/>
+                </a:solidFill>
+              </a:defRPr>
+            </a:pPr>
+            <a:r>
+              <a:t>paars = VVR / signaleringslijn · zwart = hartlijn · groen = gemeten oeverlijnen per jaar (donker = recenter)</a:t>
+            </a:r>
+          </a:p>
+        </p:txBody>
+      </p:sp>
+    </p:spTree>
+  </p:cSld>
+  <p:clrMapOvr>
+    <a:masterClrMapping/>
+  </p:clrMapOvr>
+</p:sld>
+</file>
+
+<file path=ppt/slides/slide3.xml><?xml version="1.0" encoding="utf-8"?>
+<p:sld xmlns:a="http://schemas.openxmlformats.org/drawingml/2006/main" xmlns:p="http://schemas.openxmlformats.org/presentationml/2006/main" xmlns:r="http://schemas.openxmlformats.org/officeDocument/2006/relationships">
+  <p:cSld>
+    <p:spTree>
+      <p:nvGrpSpPr>
+        <p:cNvPr id="1" name=""/>
+        <p:cNvGrpSpPr/>
+        <p:nvPr/>
+      </p:nvGrpSpPr>
+      <p:grpSpPr/>
+      <p:sp>
+        <p:nvSpPr>
+          <p:cNvPr id="2" name="TextBox 1"/>
+          <p:cNvSpPr txBox="1"/>
+          <p:nvPr/>
+        </p:nvSpPr>
+        <p:spPr>
+          <a:xfrm>
+            <a:off x="548640" y="320040"/>
+            <a:ext cx="10972800" cy="731520"/>
+          </a:xfrm>
+          <a:prstGeom prst="rect">
+            <a:avLst/>
+          </a:prstGeom>
+          <a:noFill/>
+        </p:spPr>
+        <p:txBody>
+          <a:bodyPr wrap="none">
+            <a:spAutoFit/>
+          </a:bodyPr>
+          <a:lstStyle/>
+          <a:p>
+            <a:pPr>
+              <a:defRPr sz="3000" b="1">
+                <a:solidFill>
+                  <a:srgbClr val="2BB5A6"/>
+                </a:solidFill>
+              </a:defRPr>
+            </a:pPr>
+            <a:r>
+              <a:t>Wat er sindsdien binnenkwam</a:t>
+            </a:r>
+          </a:p>
+        </p:txBody>
+      </p:sp>
+      <p:sp>
+        <p:nvSpPr>
+          <p:cNvPr id="3" name="TextBox 2"/>
+          <p:cNvSpPr txBox="1"/>
+          <p:nvPr/>
+        </p:nvSpPr>
+        <p:spPr>
+          <a:xfrm>
+            <a:off x="548640" y="960120"/>
+            <a:ext cx="10972800" cy="548640"/>
+          </a:xfrm>
+          <a:prstGeom prst="rect">
+            <a:avLst/>
+          </a:prstGeom>
+          <a:noFill/>
+        </p:spPr>
+        <p:txBody>
+          <a:bodyPr wrap="none">
+            <a:spAutoFit/>
+          </a:bodyPr>
+          <a:lstStyle/>
+          <a:p>
+            <a:pPr>
+              <a:defRPr sz="1700">
+                <a:solidFill>
+                  <a:srgbClr val="1F3A3D"/>
+                </a:solidFill>
+              </a:defRPr>
+            </a:pPr>
+            <a:r>
+              <a:t>Hybride levering: SAM + hoogtemodel · tot 11 meetmomenten · 1 jaar tussen t-punten</a:t>
+            </a:r>
+          </a:p>
+        </p:txBody>
+      </p:sp>
+      <p:sp>
+        <p:nvSpPr>
+          <p:cNvPr id="4" name="TextBox 3"/>
+          <p:cNvSpPr txBox="1"/>
+          <p:nvPr/>
+        </p:nvSpPr>
+        <p:spPr>
+          <a:xfrm>
+            <a:off x="548640" y="6400800"/>
+            <a:ext cx="10972800" cy="274320"/>
+          </a:xfrm>
+          <a:prstGeom prst="rect">
+            <a:avLst/>
+          </a:prstGeom>
+          <a:noFill/>
+        </p:spPr>
+        <p:txBody>
+          <a:bodyPr wrap="none">
+            <a:spAutoFit/>
+          </a:bodyPr>
+          <a:lstStyle/>
+          <a:p>
+            <a:pPr>
+              <a:defRPr sz="1000">
+                <a:solidFill>
+                  <a:srgbClr val="6B7778"/>
+                </a:solidFill>
+              </a:defRPr>
+            </a:pPr>
+            <a:r>
+              <a:t>Oevererosietool · update 26-08-2026 · 3</a:t>
+            </a:r>
+          </a:p>
+        </p:txBody>
+      </p:sp>
+      <p:pic>
+        <p:nvPicPr>
+          <p:cNvPr id="5" name="Picture 4" descr="aug-2.png"/>
+          <p:cNvPicPr>
+            <a:picLocks noChangeAspect="1"/>
+          </p:cNvPicPr>
+          <p:nvPr/>
+        </p:nvPicPr>
+        <p:blipFill>
+          <a:blip r:embed="rId2"/>
+          <a:stretch>
+            <a:fillRect/>
+          </a:stretch>
+        </p:blipFill>
+        <p:spPr>
+          <a:xfrm>
+            <a:off x="548640" y="1463040"/>
+            <a:ext cx="6675120" cy="3753902"/>
+          </a:xfrm>
+          <a:prstGeom prst="rect">
+            <a:avLst/>
+          </a:prstGeom>
+        </p:spPr>
+      </p:pic>
+      <p:graphicFrame>
+        <p:nvGraphicFramePr>
+          <p:cNvPr id="6" name="Table 5"/>
+          <p:cNvGraphicFramePr>
+            <a:graphicFrameLocks noGrp="1"/>
+          </p:cNvGraphicFramePr>
+          <p:nvPr/>
+        </p:nvGraphicFramePr>
+        <p:xfrm>
+          <a:off x="7406640" y="1554480"/>
+          <a:ext cx="4480560" cy="2560320"/>
+        </p:xfrm>
+        <a:graphic>
+          <a:graphicData uri="http://schemas.openxmlformats.org/drawingml/2006/table">
+            <a:tbl>
+              <a:tblPr firstRow="1" bandRow="1">
+                <a:tableStyleId>{5C22544A-7EE6-4342-B048-85BDC9FD1C3A}</a:tableStyleId>
+              </a:tblPr>
+              <a:tblGrid>
+                <a:gridCol w="2286000"/>
+                <a:gridCol w="1097280"/>
+                <a:gridCol w="1097280"/>
+              </a:tblGrid>
+              <a:tr h="365760">
+                <a:tc>
+                  <a:txBody>
+                    <a:bodyPr/>
+                    <a:lstStyle/>
+                    <a:p>
+                      <a:pPr>
+                        <a:defRPr sz="1100" b="1">
+                          <a:solidFill>
+                            <a:srgbClr val="1F3A3D"/>
+                          </a:solidFill>
+                        </a:defRPr>
+                      </a:pPr>
+                    </a:p>
+                  </a:txBody>
+                  <a:tcPr>
+                    <a:solidFill>
+                      <a:srgbClr val="E6F5F3"/>
+                    </a:solidFill>
+                  </a:tcPr>
+                </a:tc>
+                <a:tc>
+                  <a:txBody>
+                    <a:bodyPr/>
+                    <a:lstStyle/>
+                    <a:p>
+                      <a:pPr algn="ctr">
+                        <a:defRPr sz="1100" b="1">
+                          <a:solidFill>
+                            <a:srgbClr val="1F3A3D"/>
+                          </a:solidFill>
+                        </a:defRPr>
+                      </a:pPr>
+                      <a:r>
+                        <a:t>maart 2026</a:t>
+                      </a:r>
+                    </a:p>
+                    <a:p>
+                      <a:r>
+                        <a:t>alleen hoogtemodel</a:t>
+                      </a:r>
+                    </a:p>
+                  </a:txBody>
+                  <a:tcPr>
+                    <a:solidFill>
+                      <a:srgbClr val="E6F5F3"/>
+                    </a:solidFill>
+                  </a:tcPr>
+                </a:tc>
+                <a:tc>
+                  <a:txBody>
+                    <a:bodyPr/>
+                    <a:lstStyle/>
+                    <a:p>
+                      <a:pPr algn="ctr">
+                        <a:defRPr sz="1100" b="1">
+                          <a:solidFill>
+                            <a:srgbClr val="1F3A3D"/>
+                          </a:solidFill>
+                        </a:defRPr>
+                      </a:pPr>
+                      <a:r>
+                        <a:t>augustus 2026</a:t>
+                      </a:r>
+                    </a:p>
+                    <a:p>
+                      <a:r>
+                        <a:t>hybride</a:t>
+                      </a:r>
+                    </a:p>
+                  </a:txBody>
+                  <a:tcPr>
+                    <a:solidFill>
+                      <a:srgbClr val="E6F5F3"/>
+                    </a:solidFill>
+                  </a:tcPr>
+                </a:tc>
+              </a:tr>
+              <a:tr h="365760">
+                <a:tc>
+                  <a:txBody>
+                    <a:bodyPr/>
+                    <a:lstStyle/>
+                    <a:p>
+                      <a:pPr>
+                        <a:defRPr sz="1100" b="1">
+                          <a:solidFill>
+                            <a:srgbClr val="1F3A3D"/>
+                          </a:solidFill>
+                        </a:defRPr>
+                      </a:pPr>
+                      <a:r>
+                        <a:t>Baseline (naïef gemiddelde) — fout test</a:t>
+                      </a:r>
+                    </a:p>
+                  </a:txBody>
+                  <a:tcPr>
+                    <a:solidFill>
+                      <a:srgbClr val="FFFFFF"/>
+                    </a:solidFill>
+                  </a:tcPr>
+                </a:tc>
+                <a:tc>
+                  <a:txBody>
+                    <a:bodyPr/>
+                    <a:lstStyle/>
+                    <a:p>
+                      <a:pPr algn="ctr">
+                        <a:defRPr sz="1100" b="0">
+                          <a:solidFill>
+                            <a:srgbClr val="1F3A3D"/>
+                          </a:solidFill>
+                        </a:defRPr>
+                      </a:pPr>
+                      <a:r>
+                        <a:t>0,78</a:t>
+                      </a:r>
+                    </a:p>
+                  </a:txBody>
+                  <a:tcPr>
+                    <a:solidFill>
+                      <a:srgbClr val="FFFFFF"/>
+                    </a:solidFill>
+                  </a:tcPr>
+                </a:tc>
+                <a:tc>
+                  <a:txBody>
+                    <a:bodyPr/>
+                    <a:lstStyle/>
+                    <a:p>
+                      <a:pPr algn="ctr">
+                        <a:defRPr sz="1100" b="0">
+                          <a:solidFill>
+                            <a:srgbClr val="1F3A3D"/>
+                          </a:solidFill>
+                        </a:defRPr>
+                      </a:pPr>
+                      <a:r>
+                        <a:t>4,79</a:t>
+                      </a:r>
+                    </a:p>
+                  </a:txBody>
+                  <a:tcPr>
+                    <a:solidFill>
+                      <a:srgbClr val="FFFFFF"/>
+                    </a:solidFill>
+                  </a:tcPr>
+                </a:tc>
+              </a:tr>
+              <a:tr h="365760">
+                <a:tc>
+                  <a:txBody>
+                    <a:bodyPr/>
+                    <a:lstStyle/>
+                    <a:p>
+                      <a:pPr>
+                        <a:defRPr sz="1100" b="1">
+                          <a:solidFill>
+                            <a:srgbClr val="1F3A3D"/>
+                          </a:solidFill>
+                        </a:defRPr>
+                      </a:pPr>
+                      <a:r>
+                        <a:t>LightGBM — fout test</a:t>
+                      </a:r>
+                    </a:p>
+                  </a:txBody>
+                  <a:tcPr>
+                    <a:solidFill>
+                      <a:srgbClr val="FFFFFF"/>
+                    </a:solidFill>
+                  </a:tcPr>
+                </a:tc>
+                <a:tc>
+                  <a:txBody>
+                    <a:bodyPr/>
+                    <a:lstStyle/>
+                    <a:p>
+                      <a:pPr algn="ctr">
+                        <a:defRPr sz="1100" b="0">
+                          <a:solidFill>
+                            <a:srgbClr val="1F3A3D"/>
+                          </a:solidFill>
+                        </a:defRPr>
+                      </a:pPr>
+                      <a:r>
+                        <a:t>0,94</a:t>
+                      </a:r>
+                    </a:p>
+                  </a:txBody>
+                  <a:tcPr>
+                    <a:solidFill>
+                      <a:srgbClr val="FFFFFF"/>
+                    </a:solidFill>
+                  </a:tcPr>
+                </a:tc>
+                <a:tc>
+                  <a:txBody>
+                    <a:bodyPr/>
+                    <a:lstStyle/>
+                    <a:p>
+                      <a:pPr algn="ctr">
+                        <a:defRPr sz="1100" b="0">
+                          <a:solidFill>
+                            <a:srgbClr val="1F3A3D"/>
+                          </a:solidFill>
+                        </a:defRPr>
+                      </a:pPr>
+                      <a:r>
+                        <a:t>4,12</a:t>
+                      </a:r>
+                    </a:p>
+                  </a:txBody>
+                  <a:tcPr>
+                    <a:solidFill>
+                      <a:srgbClr val="FFFFFF"/>
+                    </a:solidFill>
+                  </a:tcPr>
+                </a:tc>
+              </a:tr>
+              <a:tr h="365760">
+                <a:tc>
+                  <a:txBody>
+                    <a:bodyPr/>
+                    <a:lstStyle/>
+                    <a:p>
+                      <a:pPr>
+                        <a:defRPr sz="1100" b="1">
+                          <a:solidFill>
+                            <a:srgbClr val="1F3A3D"/>
+                          </a:solidFill>
+                        </a:defRPr>
+                      </a:pPr>
+                      <a:r>
+                        <a:t>LightGBM t.o.v. baseline</a:t>
+                      </a:r>
+                    </a:p>
+                  </a:txBody>
+                  <a:tcPr>
+                    <a:solidFill>
+                      <a:srgbClr val="FFFFFF"/>
+                    </a:solidFill>
+                  </a:tcPr>
+                </a:tc>
+                <a:tc>
+                  <a:txBody>
+                    <a:bodyPr/>
+                    <a:lstStyle/>
+                    <a:p>
+                      <a:pPr algn="ctr">
+                        <a:defRPr sz="1100" b="0">
+                          <a:solidFill>
+                            <a:srgbClr val="1F3A3D"/>
+                          </a:solidFill>
+                        </a:defRPr>
+                      </a:pPr>
+                      <a:r>
+                        <a:t>20 % slechter</a:t>
+                      </a:r>
+                    </a:p>
+                  </a:txBody>
+                  <a:tcPr>
+                    <a:solidFill>
+                      <a:srgbClr val="FFFFFF"/>
+                    </a:solidFill>
+                  </a:tcPr>
+                </a:tc>
+                <a:tc>
+                  <a:txBody>
+                    <a:bodyPr/>
+                    <a:lstStyle/>
+                    <a:p>
+                      <a:pPr algn="ctr">
+                        <a:defRPr sz="1100" b="0">
+                          <a:solidFill>
+                            <a:srgbClr val="1F3A3D"/>
+                          </a:solidFill>
+                        </a:defRPr>
+                      </a:pPr>
+                      <a:r>
+                        <a:t>14 % beter</a:t>
+                      </a:r>
+                    </a:p>
+                  </a:txBody>
+                  <a:tcPr>
+                    <a:solidFill>
+                      <a:srgbClr val="FFFFFF"/>
+                    </a:solidFill>
+                  </a:tcPr>
+                </a:tc>
+              </a:tr>
+              <a:tr h="365760">
+                <a:tc>
+                  <a:txBody>
+                    <a:bodyPr/>
+                    <a:lstStyle/>
+                    <a:p>
+                      <a:pPr>
+                        <a:defRPr sz="1100" b="1">
+                          <a:solidFill>
+                            <a:srgbClr val="1F3A3D"/>
+                          </a:solidFill>
+                        </a:defRPr>
+                      </a:pPr>
+                      <a:r>
+                        <a:t>Spreiding doelvariabele (m/jr)</a:t>
+                      </a:r>
+                    </a:p>
+                  </a:txBody>
+                  <a:tcPr>
+                    <a:solidFill>
+                      <a:srgbClr val="FFFFFF"/>
+                    </a:solidFill>
+                  </a:tcPr>
+                </a:tc>
+                <a:tc>
+                  <a:txBody>
+                    <a:bodyPr/>
+                    <a:lstStyle/>
+                    <a:p>
+                      <a:pPr algn="ctr">
+                        <a:defRPr sz="1100" b="0">
+                          <a:solidFill>
+                            <a:srgbClr val="1F3A3D"/>
+                          </a:solidFill>
+                        </a:defRPr>
+                      </a:pPr>
+                      <a:r>
+                        <a:t>2,2</a:t>
+                      </a:r>
+                    </a:p>
+                  </a:txBody>
+                  <a:tcPr>
+                    <a:solidFill>
+                      <a:srgbClr val="FFFFFF"/>
+                    </a:solidFill>
+                  </a:tcPr>
+                </a:tc>
+                <a:tc>
+                  <a:txBody>
+                    <a:bodyPr/>
+                    <a:lstStyle/>
+                    <a:p>
+                      <a:pPr algn="ctr">
+                        <a:defRPr sz="1100" b="0">
+                          <a:solidFill>
+                            <a:srgbClr val="1F3A3D"/>
+                          </a:solidFill>
+                        </a:defRPr>
+                      </a:pPr>
+                      <a:r>
+                        <a:t>11,4</a:t>
+                      </a:r>
+                    </a:p>
+                  </a:txBody>
+                  <a:tcPr>
+                    <a:solidFill>
+                      <a:srgbClr val="FFFFFF"/>
+                    </a:solidFill>
+                  </a:tcPr>
+                </a:tc>
+              </a:tr>
+              <a:tr h="365760">
+                <a:tc>
+                  <a:txBody>
+                    <a:bodyPr/>
+                    <a:lstStyle/>
+                    <a:p>
+                      <a:pPr>
+                        <a:defRPr sz="1100" b="1">
+                          <a:solidFill>
+                            <a:srgbClr val="1F3A3D"/>
+                          </a:solidFill>
+                        </a:defRPr>
+                      </a:pPr>
+                      <a:r>
+                        <a:t>Tijd tussen t-punten</a:t>
+                      </a:r>
+                    </a:p>
+                  </a:txBody>
+                  <a:tcPr>
+                    <a:solidFill>
+                      <a:srgbClr val="FFFFFF"/>
+                    </a:solidFill>
+                  </a:tcPr>
+                </a:tc>
+                <a:tc>
+                  <a:txBody>
+                    <a:bodyPr/>
+                    <a:lstStyle/>
+                    <a:p>
+                      <a:pPr algn="ctr">
+                        <a:defRPr sz="1100" b="0">
+                          <a:solidFill>
+                            <a:srgbClr val="1F3A3D"/>
+                          </a:solidFill>
+                        </a:defRPr>
+                      </a:pPr>
+                      <a:r>
+                        <a:t>3–4 jaar</a:t>
+                      </a:r>
+                    </a:p>
+                  </a:txBody>
+                  <a:tcPr>
+                    <a:solidFill>
+                      <a:srgbClr val="FFFFFF"/>
+                    </a:solidFill>
+                  </a:tcPr>
+                </a:tc>
+                <a:tc>
+                  <a:txBody>
+                    <a:bodyPr/>
+                    <a:lstStyle/>
+                    <a:p>
+                      <a:pPr algn="ctr">
+                        <a:defRPr sz="1100" b="0">
+                          <a:solidFill>
+                            <a:srgbClr val="1F3A3D"/>
+                          </a:solidFill>
+                        </a:defRPr>
+                      </a:pPr>
+                      <a:r>
+                        <a:t>1 jaar</a:t>
+                      </a:r>
+                    </a:p>
+                  </a:txBody>
+                  <a:tcPr>
+                    <a:solidFill>
+                      <a:srgbClr val="FFFFFF"/>
+                    </a:solidFill>
+                  </a:tcPr>
+                </a:tc>
+              </a:tr>
+              <a:tr h="365760">
+                <a:tc>
+                  <a:txBody>
+                    <a:bodyPr/>
+                    <a:lstStyle/>
+                    <a:p>
+                      <a:pPr>
+                        <a:defRPr sz="1100" b="1">
+                          <a:solidFill>
+                            <a:srgbClr val="1F3A3D"/>
+                          </a:solidFill>
+                        </a:defRPr>
+                      </a:pPr>
+                      <a:r>
+                        <a:t>Regio's met voorspellingen</a:t>
+                      </a:r>
+                    </a:p>
+                  </a:txBody>
+                  <a:tcPr>
+                    <a:solidFill>
+                      <a:srgbClr val="FFFFFF"/>
+                    </a:solidFill>
+                  </a:tcPr>
+                </a:tc>
+                <a:tc>
+                  <a:txBody>
+                    <a:bodyPr/>
+                    <a:lstStyle/>
+                    <a:p>
+                      <a:pPr algn="ctr">
+                        <a:defRPr sz="1100" b="0">
+                          <a:solidFill>
+                            <a:srgbClr val="1F3A3D"/>
+                          </a:solidFill>
+                        </a:defRPr>
+                      </a:pPr>
+                      <a:r>
+                        <a:t>7.444</a:t>
+                      </a:r>
+                    </a:p>
+                  </a:txBody>
+                  <a:tcPr>
+                    <a:solidFill>
+                      <a:srgbClr val="FFFFFF"/>
+                    </a:solidFill>
+                  </a:tcPr>
+                </a:tc>
+                <a:tc>
+                  <a:txBody>
+                    <a:bodyPr/>
+                    <a:lstStyle/>
+                    <a:p>
+                      <a:pPr algn="ctr">
+                        <a:defRPr sz="1100" b="0">
+                          <a:solidFill>
+                            <a:srgbClr val="1F3A3D"/>
+                          </a:solidFill>
+                        </a:defRPr>
+                      </a:pPr>
+                      <a:r>
+                        <a:t>8.006</a:t>
+                      </a:r>
+                    </a:p>
+                  </a:txBody>
+                  <a:tcPr>
+                    <a:solidFill>
+                      <a:srgbClr val="FFFFFF"/>
+                    </a:solidFill>
+                  </a:tcPr>
+                </a:tc>
+              </a:tr>
+            </a:tbl>
+          </a:graphicData>
+        </a:graphic>
+      </p:graphicFrame>
+      <p:sp>
+        <p:nvSpPr>
+          <p:cNvPr id="7" name="TextBox 6"/>
+          <p:cNvSpPr txBox="1"/>
+          <p:nvPr/>
+        </p:nvSpPr>
+        <p:spPr>
+          <a:xfrm>
+            <a:off x="7406640" y="4572000"/>
+            <a:ext cx="4480560" cy="548640"/>
+          </a:xfrm>
+          <a:prstGeom prst="rect">
+            <a:avLst/>
+          </a:prstGeom>
+          <a:noFill/>
+        </p:spPr>
+        <p:txBody>
+          <a:bodyPr wrap="square">
+            <a:spAutoFit/>
+          </a:bodyPr>
+          <a:lstStyle/>
+          <a:p>
+            <a:pPr>
+              <a:defRPr sz="1200" i="0">
+                <a:solidFill>
+                  <a:srgbClr val="1F3A3D"/>
+                </a:solidFill>
+              </a:defRPr>
+            </a:pPr>
+            <a:r>
+              <a:t>Dezelfde meetruis, gedeeld door een 4× kleiner tijdsverschil: het doel wordt 4× ruiziger en élke fout groeit mee — ook die van de baseline. Relatief verslaat het model nu voor het eerst de baseline.</a:t>
+            </a:r>
+          </a:p>
+        </p:txBody>
+      </p:sp>
+    </p:spTree>
+  </p:cSld>
+  <p:clrMapOvr>
+    <a:masterClrMapping/>
+  </p:clrMapOvr>
+</p:sld>
+</file>
+
+<file path=ppt/slides/slide4.xml><?xml version="1.0" encoding="utf-8"?>
+<p:sld xmlns:a="http://schemas.openxmlformats.org/drawingml/2006/main" xmlns:p="http://schemas.openxmlformats.org/presentationml/2006/main" xmlns:r="http://schemas.openxmlformats.org/officeDocument/2006/relationships">
+  <p:cSld>
+    <p:spTree>
+      <p:nvGrpSpPr>
+        <p:cNvPr id="1" name=""/>
+        <p:cNvGrpSpPr/>
+        <p:nvPr/>
+      </p:nvGrpSpPr>
+      <p:grpSpPr/>
+      <p:sp>
+        <p:nvSpPr>
+          <p:cNvPr id="2" name="TextBox 1"/>
+          <p:cNvSpPr txBox="1"/>
+          <p:nvPr/>
+        </p:nvSpPr>
+        <p:spPr>
+          <a:xfrm>
+            <a:off x="548640" y="320040"/>
+            <a:ext cx="10972800" cy="731520"/>
+          </a:xfrm>
+          <a:prstGeom prst="rect">
+            <a:avLst/>
+          </a:prstGeom>
+          <a:noFill/>
+        </p:spPr>
+        <p:txBody>
+          <a:bodyPr wrap="none">
+            <a:spAutoFit/>
+          </a:bodyPr>
+          <a:lstStyle/>
+          <a:p>
+            <a:pPr>
+              <a:defRPr sz="3000" b="1">
+                <a:solidFill>
+                  <a:srgbClr val="2BB5A6"/>
+                </a:solidFill>
+              </a:defRPr>
+            </a:pPr>
+            <a:r>
+              <a:t>Drie assen om te verbeteren</a:t>
+            </a:r>
+          </a:p>
+        </p:txBody>
+      </p:sp>
+      <p:sp>
+        <p:nvSpPr>
+          <p:cNvPr id="3" name="TextBox 2"/>
+          <p:cNvSpPr txBox="1"/>
+          <p:nvPr/>
+        </p:nvSpPr>
+        <p:spPr>
+          <a:xfrm>
+            <a:off x="548640" y="960120"/>
+            <a:ext cx="10972800" cy="548640"/>
+          </a:xfrm>
+          <a:prstGeom prst="rect">
+            <a:avLst/>
+          </a:prstGeom>
+          <a:noFill/>
+        </p:spPr>
+        <p:txBody>
+          <a:bodyPr wrap="none">
+            <a:spAutoFit/>
+          </a:bodyPr>
+          <a:lstStyle/>
+          <a:p>
+            <a:pPr>
+              <a:defRPr sz="1700">
+                <a:solidFill>
+                  <a:srgbClr val="1F3A3D"/>
+                </a:solidFill>
+              </a:defRPr>
+            </a:pPr>
+            <a:r>
+              <a:t>Uitgangspunt: het model van 19 augustus, resolutie 1, één vaste testset van 1.174 vlakken</a:t>
+            </a:r>
+          </a:p>
+        </p:txBody>
+      </p:sp>
+      <p:sp>
+        <p:nvSpPr>
+          <p:cNvPr id="4" name="TextBox 3"/>
+          <p:cNvSpPr txBox="1"/>
+          <p:nvPr/>
+        </p:nvSpPr>
+        <p:spPr>
+          <a:xfrm>
+            <a:off x="548640" y="6400800"/>
+            <a:ext cx="10972800" cy="274320"/>
+          </a:xfrm>
+          <a:prstGeom prst="rect">
+            <a:avLst/>
+          </a:prstGeom>
+          <a:noFill/>
+        </p:spPr>
+        <p:txBody>
+          <a:bodyPr wrap="none">
+            <a:spAutoFit/>
+          </a:bodyPr>
+          <a:lstStyle/>
+          <a:p>
+            <a:pPr>
+              <a:defRPr sz="1000">
+                <a:solidFill>
+                  <a:srgbClr val="6B7778"/>
+                </a:solidFill>
+              </a:defRPr>
+            </a:pPr>
+            <a:r>
+              <a:t>Oevererosietool · update 26-08-2026 · 4</a:t>
+            </a:r>
+          </a:p>
+        </p:txBody>
+      </p:sp>
+      <p:sp>
+        <p:nvSpPr>
+          <p:cNvPr id="5" name="Rectangle 4"/>
+          <p:cNvSpPr/>
+          <p:nvPr/>
+        </p:nvSpPr>
+        <p:spPr>
+          <a:xfrm>
+            <a:off x="548640" y="1645920"/>
+            <a:ext cx="3566160" cy="548640"/>
+          </a:xfrm>
+          <a:prstGeom prst="rect">
+            <a:avLst/>
+          </a:prstGeom>
+          <a:solidFill>
+            <a:srgbClr val="2BB5A6"/>
+          </a:solidFill>
+          <a:ln>
+            <a:noFill/>
+          </a:ln>
+        </p:spPr>
+        <p:style>
+          <a:lnRef idx="1">
+            <a:schemeClr val="accent1"/>
+          </a:lnRef>
+          <a:fillRef idx="3">
+            <a:schemeClr val="accent1"/>
+          </a:fillRef>
+          <a:effectRef idx="2">
+            <a:schemeClr val="accent1"/>
+          </a:effectRef>
+          <a:fontRef idx="minor">
+            <a:schemeClr val="lt1"/>
+          </a:fontRef>
+        </p:style>
+        <p:txBody>
+          <a:bodyPr rtlCol="0" anchor="ctr"/>
+          <a:lstStyle/>
+          <a:p>
+            <a:pPr algn="ctr">
+              <a:defRPr sz="1800" b="1">
+                <a:solidFill>
+                  <a:srgbClr val="FFFFFF"/>
+                </a:solidFill>
+              </a:defRPr>
+            </a:pPr>
+            <a:r>
+              <a:t>1 · Opschonen</a:t>
+            </a:r>
+          </a:p>
+        </p:txBody>
+      </p:sp>
+      <p:sp>
+        <p:nvSpPr>
+          <p:cNvPr id="6" name="TextBox 5"/>
+          <p:cNvSpPr txBox="1"/>
+          <p:nvPr/>
+        </p:nvSpPr>
+        <p:spPr>
+          <a:xfrm>
+            <a:off x="548640" y="2377440"/>
+            <a:ext cx="3566160" cy="3474720"/>
+          </a:xfrm>
+          <a:prstGeom prst="rect">
+            <a:avLst/>
+          </a:prstGeom>
+          <a:noFill/>
+        </p:spPr>
+        <p:txBody>
+          <a:bodyPr wrap="square">
+            <a:spAutoFit/>
+          </a:bodyPr>
+          <a:lstStyle/>
+          <a:p>
+            <a:pPr>
+              <a:spcAft>
+                <a:spcPts val="600"/>
+              </a:spcAft>
+              <a:defRPr sz="1500" b="0">
+                <a:solidFill>
+                  <a:srgbClr val="1F3A3D"/>
+                </a:solidFill>
+              </a:defRPr>
+            </a:pPr>
+            <a:r>
+              <a:t>• Verkeerde-oever-detecties weghalen zónder de meting weg te gooien</a:t>
+            </a:r>
+          </a:p>
+          <a:p>
+            <a:pPr>
+              <a:spcAft>
+                <a:spcPts val="600"/>
+              </a:spcAft>
+              <a:defRPr sz="1500" b="0">
+                <a:solidFill>
+                  <a:srgbClr val="1F3A3D"/>
+                </a:solidFill>
+              </a:defRPr>
+            </a:pPr>
+            <a:r>
+              <a:t>• Kribben, bruggen, nevengeulen, doolhoven, fragmenten, uitschieters in de tijd</a:t>
+            </a:r>
+          </a:p>
+        </p:txBody>
+      </p:sp>
+      <p:sp>
+        <p:nvSpPr>
+          <p:cNvPr id="7" name="Rectangle 6"/>
+          <p:cNvSpPr/>
+          <p:nvPr/>
+        </p:nvSpPr>
+        <p:spPr>
+          <a:xfrm>
+            <a:off x="4389120" y="1645920"/>
+            <a:ext cx="3566160" cy="548640"/>
+          </a:xfrm>
+          <a:prstGeom prst="rect">
+            <a:avLst/>
+          </a:prstGeom>
+          <a:solidFill>
+            <a:srgbClr val="2BB5A6"/>
+          </a:solidFill>
+          <a:ln>
+            <a:noFill/>
+          </a:ln>
+        </p:spPr>
+        <p:style>
+          <a:lnRef idx="1">
+            <a:schemeClr val="accent1"/>
+          </a:lnRef>
+          <a:fillRef idx="3">
+            <a:schemeClr val="accent1"/>
+          </a:fillRef>
+          <a:effectRef idx="2">
+            <a:schemeClr val="accent1"/>
+          </a:effectRef>
+          <a:fontRef idx="minor">
+            <a:schemeClr val="lt1"/>
+          </a:fontRef>
+        </p:style>
+        <p:txBody>
+          <a:bodyPr rtlCol="0" anchor="ctr"/>
+          <a:lstStyle/>
+          <a:p>
+            <a:pPr algn="ctr">
+              <a:defRPr sz="1800" b="1">
+                <a:solidFill>
+                  <a:srgbClr val="FFFFFF"/>
+                </a:solidFill>
+              </a:defRPr>
+            </a:pPr>
+            <a:r>
+              <a:t>2 · Meerdere t-punten</a:t>
+            </a:r>
+          </a:p>
+        </p:txBody>
+      </p:sp>
+      <p:sp>
+        <p:nvSpPr>
+          <p:cNvPr id="8" name="TextBox 7"/>
+          <p:cNvSpPr txBox="1"/>
+          <p:nvPr/>
+        </p:nvSpPr>
+        <p:spPr>
+          <a:xfrm>
+            <a:off x="4389120" y="2377440"/>
+            <a:ext cx="3566160" cy="3474720"/>
+          </a:xfrm>
+          <a:prstGeom prst="rect">
+            <a:avLst/>
+          </a:prstGeom>
+          <a:noFill/>
+        </p:spPr>
+        <p:txBody>
+          <a:bodyPr wrap="square">
+            <a:spAutoFit/>
+          </a:bodyPr>
+          <a:lstStyle/>
+          <a:p>
+            <a:pPr>
+              <a:spcAft>
+                <a:spcPts val="600"/>
+              </a:spcAft>
+              <a:defRPr sz="1500" b="0">
+                <a:solidFill>
+                  <a:srgbClr val="1F3A3D"/>
+                </a:solidFill>
+              </a:defRPr>
+            </a:pPr>
+            <a:r>
+              <a:t>• Snelheid als trend over álle metingen</a:t>
+            </a:r>
+          </a:p>
+          <a:p>
+            <a:pPr>
+              <a:spcAft>
+                <a:spcPts val="600"/>
+              </a:spcAft>
+              <a:defRPr sz="1500" b="0">
+                <a:solidFill>
+                  <a:srgbClr val="1F3A3D"/>
+                </a:solidFill>
+              </a:defRPr>
+            </a:pPr>
+            <a:r>
+              <a:t>• Versnelling, terugkeer naar gemiddelde, recente helling als feature</a:t>
+            </a:r>
+          </a:p>
+        </p:txBody>
+      </p:sp>
+      <p:sp>
+        <p:nvSpPr>
+          <p:cNvPr id="9" name="Rectangle 8"/>
+          <p:cNvSpPr/>
+          <p:nvPr/>
+        </p:nvSpPr>
+        <p:spPr>
+          <a:xfrm>
+            <a:off x="8229600" y="1645920"/>
+            <a:ext cx="3566160" cy="548640"/>
+          </a:xfrm>
+          <a:prstGeom prst="rect">
+            <a:avLst/>
+          </a:prstGeom>
+          <a:solidFill>
+            <a:srgbClr val="2BB5A6"/>
+          </a:solidFill>
+          <a:ln>
+            <a:noFill/>
+          </a:ln>
+        </p:spPr>
+        <p:style>
+          <a:lnRef idx="1">
+            <a:schemeClr val="accent1"/>
+          </a:lnRef>
+          <a:fillRef idx="3">
+            <a:schemeClr val="accent1"/>
+          </a:fillRef>
+          <a:effectRef idx="2">
+            <a:schemeClr val="accent1"/>
+          </a:effectRef>
+          <a:fontRef idx="minor">
+            <a:schemeClr val="lt1"/>
+          </a:fontRef>
+        </p:style>
+        <p:txBody>
+          <a:bodyPr rtlCol="0" anchor="ctr"/>
+          <a:lstStyle/>
+          <a:p>
+            <a:pPr algn="ctr">
+              <a:defRPr sz="1800" b="1">
+                <a:solidFill>
+                  <a:srgbClr val="FFFFFF"/>
+                </a:solidFill>
+              </a:defRPr>
+            </a:pPr>
+            <a:r>
+              <a:t>3 · Resolutie</a:t>
+            </a:r>
+          </a:p>
+        </p:txBody>
+      </p:sp>
+      <p:sp>
+        <p:nvSpPr>
+          <p:cNvPr id="10" name="TextBox 9"/>
+          <p:cNvSpPr txBox="1"/>
+          <p:nvPr/>
+        </p:nvSpPr>
+        <p:spPr>
+          <a:xfrm>
+            <a:off x="8229600" y="2377440"/>
+            <a:ext cx="3566160" cy="3474720"/>
+          </a:xfrm>
+          <a:prstGeom prst="rect">
+            <a:avLst/>
+          </a:prstGeom>
+          <a:noFill/>
+        </p:spPr>
+        <p:txBody>
+          <a:bodyPr wrap="square">
+            <a:spAutoFit/>
+          </a:bodyPr>
+          <a:lstStyle/>
+          <a:p>
+            <a:pPr>
+              <a:spcAft>
+                <a:spcPts val="600"/>
+              </a:spcAft>
+              <a:defRPr sz="1500" b="0">
+                <a:solidFill>
+                  <a:srgbClr val="1F3A3D"/>
+                </a:solidFill>
+              </a:defRPr>
+            </a:pPr>
+            <a:r>
+              <a:t>• Meerdere segmenten per vlak in plaats van één afstand</a:t>
+            </a:r>
+          </a:p>
+          <a:p>
+            <a:pPr>
+              <a:spcAft>
+                <a:spcPts val="600"/>
+              </a:spcAft>
+              <a:defRPr sz="1500" b="0">
+                <a:solidFill>
+                  <a:srgbClr val="1F3A3D"/>
+                </a:solidFill>
+              </a:defRPr>
+            </a:pPr>
+            <a:r>
+              <a:t>• Gemeten én voorspelde oever als lijn</a:t>
+            </a:r>
+          </a:p>
+        </p:txBody>
+      </p:sp>
+      <p:sp>
+        <p:nvSpPr>
+          <p:cNvPr id="11" name="TextBox 10"/>
+          <p:cNvSpPr txBox="1"/>
+          <p:nvPr/>
+        </p:nvSpPr>
+        <p:spPr>
+          <a:xfrm>
+            <a:off x="548640" y="5577840"/>
+            <a:ext cx="10972800" cy="548640"/>
+          </a:xfrm>
+          <a:prstGeom prst="rect">
+            <a:avLst/>
+          </a:prstGeom>
+          <a:noFill/>
+        </p:spPr>
+        <p:txBody>
+          <a:bodyPr wrap="square">
+            <a:spAutoFit/>
+          </a:bodyPr>
+          <a:lstStyle/>
+          <a:p>
+            <a:pPr>
+              <a:defRPr sz="1300" i="0">
+                <a:solidFill>
+                  <a:srgbClr val="1F3A3D"/>
+                </a:solidFill>
+              </a:defRPr>
+            </a:pPr>
+            <a:r>
+              <a:t>Leeswijzer: op deze vaste testset scoort het model van 19 augustus 3,99 m/jr (4,12 op de eigen split van toen). Alle cijfers hierna zijn op deze set, zodat stappen optelbaar zijn.</a:t>
+            </a:r>
+          </a:p>
+        </p:txBody>
+      </p:sp>
+    </p:spTree>
+  </p:cSld>
+  <p:clrMapOvr>
+    <a:masterClrMapping/>
+  </p:clrMapOvr>
+</p:sld>
+</file>
+
+<file path=ppt/slides/slide5.xml><?xml version="1.0" encoding="utf-8"?>
+<p:sld xmlns:a="http://schemas.openxmlformats.org/drawingml/2006/main" xmlns:p="http://schemas.openxmlformats.org/presentationml/2006/main" xmlns:r="http://schemas.openxmlformats.org/officeDocument/2006/relationships">
+  <p:cSld>
+    <p:spTree>
+      <p:nvGrpSpPr>
+        <p:cNvPr id="1" name=""/>
+        <p:cNvGrpSpPr/>
+        <p:nvPr/>
+      </p:nvGrpSpPr>
+      <p:grpSpPr/>
+      <p:sp>
+        <p:nvSpPr>
+          <p:cNvPr id="2" name="TextBox 1"/>
+          <p:cNvSpPr txBox="1"/>
+          <p:nvPr/>
+        </p:nvSpPr>
+        <p:spPr>
+          <a:xfrm>
+            <a:off x="548640" y="320040"/>
+            <a:ext cx="10972800" cy="731520"/>
+          </a:xfrm>
+          <a:prstGeom prst="rect">
+            <a:avLst/>
+          </a:prstGeom>
+          <a:noFill/>
+        </p:spPr>
+        <p:txBody>
+          <a:bodyPr wrap="none">
+            <a:spAutoFit/>
+          </a:bodyPr>
+          <a:lstStyle/>
+          <a:p>
+            <a:pPr>
+              <a:defRPr sz="3000" b="1">
+                <a:solidFill>
+                  <a:srgbClr val="2BB5A6"/>
+                </a:solidFill>
+              </a:defRPr>
+            </a:pPr>
+            <a:r>
+              <a:t>As 1 · Opschonen: van 3,99 naar 2,27</a:t>
+            </a:r>
+          </a:p>
+        </p:txBody>
+      </p:sp>
+      <p:sp>
+        <p:nvSpPr>
+          <p:cNvPr id="3" name="TextBox 2"/>
+          <p:cNvSpPr txBox="1"/>
+          <p:nvPr/>
+        </p:nvSpPr>
+        <p:spPr>
+          <a:xfrm>
+            <a:off x="548640" y="960120"/>
+            <a:ext cx="10972800" cy="548640"/>
+          </a:xfrm>
+          <a:prstGeom prst="rect">
+            <a:avLst/>
+          </a:prstGeom>
+          <a:noFill/>
+        </p:spPr>
+        <p:txBody>
+          <a:bodyPr wrap="none">
+            <a:spAutoFit/>
+          </a:bodyPr>
+          <a:lstStyle/>
+          <a:p>
+            <a:pPr>
+              <a:defRPr sz="1700">
+                <a:solidFill>
+                  <a:srgbClr val="1F3A3D"/>
+                </a:solidFill>
+              </a:defRPr>
+            </a:pPr>
+            <a:r>
+              <a:t>Zeven regels — herstellen in plaats van weggooien</a:t>
+            </a:r>
+          </a:p>
+        </p:txBody>
+      </p:sp>
+      <p:sp>
+        <p:nvSpPr>
+          <p:cNvPr id="4" name="TextBox 3"/>
+          <p:cNvSpPr txBox="1"/>
+          <p:nvPr/>
+        </p:nvSpPr>
+        <p:spPr>
+          <a:xfrm>
+            <a:off x="548640" y="6400800"/>
+            <a:ext cx="10972800" cy="274320"/>
+          </a:xfrm>
+          <a:prstGeom prst="rect">
+            <a:avLst/>
+          </a:prstGeom>
+          <a:noFill/>
+        </p:spPr>
+        <p:txBody>
+          <a:bodyPr wrap="none">
+            <a:spAutoFit/>
+          </a:bodyPr>
+          <a:lstStyle/>
+          <a:p>
+            <a:pPr>
+              <a:defRPr sz="1000">
+                <a:solidFill>
+                  <a:srgbClr val="6B7778"/>
+                </a:solidFill>
+              </a:defRPr>
+            </a:pPr>
+            <a:r>
+              <a:t>Oevererosietool · update 26-08-2026 · 5</a:t>
+            </a:r>
+          </a:p>
+        </p:txBody>
+      </p:sp>
+      <p:pic>
+        <p:nvPicPr>
+          <p:cNvPr id="5" name="Picture 4" descr="cleaning_ladder.png"/>
+          <p:cNvPicPr>
+            <a:picLocks noChangeAspect="1"/>
+          </p:cNvPicPr>
+          <p:nvPr/>
+        </p:nvPicPr>
+        <p:blipFill>
+          <a:blip r:embed="rId2"/>
+          <a:stretch>
+            <a:fillRect/>
+          </a:stretch>
+        </p:blipFill>
+        <p:spPr>
+          <a:xfrm>
+            <a:off x="548640" y="1463040"/>
+            <a:ext cx="6949440" cy="2902971"/>
+          </a:xfrm>
+          <a:prstGeom prst="rect">
+            <a:avLst/>
+          </a:prstGeom>
+        </p:spPr>
+      </p:pic>
+      <p:pic>
+        <p:nvPicPr>
+          <p:cNvPr id="6" name="Picture 5" descr="aug-3.png"/>
+          <p:cNvPicPr>
+            <a:picLocks noChangeAspect="1"/>
+          </p:cNvPicPr>
+          <p:nvPr/>
+        </p:nvPicPr>
+        <p:blipFill>
+          <a:blip r:embed="rId3"/>
+          <a:stretch>
+            <a:fillRect/>
+          </a:stretch>
+        </p:blipFill>
+        <p:spPr>
+          <a:xfrm>
+            <a:off x="7589520" y="1463040"/>
+            <a:ext cx="4297680" cy="2416896"/>
+          </a:xfrm>
+          <a:prstGeom prst="rect">
+            <a:avLst/>
+          </a:prstGeom>
+        </p:spPr>
+      </p:pic>
+      <p:sp>
+        <p:nvSpPr>
+          <p:cNvPr id="7" name="TextBox 6"/>
+          <p:cNvSpPr txBox="1"/>
+          <p:nvPr/>
+        </p:nvSpPr>
+        <p:spPr>
+          <a:xfrm>
+            <a:off x="548640" y="4572000"/>
+            <a:ext cx="6949440" cy="1737360"/>
+          </a:xfrm>
+          <a:prstGeom prst="rect">
+            <a:avLst/>
+          </a:prstGeom>
+          <a:noFill/>
+        </p:spPr>
+        <p:txBody>
+          <a:bodyPr wrap="square">
+            <a:spAutoFit/>
+          </a:bodyPr>
+          <a:lstStyle/>
+          <a:p>
+            <a:pPr>
+              <a:spcAft>
+                <a:spcPts val="400"/>
+              </a:spcAft>
+              <a:defRPr sz="1300" b="0">
+                <a:solidFill>
+                  <a:srgbClr val="1F3A3D"/>
+                </a:solidFill>
+              </a:defRPr>
+            </a:pPr>
+            <a:r>
+              <a:t>• Kronkelende lijnen, verkeerde oever, doolhoven, fragmenten, te weinig punten, uitschieters t.o.v. de trend</a:t>
+            </a:r>
+          </a:p>
+          <a:p>
+            <a:pPr>
+              <a:spcAft>
+                <a:spcPts val="400"/>
+              </a:spcAft>
+              <a:defRPr sz="1300" b="0">
+                <a:solidFill>
+                  <a:srgbClr val="1F3A3D"/>
+                </a:solidFill>
+              </a:defRPr>
+            </a:pPr>
+            <a:r>
+              <a:t>• Een uitschieter kost één meting, niet het hele vlak: +511 vlakken t.o.v. de oude |v| &gt; 50-filter</a:t>
+            </a:r>
+          </a:p>
+          <a:p>
+            <a:pPr>
+              <a:spcAft>
+                <a:spcPts val="400"/>
+              </a:spcAft>
+              <a:defRPr sz="1300" b="0">
+                <a:solidFill>
+                  <a:srgbClr val="1F3A3D"/>
+                </a:solidFill>
+              </a:defRPr>
+            </a:pPr>
+            <a:r>
+              <a:t>• Elke variant visueel gecontroleerd (50+ varianten, dekking blijft 0,94)</a:t>
+            </a:r>
+          </a:p>
+        </p:txBody>
+      </p:sp>
+      <p:sp>
+        <p:nvSpPr>
+          <p:cNvPr id="8" name="TextBox 7"/>
+          <p:cNvSpPr txBox="1"/>
+          <p:nvPr/>
+        </p:nvSpPr>
+        <p:spPr>
+          <a:xfrm>
+            <a:off x="7589520" y="4023360"/>
+            <a:ext cx="4297680" cy="548640"/>
+          </a:xfrm>
+          <a:prstGeom prst="rect">
+            <a:avLst/>
+          </a:prstGeom>
+          <a:noFill/>
+        </p:spPr>
+        <p:txBody>
+          <a:bodyPr wrap="square">
+            <a:spAutoFit/>
+          </a:bodyPr>
+          <a:lstStyle/>
+          <a:p>
+            <a:pPr>
+              <a:defRPr sz="1100" i="1">
+                <a:solidFill>
+                  <a:srgbClr val="6B7778"/>
+                </a:solidFill>
+              </a:defRPr>
+            </a:pPr>
+            <a:r>
+              <a:t>Kribben · meeroeverig · bruggen · doolhoven · randen</a:t>
+            </a:r>
+          </a:p>
+        </p:txBody>
+      </p:sp>
+    </p:spTree>
+  </p:cSld>
+  <p:clrMapOvr>
+    <a:masterClrMapping/>
+  </p:clrMapOvr>
+</p:sld>
+</file>
+
+<file path=ppt/slides/slide6.xml><?xml version="1.0" encoding="utf-8"?>
+<p:sld xmlns:a="http://schemas.openxmlformats.org/drawingml/2006/main" xmlns:p="http://schemas.openxmlformats.org/presentationml/2006/main" xmlns:r="http://schemas.openxmlformats.org/officeDocument/2006/relationships">
+  <p:cSld>
+    <p:spTree>
+      <p:nvGrpSpPr>
+        <p:cNvPr id="1" name=""/>
+        <p:cNvGrpSpPr/>
+        <p:nvPr/>
+      </p:nvGrpSpPr>
+      <p:grpSpPr/>
+      <p:sp>
+        <p:nvSpPr>
+          <p:cNvPr id="2" name="TextBox 1"/>
+          <p:cNvSpPr txBox="1"/>
+          <p:nvPr/>
+        </p:nvSpPr>
+        <p:spPr>
+          <a:xfrm>
+            <a:off x="548640" y="320040"/>
+            <a:ext cx="10972800" cy="731520"/>
+          </a:xfrm>
+          <a:prstGeom prst="rect">
+            <a:avLst/>
+          </a:prstGeom>
+          <a:noFill/>
+        </p:spPr>
+        <p:txBody>
+          <a:bodyPr wrap="none">
+            <a:spAutoFit/>
+          </a:bodyPr>
+          <a:lstStyle/>
+          <a:p>
+            <a:pPr>
+              <a:defRPr sz="3000" b="1">
+                <a:solidFill>
+                  <a:srgbClr val="2BB5A6"/>
+                </a:solidFill>
+              </a:defRPr>
+            </a:pPr>
+            <a:r>
+              <a:t>As 1 · Kribben en kunstwerken: nu een laag, geen gok meer</a:t>
+            </a:r>
+          </a:p>
+        </p:txBody>
+      </p:sp>
+      <p:sp>
+        <p:nvSpPr>
+          <p:cNvPr id="3" name="TextBox 2"/>
+          <p:cNvSpPr txBox="1"/>
+          <p:nvPr/>
+        </p:nvSpPr>
+        <p:spPr>
+          <a:xfrm>
+            <a:off x="548640" y="960120"/>
+            <a:ext cx="10972800" cy="548640"/>
+          </a:xfrm>
+          <a:prstGeom prst="rect">
+            <a:avLst/>
+          </a:prstGeom>
+          <a:noFill/>
+        </p:spPr>
+        <p:txBody>
+          <a:bodyPr wrap="none">
+            <a:spAutoFit/>
+          </a:bodyPr>
+          <a:lstStyle/>
+          <a:p>
+            <a:pPr>
+              <a:defRPr sz="1700">
+                <a:solidFill>
+                  <a:srgbClr val="1F3A3D"/>
+                </a:solidFill>
+              </a:defRPr>
+            </a:pPr>
+            <a:r>
+              <a:t>Deze week geleverd: kribben landelijk (1.922 → 4.698) + 6.386 kunstwerken</a:t>
+            </a:r>
+          </a:p>
+        </p:txBody>
+      </p:sp>
+      <p:sp>
+        <p:nvSpPr>
+          <p:cNvPr id="4" name="TextBox 3"/>
+          <p:cNvSpPr txBox="1"/>
+          <p:nvPr/>
+        </p:nvSpPr>
+        <p:spPr>
+          <a:xfrm>
+            <a:off x="548640" y="6400800"/>
+            <a:ext cx="10972800" cy="274320"/>
+          </a:xfrm>
+          <a:prstGeom prst="rect">
+            <a:avLst/>
+          </a:prstGeom>
+          <a:noFill/>
+        </p:spPr>
+        <p:txBody>
+          <a:bodyPr wrap="none">
+            <a:spAutoFit/>
+          </a:bodyPr>
+          <a:lstStyle/>
+          <a:p>
+            <a:pPr>
+              <a:defRPr sz="1000">
+                <a:solidFill>
+                  <a:srgbClr val="6B7778"/>
+                </a:solidFill>
+              </a:defRPr>
+            </a:pPr>
+            <a:r>
+              <a:t>Oevererosietool · update 26-08-2026 · 6</a:t>
+            </a:r>
+          </a:p>
+        </p:txBody>
+      </p:sp>
+      <p:pic>
+        <p:nvPicPr>
+          <p:cNvPr id="5" name="Picture 4" descr="nederrijn_r_4780_4790.png"/>
+          <p:cNvPicPr>
+            <a:picLocks noChangeAspect="1"/>
+          </p:cNvPicPr>
+          <p:nvPr/>
+        </p:nvPicPr>
+        <p:blipFill>
+          <a:blip r:embed="rId2"/>
+          <a:stretch>
+            <a:fillRect/>
+          </a:stretch>
+        </p:blipFill>
+        <p:spPr>
+          <a:xfrm>
+            <a:off x="548640" y="1463040"/>
+            <a:ext cx="6766560" cy="3566490"/>
+          </a:xfrm>
+          <a:prstGeom prst="rect">
+            <a:avLst/>
+          </a:prstGeom>
+        </p:spPr>
+      </p:pic>
+      <p:pic>
+        <p:nvPicPr>
+          <p:cNvPr id="6" name="Picture 5" descr="structures_ablation.png"/>
+          <p:cNvPicPr>
+            <a:picLocks noChangeAspect="1"/>
+          </p:cNvPicPr>
+          <p:nvPr/>
+        </p:nvPicPr>
+        <p:blipFill>
+          <a:blip r:embed="rId3"/>
+          <a:stretch>
+            <a:fillRect/>
+          </a:stretch>
+        </p:blipFill>
+        <p:spPr>
+          <a:xfrm>
+            <a:off x="7406640" y="1463040"/>
+            <a:ext cx="4572000" cy="1909849"/>
+          </a:xfrm>
+          <a:prstGeom prst="rect">
+            <a:avLst/>
+          </a:prstGeom>
+        </p:spPr>
+      </p:pic>
+      <p:sp>
+        <p:nvSpPr>
+          <p:cNvPr id="7" name="TextBox 6"/>
+          <p:cNvSpPr txBox="1"/>
+          <p:nvPr/>
+        </p:nvSpPr>
+        <p:spPr>
+          <a:xfrm>
+            <a:off x="7406640" y="4023360"/>
+            <a:ext cx="4572000" cy="2286000"/>
+          </a:xfrm>
+          <a:prstGeom prst="rect">
+            <a:avLst/>
+          </a:prstGeom>
+          <a:noFill/>
+        </p:spPr>
+        <p:txBody>
+          <a:bodyPr wrap="square">
+            <a:spAutoFit/>
+          </a:bodyPr>
+          <a:lstStyle/>
+          <a:p>
+            <a:pPr>
+              <a:spcAft>
+                <a:spcPts val="400"/>
+              </a:spcAft>
+              <a:defRPr sz="1200" b="0">
+                <a:solidFill>
+                  <a:srgbClr val="1F3A3D"/>
+                </a:solidFill>
+              </a:defRPr>
+            </a:pPr>
+            <a:r>
+              <a:t>• Op de vaste testset is de laag metrisch neutraal: de opschoonregels vangen deze artefacten al</a:t>
+            </a:r>
+          </a:p>
+          <a:p>
+            <a:pPr>
+              <a:spcAft>
+                <a:spcPts val="400"/>
+              </a:spcAft>
+              <a:defRPr sz="1200" b="0">
+                <a:solidFill>
+                  <a:srgbClr val="1F3A3D"/>
+                </a:solidFill>
+              </a:defRPr>
+            </a:pPr>
+            <a:r>
+              <a:t>• Wél: 218 vlakken vallen af waarvan de 'oever' een constructie was — juistheid en dekking, geen foutwinst</a:t>
+            </a:r>
+          </a:p>
+          <a:p>
+            <a:pPr>
+              <a:spcAft>
+                <a:spcPts val="400"/>
+              </a:spcAft>
+              <a:defRPr sz="1200" b="0">
+                <a:solidFill>
+                  <a:srgbClr val="1F3A3D"/>
+                </a:solidFill>
+              </a:defRPr>
+            </a:pPr>
+            <a:r>
+              <a:t>• Les: wat een regel kan afleiden, hoeft niet gelabeld · wat een regel níet kan zien, wel</a:t>
+            </a:r>
+          </a:p>
+        </p:txBody>
+      </p:sp>
+      <p:sp>
+        <p:nvSpPr>
+          <p:cNvPr id="8" name="TextBox 7"/>
+          <p:cNvSpPr txBox="1"/>
+          <p:nvPr/>
+        </p:nvSpPr>
+        <p:spPr>
+          <a:xfrm>
+            <a:off x="548640" y="5760720"/>
+            <a:ext cx="6766560" cy="548640"/>
+          </a:xfrm>
+          <a:prstGeom prst="rect">
+            <a:avLst/>
+          </a:prstGeom>
+          <a:noFill/>
+        </p:spPr>
+        <p:txBody>
+          <a:bodyPr wrap="square">
+            <a:spAutoFit/>
+          </a:bodyPr>
+          <a:lstStyle/>
+          <a:p>
+            <a:pPr>
+              <a:defRPr sz="1100" i="1">
+                <a:solidFill>
+                  <a:srgbClr val="6B7778"/>
+                </a:solidFill>
+              </a:defRPr>
+            </a:pPr>
+            <a:r>
+              <a:t>links: zonder masker · rechts: met kribben + bruggen/kades/steigers (10 m) · grijs = constructie · paars = VVR</a:t>
+            </a:r>
+          </a:p>
+        </p:txBody>
+      </p:sp>
+    </p:spTree>
+  </p:cSld>
+  <p:clrMapOvr>
+    <a:masterClrMapping/>
+  </p:clrMapOvr>
+</p:sld>
+</file>
+
+<file path=ppt/slides/slide7.xml><?xml version="1.0" encoding="utf-8"?>
+<p:sld xmlns:a="http://schemas.openxmlformats.org/drawingml/2006/main" xmlns:p="http://schemas.openxmlformats.org/presentationml/2006/main" xmlns:r="http://schemas.openxmlformats.org/officeDocument/2006/relationships">
+  <p:cSld>
+    <p:spTree>
+      <p:nvGrpSpPr>
+        <p:cNvPr id="1" name=""/>
+        <p:cNvGrpSpPr/>
+        <p:nvPr/>
+      </p:nvGrpSpPr>
+      <p:grpSpPr/>
+      <p:sp>
+        <p:nvSpPr>
+          <p:cNvPr id="2" name="TextBox 1"/>
+          <p:cNvSpPr txBox="1"/>
+          <p:nvPr/>
+        </p:nvSpPr>
+        <p:spPr>
+          <a:xfrm>
+            <a:off x="548640" y="320040"/>
+            <a:ext cx="10972800" cy="731520"/>
+          </a:xfrm>
+          <a:prstGeom prst="rect">
+            <a:avLst/>
+          </a:prstGeom>
+          <a:noFill/>
+        </p:spPr>
+        <p:txBody>
+          <a:bodyPr wrap="none">
+            <a:spAutoFit/>
+          </a:bodyPr>
+          <a:lstStyle/>
+          <a:p>
+            <a:pPr>
+              <a:defRPr sz="3000" b="1">
+                <a:solidFill>
+                  <a:srgbClr val="2BB5A6"/>
+                </a:solidFill>
+              </a:defRPr>
+            </a:pPr>
+            <a:r>
+              <a:t>As 2 · Meerdere t-punten: van 2,27 naar 2,13</a:t>
+            </a:r>
+          </a:p>
+        </p:txBody>
+      </p:sp>
+      <p:sp>
+        <p:nvSpPr>
+          <p:cNvPr id="3" name="TextBox 2"/>
+          <p:cNvSpPr txBox="1"/>
+          <p:nvPr/>
+        </p:nvSpPr>
+        <p:spPr>
+          <a:xfrm>
+            <a:off x="548640" y="960120"/>
+            <a:ext cx="10972800" cy="548640"/>
+          </a:xfrm>
+          <a:prstGeom prst="rect">
+            <a:avLst/>
+          </a:prstGeom>
+          <a:noFill/>
+        </p:spPr>
+        <p:txBody>
+          <a:bodyPr wrap="none">
+            <a:spAutoFit/>
+          </a:bodyPr>
+          <a:lstStyle/>
+          <a:p>
+            <a:pPr>
+              <a:defRPr sz="1700">
+                <a:solidFill>
+                  <a:srgbClr val="1F3A3D"/>
+                </a:solidFill>
+              </a:defRPr>
+            </a:pPr>
+            <a:r>
+              <a:t>Historie-features op resolutie 1 — en de horizon als meetlat voor het alarm</a:t>
+            </a:r>
+          </a:p>
+        </p:txBody>
+      </p:sp>
+      <p:sp>
+        <p:nvSpPr>
+          <p:cNvPr id="4" name="TextBox 3"/>
+          <p:cNvSpPr txBox="1"/>
+          <p:nvPr/>
+        </p:nvSpPr>
+        <p:spPr>
+          <a:xfrm>
+            <a:off x="548640" y="6400800"/>
+            <a:ext cx="10972800" cy="274320"/>
+          </a:xfrm>
+          <a:prstGeom prst="rect">
+            <a:avLst/>
+          </a:prstGeom>
+          <a:noFill/>
+        </p:spPr>
+        <p:txBody>
+          <a:bodyPr wrap="none">
+            <a:spAutoFit/>
+          </a:bodyPr>
+          <a:lstStyle/>
+          <a:p>
+            <a:pPr>
+              <a:defRPr sz="1000">
+                <a:solidFill>
+                  <a:srgbClr val="6B7778"/>
+                </a:solidFill>
+              </a:defRPr>
+            </a:pPr>
+            <a:r>
+              <a:t>Oevererosietool · update 26-08-2026 · 7</a:t>
+            </a:r>
+          </a:p>
+        </p:txBody>
+      </p:sp>
+      <p:pic>
+        <p:nvPicPr>
+          <p:cNvPr id="5" name="Picture 4" descr="history.png"/>
+          <p:cNvPicPr>
+            <a:picLocks noChangeAspect="1"/>
+          </p:cNvPicPr>
+          <p:nvPr/>
+        </p:nvPicPr>
+        <p:blipFill>
+          <a:blip r:embed="rId2"/>
+          <a:stretch>
+            <a:fillRect/>
+          </a:stretch>
+        </p:blipFill>
+        <p:spPr>
+          <a:xfrm>
+            <a:off x="548640" y="1463040"/>
+            <a:ext cx="6766560" cy="2826577"/>
+          </a:xfrm>
+          <a:prstGeom prst="rect">
+            <a:avLst/>
+          </a:prstGeom>
+        </p:spPr>
+      </p:pic>
+      <p:sp>
+        <p:nvSpPr>
+          <p:cNvPr id="6" name="TextBox 5"/>
+          <p:cNvSpPr txBox="1"/>
+          <p:nvPr/>
+        </p:nvSpPr>
+        <p:spPr>
+          <a:xfrm>
+            <a:off x="7498079" y="1554480"/>
+            <a:ext cx="4480560" cy="4754880"/>
+          </a:xfrm>
+          <a:prstGeom prst="rect">
+            <a:avLst/>
+          </a:prstGeom>
+          <a:noFill/>
+        </p:spPr>
+        <p:txBody>
+          <a:bodyPr wrap="square">
+            <a:spAutoFit/>
+          </a:bodyPr>
+          <a:lstStyle/>
+          <a:p>
+            <a:pPr>
+              <a:spcAft>
+                <a:spcPts val="400"/>
+              </a:spcAft>
+              <a:defRPr sz="1300" b="1">
+                <a:solidFill>
+                  <a:srgbClr val="1F3A3D"/>
+                </a:solidFill>
+              </a:defRPr>
+            </a:pPr>
+            <a:r>
+              <a:t>Features uit de hele meetreeks</a:t>
+            </a:r>
+          </a:p>
+          <a:p>
+            <a:pPr>
+              <a:spcAft>
+                <a:spcPts val="400"/>
+              </a:spcAft>
+              <a:defRPr sz="1300" b="0">
+                <a:solidFill>
+                  <a:srgbClr val="1F3A3D"/>
+                </a:solidFill>
+              </a:defRPr>
+            </a:pPr>
+            <a:r>
+              <a:t>• Trend (Theil–Sen), spreiding om de trend, versnelling, terugkeer naar gemiddelde, recente helling</a:t>
+            </a:r>
+          </a:p>
+          <a:p>
+            <a:pPr>
+              <a:spcAft>
+                <a:spcPts val="400"/>
+              </a:spcAft>
+              <a:defRPr sz="1300" b="1">
+                <a:solidFill>
+                  <a:srgbClr val="1F3A3D"/>
+                </a:solidFill>
+              </a:defRPr>
+            </a:pPr>
+            <a:r>
+              <a:t>Wat níet werkte</a:t>
+            </a:r>
+          </a:p>
+          <a:p>
+            <a:pPr>
+              <a:spcAft>
+                <a:spcPts val="400"/>
+              </a:spcAft>
+              <a:defRPr sz="1300" b="0">
+                <a:solidFill>
+                  <a:srgbClr val="1F3A3D"/>
+                </a:solidFill>
+              </a:defRPr>
+            </a:pPr>
+            <a:r>
+              <a:t>• Trainen op losse jaar-op-jaar stappen (sub-jaar ruis), huber-loss (beter gemiddeld, slechter op de staart), debiet</a:t>
+            </a:r>
+          </a:p>
+          <a:p>
+            <a:pPr>
+              <a:spcAft>
+                <a:spcPts val="400"/>
+              </a:spcAft>
+              <a:defRPr sz="1300" b="1">
+                <a:solidFill>
+                  <a:srgbClr val="1F3A3D"/>
+                </a:solidFill>
+              </a:defRPr>
+            </a:pPr>
+            <a:r>
+              <a:t>Horizon ≥ 2 jaar — voor het alarm</a:t>
+            </a:r>
+          </a:p>
+          <a:p>
+            <a:pPr>
+              <a:spcAft>
+                <a:spcPts val="400"/>
+              </a:spcAft>
+              <a:defRPr sz="1300" b="0">
+                <a:solidFill>
+                  <a:srgbClr val="1F3A3D"/>
+                </a:solidFill>
+              </a:defRPr>
+            </a:pPr>
+            <a:r>
+              <a:t>• Hoogtemodel-paren zijn altijd 3–5 jaar uit elkaar; SAM-paren 1 jaar → ruis</a:t>
+            </a:r>
+          </a:p>
+          <a:p>
+            <a:pPr>
+              <a:spcAft>
+                <a:spcPts val="400"/>
+              </a:spcAft>
+              <a:defRPr sz="1300" b="0">
+                <a:solidFill>
+                  <a:srgbClr val="1F3A3D"/>
+                </a:solidFill>
+              </a:defRPr>
+            </a:pPr>
+            <a:r>
+              <a:t>• Zelfde doel (m/jr), zelfde fout, alleen paren ≥ 2 jaar: 1 vlak met 6 metingen = 10 leervoorbeelden</a:t>
             </a:r>
           </a:p>
         </p:txBody>
@@ -7587,7 +7904,7 @@
               </a:defRPr>
             </a:pPr>
             <a:r>
-              <a:t>Waar kwam de winst vandaan?</a:t>
+              <a:t>As 3 · Resolutie: van scalar naar oeverlijn</a:t>
             </a:r>
           </a:p>
         </p:txBody>
@@ -7622,7 +7939,7 @@
               </a:defRPr>
             </a:pPr>
             <a:r>
-              <a:t>Het model was nooit de bottleneck — de labels waren het</a:t>
+              <a:t>Eén afstand per vlak verbergt dat 20 m hard erodeert en 80 m stil ligt</a:t>
             </a:r>
           </a:p>
         </p:txBody>
@@ -7664,7 +7981,7 @@
       </p:sp>
       <p:pic>
         <p:nvPicPr>
-          <p:cNvPr id="5" name="Picture 4" descr="three_axes.png"/>
+          <p:cNvPr id="5" name="Picture 4" descr="maas3_r_8930_8940.png"/>
           <p:cNvPicPr>
             <a:picLocks noChangeAspect="1"/>
           </p:cNvPicPr>
@@ -7678,8 +7995,8 @@
         </p:blipFill>
         <p:spPr>
           <a:xfrm>
-            <a:off x="731520" y="1554480"/>
-            <a:ext cx="10698480" cy="4469047"/>
+            <a:off x="548640" y="1463040"/>
+            <a:ext cx="6216996" cy="4846320"/>
           </a:xfrm>
           <a:prstGeom prst="rect">
             <a:avLst/>
@@ -7694,8 +8011,8 @@
         </p:nvSpPr>
         <p:spPr>
           <a:xfrm>
-            <a:off x="731520" y="5943600"/>
-            <a:ext cx="10698480" cy="548640"/>
+            <a:off x="6035040" y="1554480"/>
+            <a:ext cx="5943600" cy="4754880"/>
           </a:xfrm>
           <a:prstGeom prst="rect">
             <a:avLst/>
@@ -7709,14 +8026,137 @@
           <a:lstStyle/>
           <a:p>
             <a:pPr>
-              <a:defRPr sz="1300" i="1">
-                <a:solidFill>
-                  <a:srgbClr val="6B7778"/>
-                </a:solidFill>
-              </a:defRPr>
-            </a:pPr>
-            <a:r>
-              <a:t>As 1 (opschonen): −1,72 m/jr · As 2 (modelleren): −0,14 m/jr · As 3 (resolutie) verandert de meetlat en staat hier niet in</a:t>
+              <a:spcAft>
+                <a:spcPts val="400"/>
+              </a:spcAft>
+              <a:defRPr sz="1300" b="1">
+                <a:solidFill>
+                  <a:srgbClr val="1F3A3D"/>
+                </a:solidFill>
+              </a:defRPr>
+            </a:pPr>
+            <a:r>
+              <a:t>Wat je ziet</a:t>
+            </a:r>
+          </a:p>
+          <a:p>
+            <a:pPr>
+              <a:spcAft>
+                <a:spcPts val="400"/>
+              </a:spcAft>
+              <a:defRPr sz="1300" b="0">
+                <a:solidFill>
+                  <a:srgbClr val="1F3A3D"/>
+                </a:solidFill>
+              </a:defRPr>
+            </a:pPr>
+            <a:r>
+              <a:t>• groen = gemeten oever per segment (2026) · bruin = voorspeld 2027 per segment</a:t>
+            </a:r>
+          </a:p>
+          <a:p>
+            <a:pPr>
+              <a:spcAft>
+                <a:spcPts val="400"/>
+              </a:spcAft>
+              <a:defRPr sz="1300" b="0">
+                <a:solidFill>
+                  <a:srgbClr val="1F3A3D"/>
+                </a:solidFill>
+              </a:defRPr>
+            </a:pPr>
+            <a:r>
+              <a:t>• gestippeld = de oude voorspelling: één getal voor het hele vlak</a:t>
+            </a:r>
+          </a:p>
+          <a:p>
+            <a:pPr>
+              <a:spcAft>
+                <a:spcPts val="400"/>
+              </a:spcAft>
+              <a:defRPr sz="1300" b="0">
+                <a:solidFill>
+                  <a:srgbClr val="1F3A3D"/>
+                </a:solidFill>
+              </a:defRPr>
+            </a:pPr>
+            <a:r>
+              <a:t>• paars = VVR / signaleringslijn</a:t>
+            </a:r>
+          </a:p>
+          <a:p>
+            <a:pPr>
+              <a:spcAft>
+                <a:spcPts val="400"/>
+              </a:spcAft>
+              <a:defRPr sz="1300" b="1">
+                <a:solidFill>
+                  <a:srgbClr val="1F3A3D"/>
+                </a:solidFill>
+              </a:defRPr>
+            </a:pPr>
+            <a:r>
+              <a:t>Dit vlak</a:t>
+            </a:r>
+          </a:p>
+          <a:p>
+            <a:pPr>
+              <a:spcAft>
+                <a:spcPts val="400"/>
+              </a:spcAft>
+              <a:defRPr sz="1300" b="0">
+                <a:solidFill>
+                  <a:srgbClr val="1F3A3D"/>
+                </a:solidFill>
+              </a:defRPr>
+            </a:pPr>
+            <a:r>
+              <a:t>• Eén getal zegt −9,7 m/jr; de vijf segmenten lopen van −17,1 tot +1,4</a:t>
+            </a:r>
+          </a:p>
+          <a:p>
+            <a:pPr>
+              <a:spcAft>
+                <a:spcPts val="400"/>
+              </a:spcAft>
+              <a:defRPr sz="1300" b="0">
+                <a:solidFill>
+                  <a:srgbClr val="1F3A3D"/>
+                </a:solidFill>
+              </a:defRPr>
+            </a:pPr>
+            <a:r>
+              <a:t>• Het bovenste segment nadert de VVR; de rest niet — het alarm hoort per segment te kijken</a:t>
+            </a:r>
+          </a:p>
+          <a:p>
+            <a:pPr>
+              <a:spcAft>
+                <a:spcPts val="400"/>
+              </a:spcAft>
+              <a:defRPr sz="1300" b="1">
+                <a:solidFill>
+                  <a:srgbClr val="1F3A3D"/>
+                </a:solidFill>
+              </a:defRPr>
+            </a:pPr>
+            <a:r>
+              <a:t>Vandaag</a:t>
+            </a:r>
+          </a:p>
+          <a:p>
+            <a:pPr>
+              <a:spcAft>
+                <a:spcPts val="400"/>
+              </a:spcAft>
+              <a:defRPr sz="1300" b="0">
+                <a:solidFill>
+                  <a:srgbClr val="1F3A3D"/>
+                </a:solidFill>
+              </a:defRPr>
+            </a:pPr>
+            <a:r>
+              <a:t>• VVR-jaar = één drempel per vlak (het verst gelegen punt van de signaleringslijn) tegen één scalar → per definitie laat</a:t>
             </a:r>
           </a:p>
         </p:txBody>
@@ -7769,7 +8209,7 @@
               </a:defRPr>
             </a:pPr>
             <a:r>
-              <a:t>Wat 'opschonen' betekende</a:t>
+              <a:t>As 3 · Hoe fijn kan het?</a:t>
             </a:r>
           </a:p>
         </p:txBody>
@@ -7804,7 +8244,7 @@
               </a:defRPr>
             </a:pPr>
             <a:r>
-              <a:t>Zeven regels — elk een gok naar iets dat iemand in deze zaal zéker weet</a:t>
+              <a:t>Zelfde vlak, R = 1 … 100 · en de fout op de vaste testset per R</a:t>
             </a:r>
           </a:p>
         </p:txBody>
@@ -7846,7 +8286,7 @@
       </p:sp>
       <p:pic>
         <p:nvPicPr>
-          <p:cNvPr id="5" name="Picture 4" descr="aug-3.png"/>
+          <p:cNvPr id="5" name="Picture 4" descr="maas3_r_8930_8940.png"/>
           <p:cNvPicPr>
             <a:picLocks noChangeAspect="1"/>
           </p:cNvPicPr>
@@ -7860,24 +8300,48 @@
         </p:blipFill>
         <p:spPr>
           <a:xfrm>
-            <a:off x="548640" y="1554480"/>
-            <a:ext cx="7498079" cy="4216711"/>
+            <a:off x="548640" y="1371600"/>
+            <a:ext cx="5760720" cy="3280921"/>
           </a:xfrm>
           <a:prstGeom prst="rect">
             <a:avLst/>
           </a:prstGeom>
         </p:spPr>
       </p:pic>
-      <p:sp>
-        <p:nvSpPr>
-          <p:cNvPr id="6" name="TextBox 5"/>
+      <p:pic>
+        <p:nvPicPr>
+          <p:cNvPr id="6" name="Picture 5" descr="resolution_sweep.png"/>
+          <p:cNvPicPr>
+            <a:picLocks noChangeAspect="1"/>
+          </p:cNvPicPr>
+          <p:nvPr/>
+        </p:nvPicPr>
+        <p:blipFill>
+          <a:blip r:embed="rId3"/>
+          <a:stretch>
+            <a:fillRect/>
+          </a:stretch>
+        </p:blipFill>
+        <p:spPr>
+          <a:xfrm>
+            <a:off x="6400800" y="1371600"/>
+            <a:ext cx="5577840" cy="2330016"/>
+          </a:xfrm>
+          <a:prstGeom prst="rect">
+            <a:avLst/>
+          </a:prstGeom>
+        </p:spPr>
+      </p:pic>
+      <p:sp>
+        <p:nvSpPr>
+          <p:cNvPr id="7" name="TextBox 6"/>
           <p:cNvSpPr txBox="1"/>
           <p:nvPr/>
         </p:nvSpPr>
         <p:spPr>
           <a:xfrm>
-            <a:off x="8229600" y="1645920"/>
-            <a:ext cx="3840480" cy="4572000"/>
+            <a:off x="548640" y="4754880"/>
+            <a:ext cx="11430000" cy="1645920"/>
           </a:xfrm>
           <a:prstGeom prst="rect">
             <a:avLst/>
@@ -7892,106 +8356,61 @@
           <a:p>
             <a:pPr>
               <a:spcAft>
-                <a:spcPts val="500"/>
+                <a:spcPts val="300"/>
               </a:spcAft>
-              <a:defRPr sz="1400" b="0">
+              <a:defRPr sz="1200" b="0">
                 <a:solidFill>
                   <a:srgbClr val="1F3A3D"/>
                 </a:solidFill>
               </a:defRPr>
             </a:pPr>
             <a:r>
-              <a:t>• Is dit een krib, brug, steiger of kade?</a:t>
+              <a:t>• De segment-representatie (bruin) volgt de gemeten oever vanaf R ≈ 5–10; bij R = 50–100 raken segmenten leeg (rood)</a:t>
             </a:r>
           </a:p>
           <a:p>
             <a:pPr>
               <a:spcAft>
-                <a:spcPts val="500"/>
+                <a:spcPts val="300"/>
               </a:spcAft>
-              <a:defRPr sz="1400" b="0">
+              <a:defRPr sz="1200" b="0">
                 <a:solidFill>
                   <a:srgbClr val="1F3A3D"/>
                 </a:solidFill>
               </a:defRPr>
             </a:pPr>
             <a:r>
-              <a:t>• Is dit de rivieroever of een nevengeul, plas of haven?</a:t>
+              <a:t>• Fout per segment daalt van 2,25 (R = 1) naar 1,88 (R = 5) en 1,61 (R = 20) — kleiner wordt nauwkeuriger, niet ruiziger</a:t>
             </a:r>
           </a:p>
           <a:p>
             <a:pPr>
               <a:spcAft>
-                <a:spcPts val="500"/>
+                <a:spcPts val="300"/>
               </a:spcAft>
-              <a:defRPr sz="1400" b="0">
+              <a:defRPr sz="1200" b="0">
                 <a:solidFill>
                   <a:srgbClr val="1F3A3D"/>
                 </a:solidFill>
               </a:defRPr>
             </a:pPr>
             <a:r>
-              <a:t>• Is dit één oever of de overkant?</a:t>
+              <a:t>• Terug-samengevoegd per vlak blijft de fout ≈ 2,1–2,2: het vlak-getal zelf heeft een vloer (0,5–1,1 m/jr representatiefout)</a:t>
             </a:r>
           </a:p>
           <a:p>
             <a:pPr>
               <a:spcAft>
-                <a:spcPts val="500"/>
+                <a:spcPts val="300"/>
               </a:spcAft>
-              <a:defRPr sz="1400" b="0">
+              <a:defRPr sz="1200" b="0">
                 <a:solidFill>
                   <a:srgbClr val="1F3A3D"/>
                 </a:solidFill>
               </a:defRPr>
             </a:pPr>
             <a:r>
-              <a:t>• Is deze meting 15 m van de trend een fout of een echte gebeurtenis?</a:t>
-            </a:r>
-          </a:p>
-          <a:p>
-            <a:pPr>
-              <a:spcAft>
-                <a:spcPts val="500"/>
-              </a:spcAft>
-              <a:defRPr sz="1400" b="1">
-                <a:solidFill>
-                  <a:srgbClr val="1F3A3D"/>
-                </a:solidFill>
-              </a:defRPr>
-            </a:pPr>
-            <a:r>
-              <a:t>Elke gok kost dekking of maakt fouten</a:t>
-            </a:r>
-          </a:p>
-          <a:p>
-            <a:pPr>
-              <a:spcAft>
-                <a:spcPts val="500"/>
-              </a:spcAft>
-              <a:defRPr sz="1400" b="0">
-                <a:solidFill>
-                  <a:srgbClr val="1F3A3D"/>
-                </a:solidFill>
-              </a:defRPr>
-            </a:pPr>
-            <a:r>
-              <a:t>• 5,9 % van de metingen in 'normale' vlakken kwam uit een nevengeul</a:t>
-            </a:r>
-          </a:p>
-          <a:p>
-            <a:pPr>
-              <a:spcAft>
-                <a:spcPts val="500"/>
-              </a:spcAft>
-              <a:defRPr sz="1400" b="0">
-                <a:solidFill>
-                  <a:srgbClr val="1F3A3D"/>
-                </a:solidFill>
-              </a:defRPr>
-            </a:pPr>
-            <a:r>
-              <a:t>• Kribben-masker alleen: 60 % van de lijnpunten bij een krib was géén oever</a:t>
+              <a:t>• Grens ligt bij de lijnbemonstering (60 punten per lijn), niet bij het model · praktisch: R = 5–10 (≈ 10–20 m)</a:t>
             </a:r>
           </a:p>
         </p:txBody>
